--- a/エステサロン出資・採用支援スキーム（透明版）.pptx
+++ b/エステサロン出資・採用支援スキーム（透明版）.pptx
@@ -1302,7 +1302,7 @@
     <p:bg>
       <p:bgPr>
         <a:solidFill>
-          <a:srgbClr val="0F1F33"/>
+          <a:srgbClr val="0F3D38"/>
         </a:solidFill>
       </p:bgPr>
     </p:bg>
@@ -1328,7 +1328,7 @@
         </p:nvSpPr>
         <p:spPr>
           <a:xfrm>
-            <a:off x="731520" y="640080"/>
+            <a:off x="777240" y="777240"/>
             <a:ext cx="7315200" cy="365760"/>
           </a:xfrm>
           <a:prstGeom prst="rect">
@@ -1345,17 +1345,17 @@
               <a:buNone/>
             </a:pPr>
             <a:r>
-              <a:rPr lang="en-US" sz="1400" spc="200" kern="0" dirty="0">
-                <a:solidFill>
-                  <a:srgbClr val="1FA795"/>
-                </a:solidFill>
-                <a:latin typeface="Calibri" pitchFamily="34" charset="0"/>
-                <a:ea typeface="Calibri" pitchFamily="34" charset="-122"/>
-                <a:cs typeface="Calibri" pitchFamily="34" charset="-120"/>
-              </a:rPr>
-              <a:t>株式会社ランデックス</a:t>
-            </a:r>
-            <a:endParaRPr lang="en-US" sz="1400" dirty="0"/>
+              <a:rPr lang="en-US" sz="1500" spc="200" kern="0" dirty="0">
+                <a:solidFill>
+                  <a:srgbClr val="E6C877"/>
+                </a:solidFill>
+                <a:latin typeface="Calibri" pitchFamily="34" charset="0"/>
+                <a:ea typeface="Calibri" pitchFamily="34" charset="-122"/>
+                <a:cs typeface="Calibri" pitchFamily="34" charset="-120"/>
+              </a:rPr>
+              <a:t>〇〇サロン様へのご提案</a:t>
+            </a:r>
+            <a:endParaRPr lang="en-US" sz="1500" dirty="0"/>
           </a:p>
         </p:txBody>
       </p:sp>
@@ -1367,8 +1367,8 @@
         </p:nvSpPr>
         <p:spPr>
           <a:xfrm>
-            <a:off x="731520" y="1554480"/>
-            <a:ext cx="10515600" cy="2011680"/>
+            <a:off x="777240" y="1783080"/>
+            <a:ext cx="10607040" cy="1280160"/>
           </a:xfrm>
           <a:prstGeom prst="rect">
             <a:avLst/>
@@ -1381,13 +1381,10 @@
           <a:lstStyle/>
           <a:p>
             <a:pPr indent="0" marL="0">
-              <a:lnSpc>
-                <a:spcPts val="5400"/>
-              </a:lnSpc>
-              <a:buNone/>
-            </a:pPr>
-            <a:r>
-              <a:rPr lang="en-US" sz="4600" b="1" dirty="0">
+              <a:buNone/>
+            </a:pPr>
+            <a:r>
+              <a:rPr lang="en-US" sz="5200" b="1" dirty="0">
                 <a:solidFill>
                   <a:srgbClr val="FFFFFF"/>
                 </a:solidFill>
@@ -1395,66 +1392,46 @@
                 <a:ea typeface="Cambria" pitchFamily="34" charset="-122"/>
                 <a:cs typeface="Cambria" pitchFamily="34" charset="-120"/>
               </a:rPr>
-              <a:t>エステサロンへの</a:t>
-            </a:r>
-            <a:endParaRPr lang="en-US" sz="4600" dirty="0"/>
-          </a:p>
+              <a:t>一緒に、サロンの成長を。</a:t>
+            </a:r>
+            <a:endParaRPr lang="en-US" sz="5200" dirty="0"/>
+          </a:p>
+        </p:txBody>
+      </p:sp>
+      <p:sp>
+        <p:nvSpPr>
+          <p:cNvPr id="4" name="Text 2"/>
+          <p:cNvSpPr/>
+          <p:nvPr/>
+        </p:nvSpPr>
+        <p:spPr>
+          <a:xfrm>
+            <a:off x="822960" y="3200400"/>
+            <a:ext cx="10515600" cy="548640"/>
+          </a:xfrm>
+          <a:prstGeom prst="rect">
+            <a:avLst/>
+          </a:prstGeom>
+          <a:noFill/>
+          <a:ln/>
+        </p:spPr>
+        <p:txBody>
+          <a:bodyPr wrap="square" lIns="0" tIns="0" rIns="0" bIns="0" rtlCol="0" anchor="ctr"/>
+          <a:lstStyle/>
           <a:p>
             <a:pPr indent="0" marL="0">
-              <a:lnSpc>
-                <a:spcPts val="5400"/>
-              </a:lnSpc>
-              <a:buNone/>
-            </a:pPr>
-            <a:r>
-              <a:rPr lang="en-US" sz="4600" b="1" dirty="0">
-                <a:solidFill>
-                  <a:srgbClr val="FFFFFF"/>
+              <a:buNone/>
+            </a:pPr>
+            <a:r>
+              <a:rPr lang="en-US" sz="2200" dirty="0">
+                <a:solidFill>
+                  <a:srgbClr val="BFD6CF"/>
                 </a:solidFill>
                 <a:latin typeface="Cambria" pitchFamily="34" charset="0"/>
                 <a:ea typeface="Cambria" pitchFamily="34" charset="-122"/>
                 <a:cs typeface="Cambria" pitchFamily="34" charset="-120"/>
               </a:rPr>
-              <a:t>出資・採用支援スキーム</a:t>
-            </a:r>
-            <a:endParaRPr lang="en-US" sz="4600" dirty="0"/>
-          </a:p>
-        </p:txBody>
-      </p:sp>
-      <p:sp>
-        <p:nvSpPr>
-          <p:cNvPr id="4" name="Text 2"/>
-          <p:cNvSpPr/>
-          <p:nvPr/>
-        </p:nvSpPr>
-        <p:spPr>
-          <a:xfrm>
-            <a:off x="777240" y="3520440"/>
-            <a:ext cx="10058400" cy="457200"/>
-          </a:xfrm>
-          <a:prstGeom prst="rect">
-            <a:avLst/>
-          </a:prstGeom>
-          <a:noFill/>
-          <a:ln/>
-        </p:spPr>
-        <p:txBody>
-          <a:bodyPr wrap="square" lIns="0" tIns="0" rIns="0" bIns="0" rtlCol="0" anchor="ctr"/>
-          <a:lstStyle/>
-          <a:p>
-            <a:pPr indent="0" marL="0">
-              <a:buNone/>
-            </a:pPr>
-            <a:r>
-              <a:rPr lang="en-US" sz="2200" dirty="0">
-                <a:solidFill>
-                  <a:srgbClr val="AFC0D4"/>
-                </a:solidFill>
-                <a:latin typeface="Cambria" pitchFamily="34" charset="0"/>
-                <a:ea typeface="Cambria" pitchFamily="34" charset="-122"/>
-                <a:cs typeface="Cambria" pitchFamily="34" charset="-120"/>
-              </a:rPr>
-              <a:t>（透明版・検討用）</a:t>
+              <a:t>「採用」の悩みを、ランデックスと一緒に解決しませんか。</a:t>
             </a:r>
             <a:endParaRPr lang="en-US" sz="2200" dirty="0"/>
           </a:p>
@@ -1468,8 +1445,8 @@
         </p:nvSpPr>
         <p:spPr>
           <a:xfrm>
-            <a:off x="777240" y="4160520"/>
-            <a:ext cx="10058400" cy="822960"/>
+            <a:off x="822960" y="3886200"/>
+            <a:ext cx="10424160" cy="914400"/>
           </a:xfrm>
           <a:prstGeom prst="rect">
             <a:avLst/>
@@ -1483,40 +1460,40 @@
           <a:p>
             <a:pPr indent="0" marL="0">
               <a:lnSpc>
-                <a:spcPts val="2400"/>
+                <a:spcPts val="2600"/>
               </a:lnSpc>
               <a:buNone/>
             </a:pPr>
             <a:r>
               <a:rPr lang="en-US" sz="1500" dirty="0">
                 <a:solidFill>
-                  <a:srgbClr val="AFC0D4"/>
-                </a:solidFill>
-                <a:latin typeface="Calibri" pitchFamily="34" charset="0"/>
-                <a:ea typeface="Calibri" pitchFamily="34" charset="-122"/>
-                <a:cs typeface="Calibri" pitchFamily="34" charset="-120"/>
-              </a:rPr>
-              <a:t>「隠さない・付け替えない」を前提に、出資と採用支援を正しく組み立てる。</a:t>
+                  <a:srgbClr val="BFD6CF"/>
+                </a:solidFill>
+                <a:latin typeface="Calibri" pitchFamily="34" charset="0"/>
+                <a:ea typeface="Calibri" pitchFamily="34" charset="-122"/>
+                <a:cs typeface="Calibri" pitchFamily="34" charset="-120"/>
+              </a:rPr>
+              <a:t>私たちの信用力・採用力と、サロン様の技術・現場力。</a:t>
             </a:r>
             <a:endParaRPr lang="en-US" sz="1500" dirty="0"/>
           </a:p>
           <a:p>
             <a:pPr indent="0" marL="0">
               <a:lnSpc>
-                <a:spcPts val="2400"/>
+                <a:spcPts val="2600"/>
               </a:lnSpc>
               <a:buNone/>
             </a:pPr>
             <a:r>
               <a:rPr lang="en-US" sz="1500" dirty="0">
                 <a:solidFill>
-                  <a:srgbClr val="AFC0D4"/>
-                </a:solidFill>
-                <a:latin typeface="Calibri" pitchFamily="34" charset="0"/>
-                <a:ea typeface="Calibri" pitchFamily="34" charset="-122"/>
-                <a:cs typeface="Calibri" pitchFamily="34" charset="-120"/>
-              </a:rPr>
-              <a:t>ランデックスの信用力・採用力を、正規の枠組みの中で活かす。</a:t>
+                  <a:srgbClr val="BFD6CF"/>
+                </a:solidFill>
+                <a:latin typeface="Calibri" pitchFamily="34" charset="0"/>
+                <a:ea typeface="Calibri" pitchFamily="34" charset="-122"/>
+                <a:cs typeface="Calibri" pitchFamily="34" charset="-120"/>
+              </a:rPr>
+              <a:t>2つを持ち寄って、いいチームと、伸びる店舗を一緒につくりたいと考えています。</a:t>
             </a:r>
             <a:endParaRPr lang="en-US" sz="1500" dirty="0"/>
           </a:p>
@@ -1524,41 +1501,14 @@
       </p:sp>
       <p:sp>
         <p:nvSpPr>
-          <p:cNvPr id="6" name="Shape 4"/>
-          <p:cNvSpPr/>
-          <p:nvPr/>
-        </p:nvSpPr>
-        <p:spPr>
-          <a:xfrm>
-            <a:off x="731520" y="5257800"/>
-            <a:ext cx="10698480" cy="960120"/>
-          </a:xfrm>
-          <a:prstGeom prst="roundRect">
-            <a:avLst>
-              <a:gd name="adj" fmla="val 7619"/>
-            </a:avLst>
-          </a:prstGeom>
-          <a:solidFill>
-            <a:srgbClr val="3A2E17"/>
-          </a:solidFill>
-          <a:ln w="12700">
-            <a:solidFill>
-              <a:srgbClr val="C8791F"/>
-            </a:solidFill>
-            <a:prstDash val="solid"/>
-          </a:ln>
-        </p:spPr>
-      </p:sp>
-      <p:sp>
-        <p:nvSpPr>
-          <p:cNvPr id="7" name="Text 5"/>
-          <p:cNvSpPr/>
-          <p:nvPr/>
-        </p:nvSpPr>
-        <p:spPr>
-          <a:xfrm>
-            <a:off x="960120" y="5394960"/>
-            <a:ext cx="10241280" cy="731520"/>
+          <p:cNvPr id="6" name="Text 4"/>
+          <p:cNvSpPr/>
+          <p:nvPr/>
+        </p:nvSpPr>
+        <p:spPr>
+          <a:xfrm>
+            <a:off x="822960" y="5715000"/>
+            <a:ext cx="7315200" cy="365760"/>
           </a:xfrm>
           <a:prstGeom prst="rect">
             <a:avLst/>
@@ -1571,74 +1521,20 @@
           <a:lstStyle/>
           <a:p>
             <a:pPr indent="0" marL="0">
-              <a:lnSpc>
-                <a:spcPts val="1800"/>
-              </a:lnSpc>
-              <a:buNone/>
-            </a:pPr>
-            <a:r>
-              <a:rPr lang="en-US" sz="1250" b="1" dirty="0">
-                <a:solidFill>
-                  <a:srgbClr val="F0B45E"/>
-                </a:solidFill>
-                <a:latin typeface="Calibri" pitchFamily="34" charset="0"/>
-                <a:ea typeface="Calibri" pitchFamily="34" charset="-122"/>
-                <a:cs typeface="Calibri" pitchFamily="34" charset="-120"/>
-              </a:rPr>
-              <a:t>重要　</a:t>
-            </a:r>
-            <a:pPr indent="0" marL="0">
-              <a:lnSpc>
-                <a:spcPts val="1800"/>
-              </a:lnSpc>
-              <a:buNone/>
-            </a:pPr>
-            <a:r>
-              <a:rPr lang="en-US" sz="1250" dirty="0">
-                <a:solidFill>
-                  <a:srgbClr val="EBD9BF"/>
-                </a:solidFill>
-                <a:latin typeface="Calibri" pitchFamily="34" charset="0"/>
-                <a:ea typeface="Calibri" pitchFamily="34" charset="-122"/>
-                <a:cs typeface="Calibri" pitchFamily="34" charset="-120"/>
-              </a:rPr>
-              <a:t>本資料は社内検討用のたたき台です。法務・税務・労務の助言ではありません。出資・採用支援・利益配分の各設計は、</a:t>
-            </a:r>
-            <a:pPr indent="0" marL="0">
-              <a:lnSpc>
-                <a:spcPts val="1800"/>
-              </a:lnSpc>
-              <a:buNone/>
-            </a:pPr>
-            <a:r>
-              <a:rPr lang="en-US" sz="1250" b="1" dirty="0">
-                <a:solidFill>
-                  <a:srgbClr val="F0B45E"/>
-                </a:solidFill>
-                <a:latin typeface="Calibri" pitchFamily="34" charset="0"/>
-                <a:ea typeface="Calibri" pitchFamily="34" charset="-122"/>
-                <a:cs typeface="Calibri" pitchFamily="34" charset="-120"/>
-              </a:rPr>
-              <a:t>実行前に必ず弁護士・社会保険労務士・税理士の確認</a:t>
-            </a:r>
-            <a:pPr indent="0" marL="0">
-              <a:lnSpc>
-                <a:spcPts val="1800"/>
-              </a:lnSpc>
-              <a:buNone/>
-            </a:pPr>
-            <a:r>
-              <a:rPr lang="en-US" sz="1250" dirty="0">
-                <a:solidFill>
-                  <a:srgbClr val="EBD9BF"/>
-                </a:solidFill>
-                <a:latin typeface="Calibri" pitchFamily="34" charset="0"/>
-                <a:ea typeface="Calibri" pitchFamily="34" charset="-122"/>
-                <a:cs typeface="Calibri" pitchFamily="34" charset="-120"/>
-              </a:rPr>
-              <a:t>を受けてください。</a:t>
-            </a:r>
-            <a:endParaRPr lang="en-US" sz="1250" dirty="0"/>
+              <a:buNone/>
+            </a:pPr>
+            <a:r>
+              <a:rPr lang="en-US" sz="1400" b="1" dirty="0">
+                <a:solidFill>
+                  <a:srgbClr val="FFFFFF"/>
+                </a:solidFill>
+                <a:latin typeface="Calibri" pitchFamily="34" charset="0"/>
+                <a:ea typeface="Calibri" pitchFamily="34" charset="-122"/>
+                <a:cs typeface="Calibri" pitchFamily="34" charset="-120"/>
+              </a:rPr>
+              <a:t>株式会社ランデックス</a:t>
+            </a:r>
+            <a:endParaRPr lang="en-US" sz="1400" dirty="0"/>
           </a:p>
         </p:txBody>
       </p:sp>
@@ -1701,13 +1597,13 @@
             <a:r>
               <a:rPr lang="en-US" sz="1100" b="1" spc="100" kern="0" dirty="0">
                 <a:solidFill>
-                  <a:srgbClr val="2E7DD1"/>
-                </a:solidFill>
-                <a:latin typeface="Calibri" pitchFamily="34" charset="0"/>
-                <a:ea typeface="Calibri" pitchFamily="34" charset="-122"/>
-                <a:cs typeface="Calibri" pitchFamily="34" charset="-120"/>
-              </a:rPr>
-              <a:t>SLIDE 2 ・ 全体像</a:t>
+                  <a:srgbClr val="1E8878"/>
+                </a:solidFill>
+                <a:latin typeface="Calibri" pitchFamily="34" charset="0"/>
+                <a:ea typeface="Calibri" pitchFamily="34" charset="-122"/>
+                <a:cs typeface="Calibri" pitchFamily="34" charset="-120"/>
+              </a:rPr>
+              <a:t>SLIDE 2</a:t>
             </a:r>
             <a:endParaRPr lang="en-US" sz="1100" dirty="0"/>
           </a:p>
@@ -1740,13 +1636,13 @@
             <a:r>
               <a:rPr lang="en-US" sz="3400" b="1" dirty="0">
                 <a:solidFill>
-                  <a:srgbClr val="1E2B3A"/>
+                  <a:srgbClr val="213A36"/>
                 </a:solidFill>
                 <a:latin typeface="Cambria" pitchFamily="34" charset="0"/>
                 <a:ea typeface="Cambria" pitchFamily="34" charset="-122"/>
                 <a:cs typeface="Cambria" pitchFamily="34" charset="-120"/>
               </a:rPr>
-              <a:t>本プロジェクトの全体像</a:t>
+              <a:t>こんなお悩み、ありませんか？</a:t>
             </a:r>
             <a:endParaRPr lang="en-US" sz="3400" dirty="0"/>
           </a:p>
@@ -1779,13 +1675,13 @@
             <a:r>
               <a:rPr lang="en-US" sz="1500" dirty="0">
                 <a:solidFill>
-                  <a:srgbClr val="5A6B7D"/>
-                </a:solidFill>
-                <a:latin typeface="Calibri" pitchFamily="34" charset="0"/>
-                <a:ea typeface="Calibri" pitchFamily="34" charset="-122"/>
-                <a:cs typeface="Calibri" pitchFamily="34" charset="-120"/>
-              </a:rPr>
-              <a:t>出資は「出資」として、採用支援は「役務」として、それぞれ実態どおりに切り分ける。</a:t>
+                  <a:srgbClr val="5C6E69"/>
+                </a:solidFill>
+                <a:latin typeface="Calibri" pitchFamily="34" charset="0"/>
+                <a:ea typeface="Calibri" pitchFamily="34" charset="-122"/>
+                <a:cs typeface="Calibri" pitchFamily="34" charset="-120"/>
+              </a:rPr>
+              <a:t>多くのサロン様が、日々の運営のなかで「採用」に頭を悩ませています。</a:t>
             </a:r>
             <a:endParaRPr lang="en-US" sz="1500" dirty="0"/>
           </a:p>
@@ -1800,19 +1696,19 @@
         <p:spPr>
           <a:xfrm>
             <a:off x="548640" y="2148840"/>
-            <a:ext cx="5257800" cy="2651760"/>
+            <a:ext cx="3474720" cy="2514600"/>
           </a:xfrm>
           <a:prstGeom prst="roundRect">
             <a:avLst>
-              <a:gd name="adj" fmla="val 2759"/>
+              <a:gd name="adj" fmla="val 2909"/>
             </a:avLst>
           </a:prstGeom>
           <a:solidFill>
-            <a:srgbClr val="F3F6FA"/>
+            <a:srgbClr val="F1F7F5"/>
           </a:solidFill>
           <a:ln w="12700">
             <a:solidFill>
-              <a:srgbClr val="DCE4EC"/>
+              <a:srgbClr val="D8E6E1"/>
             </a:solidFill>
             <a:prstDash val="solid"/>
           </a:ln>
@@ -1826,14 +1722,14 @@
         </p:nvSpPr>
         <p:spPr>
           <a:xfrm>
-            <a:off x="868680" y="2468880"/>
-            <a:ext cx="502920" cy="502920"/>
+            <a:off x="1965960" y="2468880"/>
+            <a:ext cx="640080" cy="640080"/>
           </a:xfrm>
           <a:prstGeom prst="ellipse">
             <a:avLst/>
           </a:prstGeom>
           <a:solidFill>
-            <a:srgbClr val="2E7DD1"/>
+            <a:srgbClr val="E7EFEC"/>
           </a:solidFill>
           <a:ln/>
         </p:spPr>
@@ -1846,8 +1742,8 @@
         </p:nvSpPr>
         <p:spPr>
           <a:xfrm>
-            <a:off x="868680" y="2468880"/>
-            <a:ext cx="502920" cy="502920"/>
+            <a:off x="1965960" y="2468880"/>
+            <a:ext cx="640080" cy="640080"/>
           </a:xfrm>
           <a:prstGeom prst="rect">
             <a:avLst/>
@@ -1863,17 +1759,17 @@
               <a:buNone/>
             </a:pPr>
             <a:r>
-              <a:rPr lang="en-US" sz="2000" b="1" dirty="0">
-                <a:solidFill>
-                  <a:srgbClr val="FFFFFF"/>
-                </a:solidFill>
-                <a:latin typeface="Calibri" pitchFamily="34" charset="0"/>
-                <a:ea typeface="Calibri" pitchFamily="34" charset="-122"/>
-                <a:cs typeface="Calibri" pitchFamily="34" charset="-120"/>
-              </a:rPr>
-              <a:t>L</a:t>
-            </a:r>
-            <a:endParaRPr lang="en-US" sz="2000" dirty="0"/>
+              <a:rPr lang="en-US" sz="2600" b="1" dirty="0">
+                <a:solidFill>
+                  <a:srgbClr val="1E8878"/>
+                </a:solidFill>
+                <a:latin typeface="Calibri" pitchFamily="34" charset="0"/>
+                <a:ea typeface="Calibri" pitchFamily="34" charset="-122"/>
+                <a:cs typeface="Calibri" pitchFamily="34" charset="-120"/>
+              </a:rPr>
+              <a:t>?</a:t>
+            </a:r>
+            <a:endParaRPr lang="en-US" sz="2600" dirty="0"/>
           </a:p>
         </p:txBody>
       </p:sp>
@@ -1885,34 +1781,57 @@
         </p:nvSpPr>
         <p:spPr>
           <a:xfrm>
-            <a:off x="1554480" y="2514600"/>
-            <a:ext cx="3200400" cy="457200"/>
-          </a:xfrm>
-          <a:prstGeom prst="rect">
-            <a:avLst/>
-          </a:prstGeom>
-          <a:noFill/>
-          <a:ln/>
-        </p:spPr>
-        <p:txBody>
-          <a:bodyPr wrap="square" lIns="0" tIns="0" rIns="0" bIns="0" rtlCol="0" anchor="ctr"/>
-          <a:lstStyle/>
-          <a:p>
-            <a:pPr indent="0" marL="0">
-              <a:buNone/>
-            </a:pPr>
-            <a:r>
-              <a:rPr lang="en-US" sz="1900" b="1" dirty="0">
-                <a:solidFill>
-                  <a:srgbClr val="2E7DD1"/>
+            <a:off x="777240" y="3246120"/>
+            <a:ext cx="3017520" cy="731520"/>
+          </a:xfrm>
+          <a:prstGeom prst="rect">
+            <a:avLst/>
+          </a:prstGeom>
+          <a:noFill/>
+          <a:ln/>
+        </p:spPr>
+        <p:txBody>
+          <a:bodyPr wrap="square" lIns="0" tIns="0" rIns="0" bIns="0" rtlCol="0" anchor="ctr"/>
+          <a:lstStyle/>
+          <a:p>
+            <a:pPr algn="ctr" indent="0" marL="0">
+              <a:lnSpc>
+                <a:spcPts val="2200"/>
+              </a:lnSpc>
+              <a:buNone/>
+            </a:pPr>
+            <a:r>
+              <a:rPr lang="en-US" sz="1700" b="1" dirty="0">
+                <a:solidFill>
+                  <a:srgbClr val="213A36"/>
                 </a:solidFill>
                 <a:latin typeface="Cambria" pitchFamily="34" charset="0"/>
                 <a:ea typeface="Cambria" pitchFamily="34" charset="-122"/>
                 <a:cs typeface="Cambria" pitchFamily="34" charset="-120"/>
               </a:rPr>
-              <a:t>ランデックスの役割</a:t>
-            </a:r>
-            <a:endParaRPr lang="en-US" sz="1900" dirty="0"/>
+              <a:t>良い人が</a:t>
+            </a:r>
+            <a:endParaRPr lang="en-US" sz="1700" dirty="0"/>
+          </a:p>
+          <a:p>
+            <a:pPr algn="ctr" indent="0" marL="0">
+              <a:lnSpc>
+                <a:spcPts val="2200"/>
+              </a:lnSpc>
+              <a:buNone/>
+            </a:pPr>
+            <a:r>
+              <a:rPr lang="en-US" sz="1700" b="1" dirty="0">
+                <a:solidFill>
+                  <a:srgbClr val="213A36"/>
+                </a:solidFill>
+                <a:latin typeface="Cambria" pitchFamily="34" charset="0"/>
+                <a:ea typeface="Cambria" pitchFamily="34" charset="-122"/>
+                <a:cs typeface="Cambria" pitchFamily="34" charset="-120"/>
+              </a:rPr>
+              <a:t>なかなか採れない</a:t>
+            </a:r>
+            <a:endParaRPr lang="en-US" sz="1700" dirty="0"/>
           </a:p>
         </p:txBody>
       </p:sp>
@@ -1924,101 +1843,37 @@
         </p:nvSpPr>
         <p:spPr>
           <a:xfrm>
-            <a:off x="914400" y="3200400"/>
-            <a:ext cx="4617720" cy="1463040"/>
-          </a:xfrm>
-          <a:prstGeom prst="rect">
-            <a:avLst/>
-          </a:prstGeom>
-          <a:noFill/>
-          <a:ln/>
-        </p:spPr>
-        <p:txBody>
-          <a:bodyPr wrap="square" lIns="0" tIns="0" rIns="0" bIns="0" rtlCol="0" anchor="ctr"/>
-          <a:lstStyle/>
-          <a:p>
-            <a:pPr marL="177800" indent="-177800">
+            <a:off x="822960" y="3977640"/>
+            <a:ext cx="2926080" cy="548640"/>
+          </a:xfrm>
+          <a:prstGeom prst="rect">
+            <a:avLst/>
+          </a:prstGeom>
+          <a:noFill/>
+          <a:ln/>
+        </p:spPr>
+        <p:txBody>
+          <a:bodyPr wrap="square" lIns="0" tIns="0" rIns="0" bIns="0" rtlCol="0" anchor="ctr"/>
+          <a:lstStyle/>
+          <a:p>
+            <a:pPr algn="ctr" indent="0" marL="0">
               <a:lnSpc>
-                <a:spcPts val="2000"/>
+                <a:spcPts val="1700"/>
               </a:lnSpc>
-              <a:buSzPct val="100000"/>
-              <a:buChar char="•"/>
-            </a:pPr>
-            <a:r>
-              <a:rPr lang="en-US" sz="1450" b="1" dirty="0">
-                <a:solidFill>
-                  <a:srgbClr val="1E2B3A"/>
-                </a:solidFill>
-                <a:latin typeface="Calibri" pitchFamily="34" charset="0"/>
-                <a:ea typeface="Calibri" pitchFamily="34" charset="-122"/>
-                <a:cs typeface="Calibri" pitchFamily="34" charset="-120"/>
-              </a:rPr>
-              <a:t>正規の投資としての出資</a:t>
-            </a:r>
-            <a:endParaRPr lang="en-US" sz="1450" dirty="0"/>
-          </a:p>
-          <a:p>
-            <a:pPr indent="0" marL="0">
-              <a:lnSpc>
-                <a:spcPts val="2000"/>
-              </a:lnSpc>
-              <a:spcAft>
-                <a:spcPts val="1000"/>
-              </a:spcAft>
               <a:buNone/>
             </a:pPr>
             <a:r>
               <a:rPr lang="en-US" sz="1250" dirty="0">
                 <a:solidFill>
-                  <a:srgbClr val="5A6B7D"/>
-                </a:solidFill>
-                <a:latin typeface="Calibri" pitchFamily="34" charset="0"/>
-                <a:ea typeface="Calibri" pitchFamily="34" charset="-122"/>
-                <a:cs typeface="Calibri" pitchFamily="34" charset="-120"/>
-              </a:rPr>
-              <a:t>採用予算の一部負担を含む</a:t>
-            </a:r>
-            <a:endParaRPr lang="en-US" sz="1450" dirty="0"/>
-          </a:p>
-          <a:p>
-            <a:pPr indent="0" marL="0">
-              <a:lnSpc>
-                <a:spcPts val="2000"/>
-              </a:lnSpc>
-              <a:buNone/>
-            </a:pPr>
-            <a:r>
-              <a:rPr lang="en-US" sz="1450" b="1" dirty="0">
-                <a:solidFill>
-                  <a:srgbClr val="1E2B3A"/>
-                </a:solidFill>
-                <a:latin typeface="Calibri" pitchFamily="34" charset="0"/>
-                <a:ea typeface="Calibri" pitchFamily="34" charset="-122"/>
-                <a:cs typeface="Calibri" pitchFamily="34" charset="-120"/>
-              </a:rPr>
-              <a:t>採用実務・採用コンサルの役務提供</a:t>
-            </a:r>
-            <a:endParaRPr lang="en-US" sz="1450" dirty="0"/>
-          </a:p>
-          <a:p>
-            <a:pPr indent="0" marL="0">
-              <a:lnSpc>
-                <a:spcPts val="2000"/>
-              </a:lnSpc>
-              <a:buNone/>
-            </a:pPr>
-            <a:r>
-              <a:rPr lang="en-US" sz="1250" dirty="0">
-                <a:solidFill>
-                  <a:srgbClr val="5A6B7D"/>
-                </a:solidFill>
-                <a:latin typeface="Calibri" pitchFamily="34" charset="0"/>
-                <a:ea typeface="Calibri" pitchFamily="34" charset="-122"/>
-                <a:cs typeface="Calibri" pitchFamily="34" charset="-120"/>
-              </a:rPr>
-              <a:t>実費・実態ベースで提供・請求</a:t>
-            </a:r>
-            <a:endParaRPr lang="en-US" sz="1450" dirty="0"/>
+                  <a:srgbClr val="5C6E69"/>
+                </a:solidFill>
+                <a:latin typeface="Calibri" pitchFamily="34" charset="0"/>
+                <a:ea typeface="Calibri" pitchFamily="34" charset="-122"/>
+                <a:cs typeface="Calibri" pitchFamily="34" charset="-120"/>
+              </a:rPr>
+              <a:t>求める人物像に合うスタッフとの出会いが少ない。</a:t>
+            </a:r>
+            <a:endParaRPr lang="en-US" sz="1250" dirty="0"/>
           </a:p>
         </p:txBody>
       </p:sp>
@@ -2030,20 +1885,20 @@
         </p:nvSpPr>
         <p:spPr>
           <a:xfrm>
-            <a:off x="6355080" y="2148840"/>
-            <a:ext cx="5257800" cy="2651760"/>
+            <a:off x="4343400" y="2148840"/>
+            <a:ext cx="3474720" cy="2514600"/>
           </a:xfrm>
           <a:prstGeom prst="roundRect">
             <a:avLst>
-              <a:gd name="adj" fmla="val 2759"/>
+              <a:gd name="adj" fmla="val 2909"/>
             </a:avLst>
           </a:prstGeom>
           <a:solidFill>
-            <a:srgbClr val="F3F6FA"/>
+            <a:srgbClr val="F1F7F5"/>
           </a:solidFill>
           <a:ln w="12700">
             <a:solidFill>
-              <a:srgbClr val="DCE4EC"/>
+              <a:srgbClr val="D8E6E1"/>
             </a:solidFill>
             <a:prstDash val="solid"/>
           </a:ln>
@@ -2057,14 +1912,14 @@
         </p:nvSpPr>
         <p:spPr>
           <a:xfrm>
-            <a:off x="6675120" y="2468880"/>
-            <a:ext cx="502920" cy="502920"/>
+            <a:off x="5760720" y="2468880"/>
+            <a:ext cx="640080" cy="640080"/>
           </a:xfrm>
           <a:prstGeom prst="ellipse">
             <a:avLst/>
           </a:prstGeom>
           <a:solidFill>
-            <a:srgbClr val="1FA795"/>
+            <a:srgbClr val="E7EFEC"/>
           </a:solidFill>
           <a:ln/>
         </p:spPr>
@@ -2077,8 +1932,8 @@
         </p:nvSpPr>
         <p:spPr>
           <a:xfrm>
-            <a:off x="6675120" y="2468880"/>
-            <a:ext cx="502920" cy="502920"/>
+            <a:off x="5760720" y="2468880"/>
+            <a:ext cx="640080" cy="640080"/>
           </a:xfrm>
           <a:prstGeom prst="rect">
             <a:avLst/>
@@ -2094,17 +1949,17 @@
               <a:buNone/>
             </a:pPr>
             <a:r>
-              <a:rPr lang="en-US" sz="2000" b="1" dirty="0">
-                <a:solidFill>
-                  <a:srgbClr val="FFFFFF"/>
-                </a:solidFill>
-                <a:latin typeface="Calibri" pitchFamily="34" charset="0"/>
-                <a:ea typeface="Calibri" pitchFamily="34" charset="-122"/>
-                <a:cs typeface="Calibri" pitchFamily="34" charset="-120"/>
-              </a:rPr>
-              <a:t>S</a:t>
-            </a:r>
-            <a:endParaRPr lang="en-US" sz="2000" dirty="0"/>
+              <a:rPr lang="en-US" sz="2600" b="1" dirty="0">
+                <a:solidFill>
+                  <a:srgbClr val="1E8878"/>
+                </a:solidFill>
+                <a:latin typeface="Calibri" pitchFamily="34" charset="0"/>
+                <a:ea typeface="Calibri" pitchFamily="34" charset="-122"/>
+                <a:cs typeface="Calibri" pitchFamily="34" charset="-120"/>
+              </a:rPr>
+              <a:t>?</a:t>
+            </a:r>
+            <a:endParaRPr lang="en-US" sz="2600" dirty="0"/>
           </a:p>
         </p:txBody>
       </p:sp>
@@ -2116,34 +1971,57 @@
         </p:nvSpPr>
         <p:spPr>
           <a:xfrm>
-            <a:off x="7360920" y="2514600"/>
-            <a:ext cx="3474720" cy="457200"/>
-          </a:xfrm>
-          <a:prstGeom prst="rect">
-            <a:avLst/>
-          </a:prstGeom>
-          <a:noFill/>
-          <a:ln/>
-        </p:spPr>
-        <p:txBody>
-          <a:bodyPr wrap="square" lIns="0" tIns="0" rIns="0" bIns="0" rtlCol="0" anchor="ctr"/>
-          <a:lstStyle/>
-          <a:p>
-            <a:pPr indent="0" marL="0">
-              <a:buNone/>
-            </a:pPr>
-            <a:r>
-              <a:rPr lang="en-US" sz="1900" b="1" dirty="0">
-                <a:solidFill>
-                  <a:srgbClr val="1FA795"/>
+            <a:off x="4572000" y="3246120"/>
+            <a:ext cx="3017520" cy="731520"/>
+          </a:xfrm>
+          <a:prstGeom prst="rect">
+            <a:avLst/>
+          </a:prstGeom>
+          <a:noFill/>
+          <a:ln/>
+        </p:spPr>
+        <p:txBody>
+          <a:bodyPr wrap="square" lIns="0" tIns="0" rIns="0" bIns="0" rtlCol="0" anchor="ctr"/>
+          <a:lstStyle/>
+          <a:p>
+            <a:pPr algn="ctr" indent="0" marL="0">
+              <a:lnSpc>
+                <a:spcPts val="2200"/>
+              </a:lnSpc>
+              <a:buNone/>
+            </a:pPr>
+            <a:r>
+              <a:rPr lang="en-US" sz="1700" b="1" dirty="0">
+                <a:solidFill>
+                  <a:srgbClr val="213A36"/>
                 </a:solidFill>
                 <a:latin typeface="Cambria" pitchFamily="34" charset="0"/>
                 <a:ea typeface="Cambria" pitchFamily="34" charset="-122"/>
                 <a:cs typeface="Cambria" pitchFamily="34" charset="-120"/>
               </a:rPr>
-              <a:t>〇〇サロンの役割</a:t>
-            </a:r>
-            <a:endParaRPr lang="en-US" sz="1900" dirty="0"/>
+              <a:t>採用にコストと</a:t>
+            </a:r>
+            <a:endParaRPr lang="en-US" sz="1700" dirty="0"/>
+          </a:p>
+          <a:p>
+            <a:pPr algn="ctr" indent="0" marL="0">
+              <a:lnSpc>
+                <a:spcPts val="2200"/>
+              </a:lnSpc>
+              <a:buNone/>
+            </a:pPr>
+            <a:r>
+              <a:rPr lang="en-US" sz="1700" b="1" dirty="0">
+                <a:solidFill>
+                  <a:srgbClr val="213A36"/>
+                </a:solidFill>
+                <a:latin typeface="Cambria" pitchFamily="34" charset="0"/>
+                <a:ea typeface="Cambria" pitchFamily="34" charset="-122"/>
+                <a:cs typeface="Cambria" pitchFamily="34" charset="-120"/>
+              </a:rPr>
+              <a:t>手間がかかる</a:t>
+            </a:r>
+            <a:endParaRPr lang="en-US" sz="1700" dirty="0"/>
           </a:p>
         </p:txBody>
       </p:sp>
@@ -2155,101 +2033,37 @@
         </p:nvSpPr>
         <p:spPr>
           <a:xfrm>
-            <a:off x="6720840" y="3200400"/>
-            <a:ext cx="4617720" cy="1463040"/>
-          </a:xfrm>
-          <a:prstGeom prst="rect">
-            <a:avLst/>
-          </a:prstGeom>
-          <a:noFill/>
-          <a:ln/>
-        </p:spPr>
-        <p:txBody>
-          <a:bodyPr wrap="square" lIns="0" tIns="0" rIns="0" bIns="0" rtlCol="0" anchor="ctr"/>
-          <a:lstStyle/>
-          <a:p>
-            <a:pPr marL="177800" indent="-177800">
+            <a:off x="4617720" y="3977640"/>
+            <a:ext cx="2926080" cy="548640"/>
+          </a:xfrm>
+          <a:prstGeom prst="rect">
+            <a:avLst/>
+          </a:prstGeom>
+          <a:noFill/>
+          <a:ln/>
+        </p:spPr>
+        <p:txBody>
+          <a:bodyPr wrap="square" lIns="0" tIns="0" rIns="0" bIns="0" rtlCol="0" anchor="ctr"/>
+          <a:lstStyle/>
+          <a:p>
+            <a:pPr algn="ctr" indent="0" marL="0">
               <a:lnSpc>
-                <a:spcPts val="2000"/>
+                <a:spcPts val="1700"/>
               </a:lnSpc>
-              <a:buSzPct val="100000"/>
-              <a:buChar char="•"/>
-            </a:pPr>
-            <a:r>
-              <a:rPr lang="en-US" sz="1450" b="1" dirty="0">
-                <a:solidFill>
-                  <a:srgbClr val="1E2B3A"/>
-                </a:solidFill>
-                <a:latin typeface="Calibri" pitchFamily="34" charset="0"/>
-                <a:ea typeface="Calibri" pitchFamily="34" charset="-122"/>
-                <a:cs typeface="Calibri" pitchFamily="34" charset="-120"/>
-              </a:rPr>
-              <a:t>店舗運営</a:t>
-            </a:r>
-            <a:endParaRPr lang="en-US" sz="1450" dirty="0"/>
-          </a:p>
-          <a:p>
-            <a:pPr indent="0" marL="0">
-              <a:lnSpc>
-                <a:spcPts val="2000"/>
-              </a:lnSpc>
-              <a:spcAft>
-                <a:spcPts val="1000"/>
-              </a:spcAft>
               <a:buNone/>
             </a:pPr>
             <a:r>
               <a:rPr lang="en-US" sz="1250" dirty="0">
                 <a:solidFill>
-                  <a:srgbClr val="5A6B7D"/>
-                </a:solidFill>
-                <a:latin typeface="Calibri" pitchFamily="34" charset="0"/>
-                <a:ea typeface="Calibri" pitchFamily="34" charset="-122"/>
-                <a:cs typeface="Calibri" pitchFamily="34" charset="-120"/>
-              </a:rPr>
-              <a:t>本業のサロン運営を継続</a:t>
-            </a:r>
-            <a:endParaRPr lang="en-US" sz="1450" dirty="0"/>
-          </a:p>
-          <a:p>
-            <a:pPr indent="0" marL="0">
-              <a:lnSpc>
-                <a:spcPts val="2000"/>
-              </a:lnSpc>
-              <a:buNone/>
-            </a:pPr>
-            <a:r>
-              <a:rPr lang="en-US" sz="1450" b="1" dirty="0">
-                <a:solidFill>
-                  <a:srgbClr val="1E2B3A"/>
-                </a:solidFill>
-                <a:latin typeface="Calibri" pitchFamily="34" charset="0"/>
-                <a:ea typeface="Calibri" pitchFamily="34" charset="-122"/>
-                <a:cs typeface="Calibri" pitchFamily="34" charset="-120"/>
-              </a:rPr>
-              <a:t>雇用主として採用スタッフを受け入れ</a:t>
-            </a:r>
-            <a:endParaRPr lang="en-US" sz="1450" dirty="0"/>
-          </a:p>
-          <a:p>
-            <a:pPr indent="0" marL="0">
-              <a:lnSpc>
-                <a:spcPts val="2000"/>
-              </a:lnSpc>
-              <a:buNone/>
-            </a:pPr>
-            <a:r>
-              <a:rPr lang="en-US" sz="1250" dirty="0">
-                <a:solidFill>
-                  <a:srgbClr val="5A6B7D"/>
-                </a:solidFill>
-                <a:latin typeface="Calibri" pitchFamily="34" charset="0"/>
-                <a:ea typeface="Calibri" pitchFamily="34" charset="-122"/>
-                <a:cs typeface="Calibri" pitchFamily="34" charset="-120"/>
-              </a:rPr>
-              <a:t>雇用契約はサロンとスタッフの間で締結</a:t>
-            </a:r>
-            <a:endParaRPr lang="en-US" sz="1450" dirty="0"/>
+                  <a:srgbClr val="5C6E69"/>
+                </a:solidFill>
+                <a:latin typeface="Calibri" pitchFamily="34" charset="0"/>
+                <a:ea typeface="Calibri" pitchFamily="34" charset="-122"/>
+                <a:cs typeface="Calibri" pitchFamily="34" charset="-120"/>
+              </a:rPr>
+              <a:t>求人広告費や面接対応など、負担が大きい。</a:t>
+            </a:r>
+            <a:endParaRPr lang="en-US" sz="1250" dirty="0"/>
           </a:p>
         </p:txBody>
       </p:sp>
@@ -2261,20 +2075,20 @@
         </p:nvSpPr>
         <p:spPr>
           <a:xfrm>
-            <a:off x="548640" y="5074920"/>
-            <a:ext cx="11064240" cy="1005840"/>
+            <a:off x="8138160" y="2148840"/>
+            <a:ext cx="3474720" cy="2514600"/>
           </a:xfrm>
           <a:prstGeom prst="roundRect">
             <a:avLst>
-              <a:gd name="adj" fmla="val 5455"/>
+              <a:gd name="adj" fmla="val 2909"/>
             </a:avLst>
           </a:prstGeom>
           <a:solidFill>
-            <a:srgbClr val="EAF2FB"/>
+            <a:srgbClr val="F1F7F5"/>
           </a:solidFill>
           <a:ln w="12700">
             <a:solidFill>
-              <a:srgbClr val="BFD8F2"/>
+              <a:srgbClr val="D8E6E1"/>
             </a:solidFill>
             <a:prstDash val="solid"/>
           </a:ln>
@@ -2282,100 +2096,245 @@
       </p:sp>
       <p:sp>
         <p:nvSpPr>
-          <p:cNvPr id="16" name="Text 14"/>
-          <p:cNvSpPr/>
-          <p:nvPr/>
-        </p:nvSpPr>
-        <p:spPr>
-          <a:xfrm>
-            <a:off x="822960" y="5212080"/>
-            <a:ext cx="10607040" cy="731520"/>
-          </a:xfrm>
-          <a:prstGeom prst="rect">
-            <a:avLst/>
-          </a:prstGeom>
-          <a:noFill/>
-          <a:ln/>
-        </p:spPr>
-        <p:txBody>
-          <a:bodyPr wrap="square" lIns="0" tIns="0" rIns="0" bIns="0" rtlCol="0" anchor="ctr"/>
-          <a:lstStyle/>
-          <a:p>
-            <a:pPr indent="0" marL="0">
+          <p:cNvPr id="16" name="Shape 14"/>
+          <p:cNvSpPr/>
+          <p:nvPr/>
+        </p:nvSpPr>
+        <p:spPr>
+          <a:xfrm>
+            <a:off x="9555480" y="2468880"/>
+            <a:ext cx="640080" cy="640080"/>
+          </a:xfrm>
+          <a:prstGeom prst="ellipse">
+            <a:avLst/>
+          </a:prstGeom>
+          <a:solidFill>
+            <a:srgbClr val="E7EFEC"/>
+          </a:solidFill>
+          <a:ln/>
+        </p:spPr>
+      </p:sp>
+      <p:sp>
+        <p:nvSpPr>
+          <p:cNvPr id="17" name="Text 15"/>
+          <p:cNvSpPr/>
+          <p:nvPr/>
+        </p:nvSpPr>
+        <p:spPr>
+          <a:xfrm>
+            <a:off x="9555480" y="2468880"/>
+            <a:ext cx="640080" cy="640080"/>
+          </a:xfrm>
+          <a:prstGeom prst="rect">
+            <a:avLst/>
+          </a:prstGeom>
+          <a:noFill/>
+          <a:ln/>
+        </p:spPr>
+        <p:txBody>
+          <a:bodyPr wrap="square" lIns="0" tIns="0" rIns="0" bIns="0" rtlCol="0" anchor="ctr"/>
+          <a:lstStyle/>
+          <a:p>
+            <a:pPr algn="ctr" indent="0" marL="0">
+              <a:buNone/>
+            </a:pPr>
+            <a:r>
+              <a:rPr lang="en-US" sz="2600" b="1" dirty="0">
+                <a:solidFill>
+                  <a:srgbClr val="1E8878"/>
+                </a:solidFill>
+                <a:latin typeface="Calibri" pitchFamily="34" charset="0"/>
+                <a:ea typeface="Calibri" pitchFamily="34" charset="-122"/>
+                <a:cs typeface="Calibri" pitchFamily="34" charset="-120"/>
+              </a:rPr>
+              <a:t>?</a:t>
+            </a:r>
+            <a:endParaRPr lang="en-US" sz="2600" dirty="0"/>
+          </a:p>
+        </p:txBody>
+      </p:sp>
+      <p:sp>
+        <p:nvSpPr>
+          <p:cNvPr id="18" name="Text 16"/>
+          <p:cNvSpPr/>
+          <p:nvPr/>
+        </p:nvSpPr>
+        <p:spPr>
+          <a:xfrm>
+            <a:off x="8366760" y="3246120"/>
+            <a:ext cx="3017520" cy="731520"/>
+          </a:xfrm>
+          <a:prstGeom prst="rect">
+            <a:avLst/>
+          </a:prstGeom>
+          <a:noFill/>
+          <a:ln/>
+        </p:spPr>
+        <p:txBody>
+          <a:bodyPr wrap="square" lIns="0" tIns="0" rIns="0" bIns="0" rtlCol="0" anchor="ctr"/>
+          <a:lstStyle/>
+          <a:p>
+            <a:pPr algn="ctr" indent="0" marL="0">
               <a:lnSpc>
-                <a:spcPts val="2000"/>
+                <a:spcPts val="2200"/>
               </a:lnSpc>
               <a:buNone/>
             </a:pPr>
             <a:r>
-              <a:rPr lang="en-US" sz="1400" b="1" dirty="0">
-                <a:solidFill>
-                  <a:srgbClr val="2E7DD1"/>
-                </a:solidFill>
-                <a:latin typeface="Calibri" pitchFamily="34" charset="0"/>
-                <a:ea typeface="Calibri" pitchFamily="34" charset="-122"/>
-                <a:cs typeface="Calibri" pitchFamily="34" charset="-120"/>
-              </a:rPr>
-              <a:t>ポイント　</a:t>
-            </a:r>
-            <a:pPr indent="0" marL="0">
+              <a:rPr lang="en-US" sz="1700" b="1" dirty="0">
+                <a:solidFill>
+                  <a:srgbClr val="213A36"/>
+                </a:solidFill>
+                <a:latin typeface="Cambria" pitchFamily="34" charset="0"/>
+                <a:ea typeface="Cambria" pitchFamily="34" charset="-122"/>
+                <a:cs typeface="Cambria" pitchFamily="34" charset="-120"/>
+              </a:rPr>
+              <a:t>募集しても</a:t>
+            </a:r>
+            <a:endParaRPr lang="en-US" sz="1700" dirty="0"/>
+          </a:p>
+          <a:p>
+            <a:pPr algn="ctr" indent="0" marL="0">
               <a:lnSpc>
-                <a:spcPts val="2000"/>
+                <a:spcPts val="2200"/>
               </a:lnSpc>
               <a:buNone/>
             </a:pPr>
             <a:r>
-              <a:rPr lang="en-US" sz="1400" dirty="0">
-                <a:solidFill>
-                  <a:srgbClr val="1E2B3A"/>
-                </a:solidFill>
-                <a:latin typeface="Calibri" pitchFamily="34" charset="0"/>
-                <a:ea typeface="Calibri" pitchFamily="34" charset="-122"/>
-                <a:cs typeface="Calibri" pitchFamily="34" charset="-120"/>
-              </a:rPr>
-              <a:t>お金の流れを一本にまとめて「わかりにくくする」のではなく、</a:t>
-            </a:r>
-            <a:pPr indent="0" marL="0">
+              <a:rPr lang="en-US" sz="1700" b="1" dirty="0">
+                <a:solidFill>
+                  <a:srgbClr val="213A36"/>
+                </a:solidFill>
+                <a:latin typeface="Cambria" pitchFamily="34" charset="0"/>
+                <a:ea typeface="Cambria" pitchFamily="34" charset="-122"/>
+                <a:cs typeface="Cambria" pitchFamily="34" charset="-120"/>
+              </a:rPr>
+              <a:t>応募が集まらない</a:t>
+            </a:r>
+            <a:endParaRPr lang="en-US" sz="1700" dirty="0"/>
+          </a:p>
+        </p:txBody>
+      </p:sp>
+      <p:sp>
+        <p:nvSpPr>
+          <p:cNvPr id="19" name="Text 17"/>
+          <p:cNvSpPr/>
+          <p:nvPr/>
+        </p:nvSpPr>
+        <p:spPr>
+          <a:xfrm>
+            <a:off x="8412480" y="3977640"/>
+            <a:ext cx="2926080" cy="548640"/>
+          </a:xfrm>
+          <a:prstGeom prst="rect">
+            <a:avLst/>
+          </a:prstGeom>
+          <a:noFill/>
+          <a:ln/>
+        </p:spPr>
+        <p:txBody>
+          <a:bodyPr wrap="square" lIns="0" tIns="0" rIns="0" bIns="0" rtlCol="0" anchor="ctr"/>
+          <a:lstStyle/>
+          <a:p>
+            <a:pPr algn="ctr" indent="0" marL="0">
               <a:lnSpc>
-                <a:spcPts val="2000"/>
+                <a:spcPts val="1700"/>
               </a:lnSpc>
               <a:buNone/>
             </a:pPr>
             <a:r>
-              <a:rPr lang="en-US" sz="1400" b="1" dirty="0">
-                <a:solidFill>
-                  <a:srgbClr val="1E2B3A"/>
-                </a:solidFill>
-                <a:latin typeface="Calibri" pitchFamily="34" charset="0"/>
-                <a:ea typeface="Calibri" pitchFamily="34" charset="-122"/>
-                <a:cs typeface="Calibri" pitchFamily="34" charset="-120"/>
-              </a:rPr>
-              <a:t>出資と役務対価を別建て</a:t>
-            </a:r>
-            <a:pPr indent="0" marL="0">
-              <a:lnSpc>
-                <a:spcPts val="2000"/>
-              </a:lnSpc>
-              <a:buNone/>
-            </a:pPr>
-            <a:r>
-              <a:rPr lang="en-US" sz="1400" dirty="0">
-                <a:solidFill>
-                  <a:srgbClr val="1E2B3A"/>
-                </a:solidFill>
-                <a:latin typeface="Calibri" pitchFamily="34" charset="0"/>
-                <a:ea typeface="Calibri" pitchFamily="34" charset="-122"/>
-                <a:cs typeface="Calibri" pitchFamily="34" charset="-120"/>
-              </a:rPr>
-              <a:t>にして、それぞれ根拠書類が残る形にします。</a:t>
-            </a:r>
-            <a:endParaRPr lang="en-US" sz="1400" dirty="0"/>
-          </a:p>
-        </p:txBody>
-      </p:sp>
-      <p:sp>
-        <p:nvSpPr>
-          <p:cNvPr id="17" name="Text 15"/>
+              <a:rPr lang="en-US" sz="1250" dirty="0">
+                <a:solidFill>
+                  <a:srgbClr val="5C6E69"/>
+                </a:solidFill>
+                <a:latin typeface="Calibri" pitchFamily="34" charset="0"/>
+                <a:ea typeface="Calibri" pitchFamily="34" charset="-122"/>
+                <a:cs typeface="Calibri" pitchFamily="34" charset="-120"/>
+              </a:rPr>
+              <a:t>掲載しても、そもそも応募が来ない・続かない。</a:t>
+            </a:r>
+            <a:endParaRPr lang="en-US" sz="1250" dirty="0"/>
+          </a:p>
+        </p:txBody>
+      </p:sp>
+      <p:sp>
+        <p:nvSpPr>
+          <p:cNvPr id="20" name="Shape 18"/>
+          <p:cNvSpPr/>
+          <p:nvPr/>
+        </p:nvSpPr>
+        <p:spPr>
+          <a:xfrm>
+            <a:off x="548640" y="5074920"/>
+            <a:ext cx="11064240" cy="960120"/>
+          </a:xfrm>
+          <a:prstGeom prst="roundRect">
+            <a:avLst>
+              <a:gd name="adj" fmla="val 5714"/>
+            </a:avLst>
+          </a:prstGeom>
+          <a:solidFill>
+            <a:srgbClr val="0F3D38"/>
+          </a:solidFill>
+          <a:ln/>
+        </p:spPr>
+      </p:sp>
+      <p:sp>
+        <p:nvSpPr>
+          <p:cNvPr id="21" name="Text 19"/>
+          <p:cNvSpPr/>
+          <p:nvPr/>
+        </p:nvSpPr>
+        <p:spPr>
+          <a:xfrm>
+            <a:off x="822960" y="5120640"/>
+            <a:ext cx="10607040" cy="868680"/>
+          </a:xfrm>
+          <a:prstGeom prst="rect">
+            <a:avLst/>
+          </a:prstGeom>
+          <a:noFill/>
+          <a:ln/>
+        </p:spPr>
+        <p:txBody>
+          <a:bodyPr wrap="square" lIns="0" tIns="0" rIns="0" bIns="0" rtlCol="0" anchor="ctr"/>
+          <a:lstStyle/>
+          <a:p>
+            <a:pPr algn="ctr" indent="0" marL="0">
+              <a:buNone/>
+            </a:pPr>
+            <a:r>
+              <a:rPr lang="en-US" sz="2100" dirty="0">
+                <a:solidFill>
+                  <a:srgbClr val="FFFFFF"/>
+                </a:solidFill>
+                <a:latin typeface="Cambria" pitchFamily="34" charset="0"/>
+                <a:ea typeface="Cambria" pitchFamily="34" charset="-122"/>
+                <a:cs typeface="Cambria" pitchFamily="34" charset="-120"/>
+              </a:rPr>
+              <a:t>その採用、</a:t>
+            </a:r>
+            <a:pPr algn="ctr" indent="0" marL="0">
+              <a:buNone/>
+            </a:pPr>
+            <a:r>
+              <a:rPr lang="en-US" sz="2100" b="1" dirty="0">
+                <a:solidFill>
+                  <a:srgbClr val="E6C877"/>
+                </a:solidFill>
+                <a:latin typeface="Cambria" pitchFamily="34" charset="0"/>
+                <a:ea typeface="Cambria" pitchFamily="34" charset="-122"/>
+                <a:cs typeface="Cambria" pitchFamily="34" charset="-120"/>
+              </a:rPr>
+              <a:t>私たちが一緒に担います。</a:t>
+            </a:r>
+            <a:endParaRPr lang="en-US" sz="2100" dirty="0"/>
+          </a:p>
+        </p:txBody>
+      </p:sp>
+      <p:sp>
+        <p:nvSpPr>
+          <p:cNvPr id="22" name="Text 20"/>
           <p:cNvSpPr/>
           <p:nvPr/>
         </p:nvSpPr>
@@ -2398,23 +2357,23 @@
               <a:buNone/>
             </a:pPr>
             <a:r>
-              <a:rPr lang="en-US" sz="900" dirty="0">
-                <a:solidFill>
-                  <a:srgbClr val="5A6B7D"/>
-                </a:solidFill>
-                <a:latin typeface="Calibri" pitchFamily="34" charset="0"/>
-                <a:ea typeface="Calibri" pitchFamily="34" charset="-122"/>
-                <a:cs typeface="Calibri" pitchFamily="34" charset="-120"/>
-              </a:rPr>
-              <a:t>社内検討用のたたき台 ／ 本資料は法務・税務・労務の助言ではありません</a:t>
-            </a:r>
-            <a:endParaRPr lang="en-US" sz="900" dirty="0"/>
-          </a:p>
-        </p:txBody>
-      </p:sp>
-      <p:sp>
-        <p:nvSpPr>
-          <p:cNvPr id="18" name="Text 16"/>
+              <a:rPr lang="en-US" sz="950" dirty="0">
+                <a:solidFill>
+                  <a:srgbClr val="5C6E69"/>
+                </a:solidFill>
+                <a:latin typeface="Calibri" pitchFamily="34" charset="0"/>
+                <a:ea typeface="Calibri" pitchFamily="34" charset="-122"/>
+                <a:cs typeface="Calibri" pitchFamily="34" charset="-120"/>
+              </a:rPr>
+              <a:t>株式会社ランデックス ／ 〇〇サロン様 ご提案資料</a:t>
+            </a:r>
+            <a:endParaRPr lang="en-US" sz="950" dirty="0"/>
+          </a:p>
+        </p:txBody>
+      </p:sp>
+      <p:sp>
+        <p:nvSpPr>
+          <p:cNvPr id="23" name="Text 21"/>
           <p:cNvSpPr/>
           <p:nvPr/>
         </p:nvSpPr>
@@ -2437,9 +2396,9 @@
               <a:buNone/>
             </a:pPr>
             <a:r>
-              <a:rPr lang="en-US" sz="900" dirty="0">
-                <a:solidFill>
-                  <a:srgbClr val="5A6B7D"/>
+              <a:rPr lang="en-US" sz="950" dirty="0">
+                <a:solidFill>
+                  <a:srgbClr val="5C6E69"/>
                 </a:solidFill>
                 <a:latin typeface="Calibri" pitchFamily="34" charset="0"/>
                 <a:ea typeface="Calibri" pitchFamily="34" charset="-122"/>
@@ -2447,7 +2406,7 @@
               </a:rPr>
               <a:t>2 / 6</a:t>
             </a:r>
-            <a:endParaRPr lang="en-US" sz="900" dirty="0"/>
+            <a:endParaRPr lang="en-US" sz="950" dirty="0"/>
           </a:p>
         </p:txBody>
       </p:sp>
@@ -2510,13 +2469,13 @@
             <a:r>
               <a:rPr lang="en-US" sz="1100" b="1" spc="100" kern="0" dirty="0">
                 <a:solidFill>
-                  <a:srgbClr val="2E9E6B"/>
-                </a:solidFill>
-                <a:latin typeface="Calibri" pitchFamily="34" charset="0"/>
-                <a:ea typeface="Calibri" pitchFamily="34" charset="-122"/>
-                <a:cs typeface="Calibri" pitchFamily="34" charset="-120"/>
-              </a:rPr>
-              <a:t>SLIDE 3 ・ 前提</a:t>
+                  <a:srgbClr val="1E8878"/>
+                </a:solidFill>
+                <a:latin typeface="Calibri" pitchFamily="34" charset="0"/>
+                <a:ea typeface="Calibri" pitchFamily="34" charset="-122"/>
+                <a:cs typeface="Calibri" pitchFamily="34" charset="-120"/>
+              </a:rPr>
+              <a:t>SLIDE 3</a:t>
             </a:r>
             <a:endParaRPr lang="en-US" sz="1100" dirty="0"/>
           </a:p>
@@ -2547,50 +2506,89 @@
               <a:buNone/>
             </a:pPr>
             <a:r>
-              <a:rPr lang="en-US" sz="3400" b="1" dirty="0">
-                <a:solidFill>
-                  <a:srgbClr val="1E2B3A"/>
+              <a:rPr lang="en-US" sz="3200" b="1" dirty="0">
+                <a:solidFill>
+                  <a:srgbClr val="213A36"/>
                 </a:solidFill>
                 <a:latin typeface="Cambria" pitchFamily="34" charset="0"/>
                 <a:ea typeface="Cambria" pitchFamily="34" charset="-122"/>
                 <a:cs typeface="Cambria" pitchFamily="34" charset="-120"/>
               </a:rPr>
-              <a:t>守るべき「隠さない」3原則</a:t>
-            </a:r>
-            <a:endParaRPr lang="en-US" sz="3400" dirty="0"/>
-          </a:p>
-        </p:txBody>
-      </p:sp>
-      <p:sp>
-        <p:nvSpPr>
-          <p:cNvPr id="4" name="Shape 2"/>
-          <p:cNvSpPr/>
-          <p:nvPr/>
-        </p:nvSpPr>
-        <p:spPr>
-          <a:xfrm>
-            <a:off x="594360" y="1673352"/>
-            <a:ext cx="566928" cy="566928"/>
+              <a:t>ランデックスと組む、3つのメリット</a:t>
+            </a:r>
+            <a:endParaRPr lang="en-US" sz="3200" dirty="0"/>
+          </a:p>
+        </p:txBody>
+      </p:sp>
+      <p:sp>
+        <p:nvSpPr>
+          <p:cNvPr id="4" name="Text 2"/>
+          <p:cNvSpPr/>
+          <p:nvPr/>
+        </p:nvSpPr>
+        <p:spPr>
+          <a:xfrm>
+            <a:off x="548640" y="1481328"/>
+            <a:ext cx="10972800" cy="365760"/>
+          </a:xfrm>
+          <a:prstGeom prst="rect">
+            <a:avLst/>
+          </a:prstGeom>
+          <a:noFill/>
+          <a:ln/>
+        </p:spPr>
+        <p:txBody>
+          <a:bodyPr wrap="square" lIns="0" tIns="0" rIns="0" bIns="0" rtlCol="0" anchor="ctr"/>
+          <a:lstStyle/>
+          <a:p>
+            <a:pPr indent="0" marL="0">
+              <a:buNone/>
+            </a:pPr>
+            <a:r>
+              <a:rPr lang="en-US" sz="1500" dirty="0">
+                <a:solidFill>
+                  <a:srgbClr val="5C6E69"/>
+                </a:solidFill>
+                <a:latin typeface="Calibri" pitchFamily="34" charset="0"/>
+                <a:ea typeface="Calibri" pitchFamily="34" charset="-122"/>
+                <a:cs typeface="Calibri" pitchFamily="34" charset="-120"/>
+              </a:rPr>
+              <a:t>採用の「大変なところ」を私たちが引き受け、サロン様は本業に集中できます。</a:t>
+            </a:r>
+            <a:endParaRPr lang="en-US" sz="1500" dirty="0"/>
+          </a:p>
+        </p:txBody>
+      </p:sp>
+      <p:sp>
+        <p:nvSpPr>
+          <p:cNvPr id="5" name="Shape 3"/>
+          <p:cNvSpPr/>
+          <p:nvPr/>
+        </p:nvSpPr>
+        <p:spPr>
+          <a:xfrm>
+            <a:off x="594360" y="1783080"/>
+            <a:ext cx="603504" cy="603504"/>
           </a:xfrm>
           <a:prstGeom prst="ellipse">
             <a:avLst/>
           </a:prstGeom>
           <a:solidFill>
-            <a:srgbClr val="2E9E6B"/>
+            <a:srgbClr val="1E8878"/>
           </a:solidFill>
           <a:ln/>
         </p:spPr>
       </p:sp>
       <p:sp>
         <p:nvSpPr>
-          <p:cNvPr id="5" name="Text 3"/>
-          <p:cNvSpPr/>
-          <p:nvPr/>
-        </p:nvSpPr>
-        <p:spPr>
-          <a:xfrm>
-            <a:off x="594360" y="1673352"/>
-            <a:ext cx="566928" cy="566928"/>
+          <p:cNvPr id="6" name="Text 4"/>
+          <p:cNvSpPr/>
+          <p:nvPr/>
+        </p:nvSpPr>
+        <p:spPr>
+          <a:xfrm>
+            <a:off x="594360" y="1783080"/>
+            <a:ext cx="603504" cy="603504"/>
           </a:xfrm>
           <a:prstGeom prst="rect">
             <a:avLst/>
@@ -2606,7 +2604,7 @@
               <a:buNone/>
             </a:pPr>
             <a:r>
-              <a:rPr lang="en-US" sz="2200" b="1" dirty="0">
+              <a:rPr lang="en-US" sz="2400" b="1" dirty="0">
                 <a:solidFill>
                   <a:srgbClr val="FFFFFF"/>
                 </a:solidFill>
@@ -2614,21 +2612,21 @@
                 <a:ea typeface="Calibri" pitchFamily="34" charset="-122"/>
                 <a:cs typeface="Calibri" pitchFamily="34" charset="-120"/>
               </a:rPr>
-              <a:t>✓</a:t>
-            </a:r>
-            <a:endParaRPr lang="en-US" sz="2200" dirty="0"/>
-          </a:p>
-        </p:txBody>
-      </p:sp>
-      <p:sp>
-        <p:nvSpPr>
-          <p:cNvPr id="6" name="Text 4"/>
-          <p:cNvSpPr/>
-          <p:nvPr/>
-        </p:nvSpPr>
-        <p:spPr>
-          <a:xfrm>
-            <a:off x="1417320" y="1600200"/>
+              <a:t>1</a:t>
+            </a:r>
+            <a:endParaRPr lang="en-US" sz="2400" dirty="0"/>
+          </a:p>
+        </p:txBody>
+      </p:sp>
+      <p:sp>
+        <p:nvSpPr>
+          <p:cNvPr id="7" name="Text 5"/>
+          <p:cNvSpPr/>
+          <p:nvPr/>
+        </p:nvSpPr>
+        <p:spPr>
+          <a:xfrm>
+            <a:off x="1463040" y="1737360"/>
             <a:ext cx="10149840" cy="411480"/>
           </a:xfrm>
           <a:prstGeom prst="rect">
@@ -2645,29 +2643,29 @@
               <a:buNone/>
             </a:pPr>
             <a:r>
-              <a:rPr lang="en-US" sz="1800" b="1" dirty="0">
-                <a:solidFill>
-                  <a:srgbClr val="1E2B3A"/>
+              <a:rPr lang="en-US" sz="1900" b="1" dirty="0">
+                <a:solidFill>
+                  <a:srgbClr val="213A36"/>
                 </a:solidFill>
                 <a:latin typeface="Cambria" pitchFamily="34" charset="0"/>
                 <a:ea typeface="Cambria" pitchFamily="34" charset="-122"/>
                 <a:cs typeface="Cambria" pitchFamily="34" charset="-120"/>
               </a:rPr>
-              <a:t>出資は出資として処理する</a:t>
-            </a:r>
-            <a:endParaRPr lang="en-US" sz="1800" dirty="0"/>
-          </a:p>
-        </p:txBody>
-      </p:sp>
-      <p:sp>
-        <p:nvSpPr>
-          <p:cNvPr id="7" name="Text 5"/>
-          <p:cNvSpPr/>
-          <p:nvPr/>
-        </p:nvSpPr>
-        <p:spPr>
-          <a:xfrm>
-            <a:off x="1417320" y="2002536"/>
+              <a:t>知名度・信用力で「応募が集まる」</a:t>
+            </a:r>
+            <a:endParaRPr lang="en-US" sz="1900" dirty="0"/>
+          </a:p>
+        </p:txBody>
+      </p:sp>
+      <p:sp>
+        <p:nvSpPr>
+          <p:cNvPr id="8" name="Text 6"/>
+          <p:cNvSpPr/>
+          <p:nvPr/>
+        </p:nvSpPr>
+        <p:spPr>
+          <a:xfrm>
+            <a:off x="1463040" y="2148840"/>
             <a:ext cx="10149840" cy="502920"/>
           </a:xfrm>
           <a:prstGeom prst="rect">
@@ -2682,55 +2680,55 @@
           <a:p>
             <a:pPr indent="0" marL="0">
               <a:lnSpc>
-                <a:spcPts val="1800"/>
+                <a:spcPts val="1900"/>
               </a:lnSpc>
               <a:buNone/>
             </a:pPr>
             <a:r>
-              <a:rPr lang="en-US" sz="1350" dirty="0">
-                <a:solidFill>
-                  <a:srgbClr val="5A6B7D"/>
-                </a:solidFill>
-                <a:latin typeface="Calibri" pitchFamily="34" charset="0"/>
-                <a:ea typeface="Calibri" pitchFamily="34" charset="-122"/>
-                <a:cs typeface="Calibri" pitchFamily="34" charset="-120"/>
-              </a:rPr>
-              <a:t>名目の付け替えをしない。株式取得または匿名組合など、選んだ形に応じた正しい会計・税務処理を行う。</a:t>
-            </a:r>
-            <a:endParaRPr lang="en-US" sz="1350" dirty="0"/>
-          </a:p>
-        </p:txBody>
-      </p:sp>
-      <p:sp>
-        <p:nvSpPr>
-          <p:cNvPr id="8" name="Shape 6"/>
-          <p:cNvSpPr/>
-          <p:nvPr/>
-        </p:nvSpPr>
-        <p:spPr>
-          <a:xfrm>
-            <a:off x="594360" y="2724912"/>
-            <a:ext cx="566928" cy="566928"/>
+              <a:rPr lang="en-US" sz="1400" dirty="0">
+                <a:solidFill>
+                  <a:srgbClr val="5C6E69"/>
+                </a:solidFill>
+                <a:latin typeface="Calibri" pitchFamily="34" charset="0"/>
+                <a:ea typeface="Calibri" pitchFamily="34" charset="-122"/>
+                <a:cs typeface="Calibri" pitchFamily="34" charset="-120"/>
+              </a:rPr>
+              <a:t>ランデックスの認知度を活かして募集をかけるので、応募が集まりやすくなります。</a:t>
+            </a:r>
+            <a:endParaRPr lang="en-US" sz="1400" dirty="0"/>
+          </a:p>
+        </p:txBody>
+      </p:sp>
+      <p:sp>
+        <p:nvSpPr>
+          <p:cNvPr id="9" name="Shape 7"/>
+          <p:cNvSpPr/>
+          <p:nvPr/>
+        </p:nvSpPr>
+        <p:spPr>
+          <a:xfrm>
+            <a:off x="594360" y="2834640"/>
+            <a:ext cx="603504" cy="603504"/>
           </a:xfrm>
           <a:prstGeom prst="ellipse">
             <a:avLst/>
           </a:prstGeom>
           <a:solidFill>
-            <a:srgbClr val="2E9E6B"/>
+            <a:srgbClr val="1E8878"/>
           </a:solidFill>
           <a:ln/>
         </p:spPr>
       </p:sp>
       <p:sp>
         <p:nvSpPr>
-          <p:cNvPr id="9" name="Text 7"/>
-          <p:cNvSpPr/>
-          <p:nvPr/>
-        </p:nvSpPr>
-        <p:spPr>
-          <a:xfrm>
-            <a:off x="594360" y="2724912"/>
-            <a:ext cx="566928" cy="566928"/>
+          <p:cNvPr id="10" name="Text 8"/>
+          <p:cNvSpPr/>
+          <p:nvPr/>
+        </p:nvSpPr>
+        <p:spPr>
+          <a:xfrm>
+            <a:off x="594360" y="2834640"/>
+            <a:ext cx="603504" cy="603504"/>
           </a:xfrm>
           <a:prstGeom prst="rect">
             <a:avLst/>
@@ -2746,7 +2744,7 @@
               <a:buNone/>
             </a:pPr>
             <a:r>
-              <a:rPr lang="en-US" sz="2200" b="1" dirty="0">
+              <a:rPr lang="en-US" sz="2400" b="1" dirty="0">
                 <a:solidFill>
                   <a:srgbClr val="FFFFFF"/>
                 </a:solidFill>
@@ -2754,21 +2752,21 @@
                 <a:ea typeface="Calibri" pitchFamily="34" charset="-122"/>
                 <a:cs typeface="Calibri" pitchFamily="34" charset="-120"/>
               </a:rPr>
-              <a:t>✓</a:t>
-            </a:r>
-            <a:endParaRPr lang="en-US" sz="2200" dirty="0"/>
-          </a:p>
-        </p:txBody>
-      </p:sp>
-      <p:sp>
-        <p:nvSpPr>
-          <p:cNvPr id="10" name="Text 8"/>
-          <p:cNvSpPr/>
-          <p:nvPr/>
-        </p:nvSpPr>
-        <p:spPr>
-          <a:xfrm>
-            <a:off x="1417320" y="2651760"/>
+              <a:t>2</a:t>
+            </a:r>
+            <a:endParaRPr lang="en-US" sz="2400" dirty="0"/>
+          </a:p>
+        </p:txBody>
+      </p:sp>
+      <p:sp>
+        <p:nvSpPr>
+          <p:cNvPr id="11" name="Text 9"/>
+          <p:cNvSpPr/>
+          <p:nvPr/>
+        </p:nvSpPr>
+        <p:spPr>
+          <a:xfrm>
+            <a:off x="1463040" y="2788920"/>
             <a:ext cx="10149840" cy="411480"/>
           </a:xfrm>
           <a:prstGeom prst="rect">
@@ -2785,29 +2783,29 @@
               <a:buNone/>
             </a:pPr>
             <a:r>
-              <a:rPr lang="en-US" sz="1800" b="1" dirty="0">
-                <a:solidFill>
-                  <a:srgbClr val="1E2B3A"/>
+              <a:rPr lang="en-US" sz="1900" b="1" dirty="0">
+                <a:solidFill>
+                  <a:srgbClr val="213A36"/>
                 </a:solidFill>
                 <a:latin typeface="Cambria" pitchFamily="34" charset="0"/>
                 <a:ea typeface="Cambria" pitchFamily="34" charset="-122"/>
                 <a:cs typeface="Cambria" pitchFamily="34" charset="-120"/>
               </a:rPr>
-              <a:t>採用支援は実態のある役務の対価としてのみ請求する</a:t>
-            </a:r>
-            <a:endParaRPr lang="en-US" sz="1800" dirty="0"/>
-          </a:p>
-        </p:txBody>
-      </p:sp>
-      <p:sp>
-        <p:nvSpPr>
-          <p:cNvPr id="11" name="Text 9"/>
-          <p:cNvSpPr/>
-          <p:nvPr/>
-        </p:nvSpPr>
-        <p:spPr>
-          <a:xfrm>
-            <a:off x="1417320" y="3054096"/>
+              <a:t>採用のプロが、実務をそのまま代行</a:t>
+            </a:r>
+            <a:endParaRPr lang="en-US" sz="1900" dirty="0"/>
+          </a:p>
+        </p:txBody>
+      </p:sp>
+      <p:sp>
+        <p:nvSpPr>
+          <p:cNvPr id="12" name="Text 10"/>
+          <p:cNvSpPr/>
+          <p:nvPr/>
+        </p:nvSpPr>
+        <p:spPr>
+          <a:xfrm>
+            <a:off x="1463040" y="3200400"/>
             <a:ext cx="10149840" cy="502920"/>
           </a:xfrm>
           <a:prstGeom prst="rect">
@@ -2822,55 +2820,55 @@
           <a:p>
             <a:pPr indent="0" marL="0">
               <a:lnSpc>
-                <a:spcPts val="1800"/>
+                <a:spcPts val="1900"/>
               </a:lnSpc>
               <a:buNone/>
             </a:pPr>
             <a:r>
-              <a:rPr lang="en-US" sz="1350" dirty="0">
-                <a:solidFill>
-                  <a:srgbClr val="5A6B7D"/>
-                </a:solidFill>
-                <a:latin typeface="Calibri" pitchFamily="34" charset="0"/>
-                <a:ea typeface="Calibri" pitchFamily="34" charset="-122"/>
-                <a:cs typeface="Calibri" pitchFamily="34" charset="-120"/>
-              </a:rPr>
-              <a:t>実際に提供した採用実務・コンサルに対して、実費・実態に見合う金額を請求。架空・水増しをしない。</a:t>
-            </a:r>
-            <a:endParaRPr lang="en-US" sz="1350" dirty="0"/>
-          </a:p>
-        </p:txBody>
-      </p:sp>
-      <p:sp>
-        <p:nvSpPr>
-          <p:cNvPr id="12" name="Shape 10"/>
-          <p:cNvSpPr/>
-          <p:nvPr/>
-        </p:nvSpPr>
-        <p:spPr>
-          <a:xfrm>
-            <a:off x="594360" y="3776472"/>
-            <a:ext cx="566928" cy="566928"/>
+              <a:rPr lang="en-US" sz="1400" dirty="0">
+                <a:solidFill>
+                  <a:srgbClr val="5C6E69"/>
+                </a:solidFill>
+                <a:latin typeface="Calibri" pitchFamily="34" charset="0"/>
+                <a:ea typeface="Calibri" pitchFamily="34" charset="-122"/>
+                <a:cs typeface="Calibri" pitchFamily="34" charset="-120"/>
+              </a:rPr>
+              <a:t>求人の作成から応募対応・面接調整まで、採用の手間を私たちが引き受けます。</a:t>
+            </a:r>
+            <a:endParaRPr lang="en-US" sz="1400" dirty="0"/>
+          </a:p>
+        </p:txBody>
+      </p:sp>
+      <p:sp>
+        <p:nvSpPr>
+          <p:cNvPr id="13" name="Shape 11"/>
+          <p:cNvSpPr/>
+          <p:nvPr/>
+        </p:nvSpPr>
+        <p:spPr>
+          <a:xfrm>
+            <a:off x="594360" y="3886200"/>
+            <a:ext cx="603504" cy="603504"/>
           </a:xfrm>
           <a:prstGeom prst="ellipse">
             <a:avLst/>
           </a:prstGeom>
           <a:solidFill>
-            <a:srgbClr val="2E9E6B"/>
+            <a:srgbClr val="1E8878"/>
           </a:solidFill>
           <a:ln/>
         </p:spPr>
       </p:sp>
       <p:sp>
         <p:nvSpPr>
-          <p:cNvPr id="13" name="Text 11"/>
-          <p:cNvSpPr/>
-          <p:nvPr/>
-        </p:nvSpPr>
-        <p:spPr>
-          <a:xfrm>
-            <a:off x="594360" y="3776472"/>
-            <a:ext cx="566928" cy="566928"/>
+          <p:cNvPr id="14" name="Text 12"/>
+          <p:cNvSpPr/>
+          <p:nvPr/>
+        </p:nvSpPr>
+        <p:spPr>
+          <a:xfrm>
+            <a:off x="594360" y="3886200"/>
+            <a:ext cx="603504" cy="603504"/>
           </a:xfrm>
           <a:prstGeom prst="rect">
             <a:avLst/>
@@ -2886,7 +2884,7 @@
               <a:buNone/>
             </a:pPr>
             <a:r>
-              <a:rPr lang="en-US" sz="2200" b="1" dirty="0">
+              <a:rPr lang="en-US" sz="2400" b="1" dirty="0">
                 <a:solidFill>
                   <a:srgbClr val="FFFFFF"/>
                 </a:solidFill>
@@ -2894,21 +2892,21 @@
                 <a:ea typeface="Calibri" pitchFamily="34" charset="-122"/>
                 <a:cs typeface="Calibri" pitchFamily="34" charset="-120"/>
               </a:rPr>
-              <a:t>✓</a:t>
-            </a:r>
-            <a:endParaRPr lang="en-US" sz="2200" dirty="0"/>
-          </a:p>
-        </p:txBody>
-      </p:sp>
-      <p:sp>
-        <p:nvSpPr>
-          <p:cNvPr id="14" name="Text 12"/>
-          <p:cNvSpPr/>
-          <p:nvPr/>
-        </p:nvSpPr>
-        <p:spPr>
-          <a:xfrm>
-            <a:off x="1417320" y="3703320"/>
+              <a:t>3</a:t>
+            </a:r>
+            <a:endParaRPr lang="en-US" sz="2400" dirty="0"/>
+          </a:p>
+        </p:txBody>
+      </p:sp>
+      <p:sp>
+        <p:nvSpPr>
+          <p:cNvPr id="15" name="Text 13"/>
+          <p:cNvSpPr/>
+          <p:nvPr/>
+        </p:nvSpPr>
+        <p:spPr>
+          <a:xfrm>
+            <a:off x="1463040" y="3840480"/>
             <a:ext cx="10149840" cy="411480"/>
           </a:xfrm>
           <a:prstGeom prst="rect">
@@ -2925,29 +2923,29 @@
               <a:buNone/>
             </a:pPr>
             <a:r>
-              <a:rPr lang="en-US" sz="1800" b="1" dirty="0">
-                <a:solidFill>
-                  <a:srgbClr val="1E2B3A"/>
+              <a:rPr lang="en-US" sz="1900" b="1" dirty="0">
+                <a:solidFill>
+                  <a:srgbClr val="213A36"/>
                 </a:solidFill>
                 <a:latin typeface="Cambria" pitchFamily="34" charset="0"/>
                 <a:ea typeface="Cambria" pitchFamily="34" charset="-122"/>
                 <a:cs typeface="Cambria" pitchFamily="34" charset="-120"/>
               </a:rPr>
-              <a:t>雇用主はサロンであることを明記する</a:t>
-            </a:r>
-            <a:endParaRPr lang="en-US" sz="1800" dirty="0"/>
-          </a:p>
-        </p:txBody>
-      </p:sp>
-      <p:sp>
-        <p:nvSpPr>
-          <p:cNvPr id="15" name="Text 13"/>
-          <p:cNvSpPr/>
-          <p:nvPr/>
-        </p:nvSpPr>
-        <p:spPr>
-          <a:xfrm>
-            <a:off x="1417320" y="4105656"/>
+              <a:t>採用費の一部を、私たちが負担</a:t>
+            </a:r>
+            <a:endParaRPr lang="en-US" sz="1900" dirty="0"/>
+          </a:p>
+        </p:txBody>
+      </p:sp>
+      <p:sp>
+        <p:nvSpPr>
+          <p:cNvPr id="16" name="Text 14"/>
+          <p:cNvSpPr/>
+          <p:nvPr/>
+        </p:nvSpPr>
+        <p:spPr>
+          <a:xfrm>
+            <a:off x="1463040" y="4251960"/>
             <a:ext cx="10149840" cy="502920"/>
           </a:xfrm>
           <a:prstGeom prst="rect">
@@ -2962,47 +2960,47 @@
           <a:p>
             <a:pPr indent="0" marL="0">
               <a:lnSpc>
-                <a:spcPts val="1800"/>
+                <a:spcPts val="1900"/>
               </a:lnSpc>
               <a:buNone/>
             </a:pPr>
             <a:r>
-              <a:rPr lang="en-US" sz="1350" dirty="0">
-                <a:solidFill>
-                  <a:srgbClr val="5A6B7D"/>
-                </a:solidFill>
-                <a:latin typeface="Calibri" pitchFamily="34" charset="0"/>
-                <a:ea typeface="Calibri" pitchFamily="34" charset="-122"/>
-                <a:cs typeface="Calibri" pitchFamily="34" charset="-120"/>
-              </a:rPr>
-              <a:t>求人票・契約書に「実際の雇用主は〇〇サロン」と明示。応募者に労働条件を正確に提示する。</a:t>
-            </a:r>
-            <a:endParaRPr lang="en-US" sz="1350" dirty="0"/>
-          </a:p>
-        </p:txBody>
-      </p:sp>
-      <p:sp>
-        <p:nvSpPr>
-          <p:cNvPr id="16" name="Shape 14"/>
-          <p:cNvSpPr/>
-          <p:nvPr/>
-        </p:nvSpPr>
-        <p:spPr>
-          <a:xfrm>
-            <a:off x="548640" y="4983480"/>
-            <a:ext cx="11064240" cy="1097280"/>
+              <a:rPr lang="en-US" sz="1400" dirty="0">
+                <a:solidFill>
+                  <a:srgbClr val="5C6E69"/>
+                </a:solidFill>
+                <a:latin typeface="Calibri" pitchFamily="34" charset="0"/>
+                <a:ea typeface="Calibri" pitchFamily="34" charset="-122"/>
+                <a:cs typeface="Calibri" pitchFamily="34" charset="-120"/>
+              </a:rPr>
+              <a:t>出資という形で採用にかかる費用を一緒に負担。サロン様の初期負担を軽くします。</a:t>
+            </a:r>
+            <a:endParaRPr lang="en-US" sz="1400" dirty="0"/>
+          </a:p>
+        </p:txBody>
+      </p:sp>
+      <p:sp>
+        <p:nvSpPr>
+          <p:cNvPr id="17" name="Shape 15"/>
+          <p:cNvSpPr/>
+          <p:nvPr/>
+        </p:nvSpPr>
+        <p:spPr>
+          <a:xfrm>
+            <a:off x="548640" y="5029200"/>
+            <a:ext cx="11064240" cy="960120"/>
           </a:xfrm>
           <a:prstGeom prst="roundRect">
             <a:avLst>
-              <a:gd name="adj" fmla="val 5000"/>
+              <a:gd name="adj" fmla="val 5714"/>
             </a:avLst>
           </a:prstGeom>
           <a:solidFill>
-            <a:srgbClr val="FBF1E2"/>
+            <a:srgbClr val="FBF4E6"/>
           </a:solidFill>
           <a:ln w="12700">
             <a:solidFill>
-              <a:srgbClr val="E4C08A"/>
+              <a:srgbClr val="EAD9A6"/>
             </a:solidFill>
             <a:prstDash val="solid"/>
           </a:ln>
@@ -3010,100 +3008,60 @@
       </p:sp>
       <p:sp>
         <p:nvSpPr>
-          <p:cNvPr id="17" name="Text 15"/>
-          <p:cNvSpPr/>
-          <p:nvPr/>
-        </p:nvSpPr>
-        <p:spPr>
-          <a:xfrm>
-            <a:off x="822960" y="5120640"/>
-            <a:ext cx="10607040" cy="822960"/>
-          </a:xfrm>
-          <a:prstGeom prst="rect">
-            <a:avLst/>
-          </a:prstGeom>
-          <a:noFill/>
-          <a:ln/>
-        </p:spPr>
-        <p:txBody>
-          <a:bodyPr wrap="square" lIns="0" tIns="0" rIns="0" bIns="0" rtlCol="0" anchor="ctr"/>
-          <a:lstStyle/>
-          <a:p>
-            <a:pPr indent="0" marL="0">
-              <a:lnSpc>
-                <a:spcPts val="2000"/>
-              </a:lnSpc>
-              <a:buNone/>
-            </a:pPr>
-            <a:r>
-              <a:rPr lang="en-US" sz="1400" b="1" dirty="0">
-                <a:solidFill>
-                  <a:srgbClr val="C8791F"/>
-                </a:solidFill>
-                <a:latin typeface="Calibri" pitchFamily="34" charset="0"/>
-                <a:ea typeface="Calibri" pitchFamily="34" charset="-122"/>
-                <a:cs typeface="Calibri" pitchFamily="34" charset="-120"/>
-              </a:rPr>
-              <a:t>採らない選択　</a:t>
-            </a:r>
-            <a:pPr indent="0" marL="0">
-              <a:lnSpc>
-                <a:spcPts val="2000"/>
-              </a:lnSpc>
-              <a:buNone/>
-            </a:pPr>
-            <a:r>
-              <a:rPr lang="en-US" sz="1400" dirty="0">
-                <a:solidFill>
-                  <a:srgbClr val="6B4E23"/>
-                </a:solidFill>
-                <a:latin typeface="Calibri" pitchFamily="34" charset="0"/>
-                <a:ea typeface="Calibri" pitchFamily="34" charset="-122"/>
-                <a:cs typeface="Calibri" pitchFamily="34" charset="-120"/>
-              </a:rPr>
-              <a:t>「税務署に怪しまれないよう名目を変える」「連名にすれば法的リスクはゼロ」といった</a:t>
-            </a:r>
-            <a:pPr indent="0" marL="0">
-              <a:lnSpc>
-                <a:spcPts val="2000"/>
-              </a:lnSpc>
-              <a:buNone/>
-            </a:pPr>
-            <a:r>
-              <a:rPr lang="en-US" sz="1400" b="1" dirty="0">
-                <a:solidFill>
-                  <a:srgbClr val="1E2B3A"/>
-                </a:solidFill>
-                <a:latin typeface="Calibri" pitchFamily="34" charset="0"/>
-                <a:ea typeface="Calibri" pitchFamily="34" charset="-122"/>
-                <a:cs typeface="Calibri" pitchFamily="34" charset="-120"/>
-              </a:rPr>
-              <a:t>回避を目的にした設計は行いません。</a:t>
-            </a:r>
-            <a:pPr indent="0" marL="0">
-              <a:lnSpc>
-                <a:spcPts val="2000"/>
-              </a:lnSpc>
-              <a:buNone/>
-            </a:pPr>
-            <a:r>
-              <a:rPr lang="en-US" sz="1400" dirty="0">
-                <a:solidFill>
-                  <a:srgbClr val="6B4E23"/>
-                </a:solidFill>
-                <a:latin typeface="Calibri" pitchFamily="34" charset="0"/>
-                <a:ea typeface="Calibri" pitchFamily="34" charset="-122"/>
-                <a:cs typeface="Calibri" pitchFamily="34" charset="-120"/>
-              </a:rPr>
-              <a:t>透明性そのものが、後々の一番のリスク対策になります。</a:t>
-            </a:r>
-            <a:endParaRPr lang="en-US" sz="1400" dirty="0"/>
-          </a:p>
-        </p:txBody>
-      </p:sp>
-      <p:sp>
-        <p:nvSpPr>
           <p:cNvPr id="18" name="Text 16"/>
+          <p:cNvSpPr/>
+          <p:nvPr/>
+        </p:nvSpPr>
+        <p:spPr>
+          <a:xfrm>
+            <a:off x="822960" y="5074920"/>
+            <a:ext cx="10607040" cy="868680"/>
+          </a:xfrm>
+          <a:prstGeom prst="rect">
+            <a:avLst/>
+          </a:prstGeom>
+          <a:noFill/>
+          <a:ln/>
+        </p:spPr>
+        <p:txBody>
+          <a:bodyPr wrap="square" lIns="0" tIns="0" rIns="0" bIns="0" rtlCol="0" anchor="ctr"/>
+          <a:lstStyle/>
+          <a:p>
+            <a:pPr algn="ctr" indent="0" marL="0">
+              <a:buNone/>
+            </a:pPr>
+            <a:r>
+              <a:rPr lang="en-US" sz="1900" dirty="0">
+                <a:solidFill>
+                  <a:srgbClr val="213A36"/>
+                </a:solidFill>
+                <a:latin typeface="Cambria" pitchFamily="34" charset="0"/>
+                <a:ea typeface="Cambria" pitchFamily="34" charset="-122"/>
+                <a:cs typeface="Cambria" pitchFamily="34" charset="-120"/>
+              </a:rPr>
+              <a:t>一緒だから、</a:t>
+            </a:r>
+            <a:pPr algn="ctr" indent="0" marL="0">
+              <a:buNone/>
+            </a:pPr>
+            <a:r>
+              <a:rPr lang="en-US" sz="1900" b="1" dirty="0">
+                <a:solidFill>
+                  <a:srgbClr val="8A6A1E"/>
+                </a:solidFill>
+                <a:latin typeface="Cambria" pitchFamily="34" charset="0"/>
+                <a:ea typeface="Cambria" pitchFamily="34" charset="-122"/>
+                <a:cs typeface="Cambria" pitchFamily="34" charset="-120"/>
+              </a:rPr>
+              <a:t>採用がラクになり、店舗は運営に集中できる。</a:t>
+            </a:r>
+            <a:endParaRPr lang="en-US" sz="1900" dirty="0"/>
+          </a:p>
+        </p:txBody>
+      </p:sp>
+      <p:sp>
+        <p:nvSpPr>
+          <p:cNvPr id="19" name="Text 17"/>
           <p:cNvSpPr/>
           <p:nvPr/>
         </p:nvSpPr>
@@ -3126,23 +3084,23 @@
               <a:buNone/>
             </a:pPr>
             <a:r>
-              <a:rPr lang="en-US" sz="900" dirty="0">
-                <a:solidFill>
-                  <a:srgbClr val="5A6B7D"/>
-                </a:solidFill>
-                <a:latin typeface="Calibri" pitchFamily="34" charset="0"/>
-                <a:ea typeface="Calibri" pitchFamily="34" charset="-122"/>
-                <a:cs typeface="Calibri" pitchFamily="34" charset="-120"/>
-              </a:rPr>
-              <a:t>社内検討用のたたき台 ／ 本資料は法務・税務・労務の助言ではありません</a:t>
-            </a:r>
-            <a:endParaRPr lang="en-US" sz="900" dirty="0"/>
-          </a:p>
-        </p:txBody>
-      </p:sp>
-      <p:sp>
-        <p:nvSpPr>
-          <p:cNvPr id="19" name="Text 17"/>
+              <a:rPr lang="en-US" sz="950" dirty="0">
+                <a:solidFill>
+                  <a:srgbClr val="5C6E69"/>
+                </a:solidFill>
+                <a:latin typeface="Calibri" pitchFamily="34" charset="0"/>
+                <a:ea typeface="Calibri" pitchFamily="34" charset="-122"/>
+                <a:cs typeface="Calibri" pitchFamily="34" charset="-120"/>
+              </a:rPr>
+              <a:t>株式会社ランデックス ／ 〇〇サロン様 ご提案資料</a:t>
+            </a:r>
+            <a:endParaRPr lang="en-US" sz="950" dirty="0"/>
+          </a:p>
+        </p:txBody>
+      </p:sp>
+      <p:sp>
+        <p:nvSpPr>
+          <p:cNvPr id="20" name="Text 18"/>
           <p:cNvSpPr/>
           <p:nvPr/>
         </p:nvSpPr>
@@ -3165,9 +3123,9 @@
               <a:buNone/>
             </a:pPr>
             <a:r>
-              <a:rPr lang="en-US" sz="900" dirty="0">
-                <a:solidFill>
-                  <a:srgbClr val="5A6B7D"/>
+              <a:rPr lang="en-US" sz="950" dirty="0">
+                <a:solidFill>
+                  <a:srgbClr val="5C6E69"/>
                 </a:solidFill>
                 <a:latin typeface="Calibri" pitchFamily="34" charset="0"/>
                 <a:ea typeface="Calibri" pitchFamily="34" charset="-122"/>
@@ -3175,7 +3133,7 @@
               </a:rPr>
               <a:t>3 / 6</a:t>
             </a:r>
-            <a:endParaRPr lang="en-US" sz="900" dirty="0"/>
+            <a:endParaRPr lang="en-US" sz="950" dirty="0"/>
           </a:p>
         </p:txBody>
       </p:sp>
@@ -3238,13 +3196,13 @@
             <a:r>
               <a:rPr lang="en-US" sz="1100" b="1" spc="100" kern="0" dirty="0">
                 <a:solidFill>
-                  <a:srgbClr val="2E7DD1"/>
-                </a:solidFill>
-                <a:latin typeface="Calibri" pitchFamily="34" charset="0"/>
-                <a:ea typeface="Calibri" pitchFamily="34" charset="-122"/>
-                <a:cs typeface="Calibri" pitchFamily="34" charset="-120"/>
-              </a:rPr>
-              <a:t>SLIDE 4 ・ リターン設計</a:t>
+                  <a:srgbClr val="1E8878"/>
+                </a:solidFill>
+                <a:latin typeface="Calibri" pitchFamily="34" charset="0"/>
+                <a:ea typeface="Calibri" pitchFamily="34" charset="-122"/>
+                <a:cs typeface="Calibri" pitchFamily="34" charset="-120"/>
+              </a:rPr>
+              <a:t>SLIDE 4</a:t>
             </a:r>
             <a:endParaRPr lang="en-US" sz="1100" dirty="0"/>
           </a:p>
@@ -3275,42 +3233,81 @@
               <a:buNone/>
             </a:pPr>
             <a:r>
-              <a:rPr lang="en-US" sz="3200" b="1" dirty="0">
-                <a:solidFill>
-                  <a:srgbClr val="1E2B3A"/>
+              <a:rPr lang="en-US" sz="3400" b="1" dirty="0">
+                <a:solidFill>
+                  <a:srgbClr val="213A36"/>
                 </a:solidFill>
                 <a:latin typeface="Cambria" pitchFamily="34" charset="0"/>
                 <a:ea typeface="Cambria" pitchFamily="34" charset="-122"/>
                 <a:cs typeface="Cambria" pitchFamily="34" charset="-120"/>
               </a:rPr>
-              <a:t>クリーンな利益配分（リターン）の考え方</a:t>
-            </a:r>
-            <a:endParaRPr lang="en-US" sz="3200" dirty="0"/>
-          </a:p>
-        </p:txBody>
-      </p:sp>
-      <p:sp>
-        <p:nvSpPr>
-          <p:cNvPr id="4" name="Shape 2"/>
-          <p:cNvSpPr/>
-          <p:nvPr/>
-        </p:nvSpPr>
-        <p:spPr>
-          <a:xfrm>
-            <a:off x="548640" y="1691640"/>
-            <a:ext cx="6766560" cy="2834640"/>
+              <a:t>一緒に取り組む「座組み」</a:t>
+            </a:r>
+            <a:endParaRPr lang="en-US" sz="3400" dirty="0"/>
+          </a:p>
+        </p:txBody>
+      </p:sp>
+      <p:sp>
+        <p:nvSpPr>
+          <p:cNvPr id="4" name="Text 2"/>
+          <p:cNvSpPr/>
+          <p:nvPr/>
+        </p:nvSpPr>
+        <p:spPr>
+          <a:xfrm>
+            <a:off x="548640" y="1481328"/>
+            <a:ext cx="10972800" cy="365760"/>
+          </a:xfrm>
+          <a:prstGeom prst="rect">
+            <a:avLst/>
+          </a:prstGeom>
+          <a:noFill/>
+          <a:ln/>
+        </p:spPr>
+        <p:txBody>
+          <a:bodyPr wrap="square" lIns="0" tIns="0" rIns="0" bIns="0" rtlCol="0" anchor="ctr"/>
+          <a:lstStyle/>
+          <a:p>
+            <a:pPr indent="0" marL="0">
+              <a:buNone/>
+            </a:pPr>
+            <a:r>
+              <a:rPr lang="en-US" sz="1500" dirty="0">
+                <a:solidFill>
+                  <a:srgbClr val="5C6E69"/>
+                </a:solidFill>
+                <a:latin typeface="Calibri" pitchFamily="34" charset="0"/>
+                <a:ea typeface="Calibri" pitchFamily="34" charset="-122"/>
+                <a:cs typeface="Calibri" pitchFamily="34" charset="-120"/>
+              </a:rPr>
+              <a:t>お互いの得意なことを持ち寄る、シンプルな役割分担です。</a:t>
+            </a:r>
+            <a:endParaRPr lang="en-US" sz="1500" dirty="0"/>
+          </a:p>
+        </p:txBody>
+      </p:sp>
+      <p:sp>
+        <p:nvSpPr>
+          <p:cNvPr id="5" name="Shape 3"/>
+          <p:cNvSpPr/>
+          <p:nvPr/>
+        </p:nvSpPr>
+        <p:spPr>
+          <a:xfrm>
+            <a:off x="548640" y="2194560"/>
+            <a:ext cx="5074920" cy="2743200"/>
           </a:xfrm>
           <a:prstGeom prst="roundRect">
             <a:avLst>
-              <a:gd name="adj" fmla="val 2581"/>
+              <a:gd name="adj" fmla="val 2667"/>
             </a:avLst>
           </a:prstGeom>
           <a:solidFill>
-            <a:srgbClr val="EAF6EF"/>
+            <a:srgbClr val="F1F7F5"/>
           </a:solidFill>
           <a:ln w="12700">
             <a:solidFill>
-              <a:srgbClr val="BFE3CE"/>
+              <a:srgbClr val="D8E6E1"/>
             </a:solidFill>
             <a:prstDash val="solid"/>
           </a:ln>
@@ -3318,23 +3315,41 @@
       </p:sp>
       <p:sp>
         <p:nvSpPr>
-          <p:cNvPr id="5" name="Text 3"/>
-          <p:cNvSpPr/>
-          <p:nvPr/>
-        </p:nvSpPr>
-        <p:spPr>
-          <a:xfrm>
-            <a:off x="822960" y="1920240"/>
-            <a:ext cx="1828800" cy="320040"/>
-          </a:xfrm>
-          <a:prstGeom prst="rect">
+          <p:cNvPr id="6" name="Shape 4"/>
+          <p:cNvSpPr/>
+          <p:nvPr/>
+        </p:nvSpPr>
+        <p:spPr>
+          <a:xfrm>
+            <a:off x="868680" y="2514600"/>
+            <a:ext cx="548640" cy="548640"/>
+          </a:xfrm>
+          <a:prstGeom prst="ellipse">
             <a:avLst/>
           </a:prstGeom>
           <a:solidFill>
-            <a:srgbClr val="2E9E6B"/>
+            <a:srgbClr val="1E8878"/>
           </a:solidFill>
           <a:ln/>
         </p:spPr>
+      </p:sp>
+      <p:sp>
+        <p:nvSpPr>
+          <p:cNvPr id="7" name="Text 5"/>
+          <p:cNvSpPr/>
+          <p:nvPr/>
+        </p:nvSpPr>
+        <p:spPr>
+          <a:xfrm>
+            <a:off x="868680" y="2514600"/>
+            <a:ext cx="548640" cy="548640"/>
+          </a:xfrm>
+          <a:prstGeom prst="rect">
+            <a:avLst/>
+          </a:prstGeom>
+          <a:noFill/>
+          <a:ln/>
+        </p:spPr>
         <p:txBody>
           <a:bodyPr wrap="square" lIns="0" tIns="0" rIns="0" bIns="0" rtlCol="0" anchor="ctr"/>
           <a:lstStyle/>
@@ -3343,7 +3358,7 @@
               <a:buNone/>
             </a:pPr>
             <a:r>
-              <a:rPr lang="en-US" sz="1200" b="1" dirty="0">
+              <a:rPr lang="en-US" sz="2000" b="1" dirty="0">
                 <a:solidFill>
                   <a:srgbClr val="FFFFFF"/>
                 </a:solidFill>
@@ -3351,22 +3366,22 @@
                 <a:ea typeface="Calibri" pitchFamily="34" charset="-122"/>
                 <a:cs typeface="Calibri" pitchFamily="34" charset="-120"/>
               </a:rPr>
-              <a:t>推奨軸</a:t>
-            </a:r>
-            <a:endParaRPr lang="en-US" sz="1200" dirty="0"/>
-          </a:p>
-        </p:txBody>
-      </p:sp>
-      <p:sp>
-        <p:nvSpPr>
-          <p:cNvPr id="6" name="Text 4"/>
-          <p:cNvSpPr/>
-          <p:nvPr/>
-        </p:nvSpPr>
-        <p:spPr>
-          <a:xfrm>
-            <a:off x="822960" y="2377440"/>
-            <a:ext cx="6126480" cy="457200"/>
+              <a:t>L</a:t>
+            </a:r>
+            <a:endParaRPr lang="en-US" sz="2000" dirty="0"/>
+          </a:p>
+        </p:txBody>
+      </p:sp>
+      <p:sp>
+        <p:nvSpPr>
+          <p:cNvPr id="8" name="Text 6"/>
+          <p:cNvSpPr/>
+          <p:nvPr/>
+        </p:nvSpPr>
+        <p:spPr>
+          <a:xfrm>
+            <a:off x="1554480" y="2578608"/>
+            <a:ext cx="3200400" cy="457200"/>
           </a:xfrm>
           <a:prstGeom prst="rect">
             <a:avLst/>
@@ -3384,13 +3399,13 @@
             <a:r>
               <a:rPr lang="en-US" sz="2000" b="1" dirty="0">
                 <a:solidFill>
-                  <a:srgbClr val="2E9E6B"/>
+                  <a:srgbClr val="1E8878"/>
                 </a:solidFill>
                 <a:latin typeface="Cambria" pitchFamily="34" charset="0"/>
                 <a:ea typeface="Cambria" pitchFamily="34" charset="-122"/>
                 <a:cs typeface="Cambria" pitchFamily="34" charset="-120"/>
               </a:rPr>
-              <a:t>成果報酬 ＋ 正規の配当／分配</a:t>
+              <a:t>ランデックス</a:t>
             </a:r>
             <a:endParaRPr lang="en-US" sz="2000" dirty="0"/>
           </a:p>
@@ -3398,218 +3413,69 @@
       </p:sp>
       <p:sp>
         <p:nvSpPr>
-          <p:cNvPr id="7" name="Text 5"/>
-          <p:cNvSpPr/>
-          <p:nvPr/>
-        </p:nvSpPr>
-        <p:spPr>
-          <a:xfrm>
-            <a:off x="822960" y="2971800"/>
-            <a:ext cx="6126480" cy="1417320"/>
-          </a:xfrm>
-          <a:prstGeom prst="rect">
-            <a:avLst/>
-          </a:prstGeom>
-          <a:noFill/>
-          <a:ln/>
-        </p:spPr>
-        <p:txBody>
-          <a:bodyPr wrap="square" lIns="0" tIns="0" rIns="0" bIns="0" rtlCol="0" anchor="ctr"/>
-          <a:lstStyle/>
-          <a:p>
-            <a:pPr indent="0" marL="0">
+          <p:cNvPr id="9" name="Text 7"/>
+          <p:cNvSpPr/>
+          <p:nvPr/>
+        </p:nvSpPr>
+        <p:spPr>
+          <a:xfrm>
+            <a:off x="914400" y="3291840"/>
+            <a:ext cx="4434840" cy="1463040"/>
+          </a:xfrm>
+          <a:prstGeom prst="rect">
+            <a:avLst/>
+          </a:prstGeom>
+          <a:noFill/>
+          <a:ln/>
+        </p:spPr>
+        <p:txBody>
+          <a:bodyPr wrap="square" lIns="0" tIns="0" rIns="0" bIns="0" rtlCol="0" anchor="ctr"/>
+          <a:lstStyle/>
+          <a:p>
+            <a:pPr marL="177800" indent="-177800">
               <a:lnSpc>
-                <a:spcPts val="2100"/>
+                <a:spcPts val="2000"/>
               </a:lnSpc>
-              <a:buNone/>
-            </a:pPr>
-            <a:r>
-              <a:rPr lang="en-US" sz="1400" dirty="0">
-                <a:solidFill>
-                  <a:srgbClr val="3A5546"/>
-                </a:solidFill>
-                <a:latin typeface="Calibri" pitchFamily="34" charset="0"/>
-                <a:ea typeface="Calibri" pitchFamily="34" charset="-122"/>
-                <a:cs typeface="Calibri" pitchFamily="34" charset="-120"/>
-              </a:rPr>
-              <a:t>「採用1人につき〇万円」の</a:t>
-            </a:r>
-            <a:pPr indent="0" marL="0">
-              <a:lnSpc>
-                <a:spcPts val="2100"/>
-              </a:lnSpc>
-              <a:buNone/>
-            </a:pPr>
-            <a:r>
-              <a:rPr lang="en-US" sz="1400" b="1" dirty="0">
-                <a:solidFill>
-                  <a:srgbClr val="1E2B3A"/>
-                </a:solidFill>
-                <a:latin typeface="Calibri" pitchFamily="34" charset="0"/>
-                <a:ea typeface="Calibri" pitchFamily="34" charset="-122"/>
-                <a:cs typeface="Calibri" pitchFamily="34" charset="-120"/>
-              </a:rPr>
-              <a:t>採用実務の成果報酬</a:t>
-            </a:r>
-            <a:pPr indent="0" marL="0">
-              <a:lnSpc>
-                <a:spcPts val="2100"/>
-              </a:lnSpc>
-              <a:buNone/>
-            </a:pPr>
-            <a:r>
-              <a:rPr lang="en-US" sz="1400" dirty="0">
-                <a:solidFill>
-                  <a:srgbClr val="3A5546"/>
-                </a:solidFill>
-                <a:latin typeface="Calibri" pitchFamily="34" charset="0"/>
-                <a:ea typeface="Calibri" pitchFamily="34" charset="-122"/>
-                <a:cs typeface="Calibri" pitchFamily="34" charset="-120"/>
-              </a:rPr>
-              <a:t>で初期投資を回収し、残りは出資形態に応じた</a:t>
-            </a:r>
-            <a:pPr indent="0" marL="0">
-              <a:lnSpc>
-                <a:spcPts val="2100"/>
-              </a:lnSpc>
-              <a:buNone/>
-            </a:pPr>
-            <a:r>
-              <a:rPr lang="en-US" sz="1400" b="1" dirty="0">
-                <a:solidFill>
-                  <a:srgbClr val="1E2B3A"/>
-                </a:solidFill>
-                <a:latin typeface="Calibri" pitchFamily="34" charset="0"/>
-                <a:ea typeface="Calibri" pitchFamily="34" charset="-122"/>
-                <a:cs typeface="Calibri" pitchFamily="34" charset="-120"/>
-              </a:rPr>
-              <a:t>正規の配当（株式）または分配金（匿名組合）</a:t>
-            </a:r>
-            <a:pPr indent="0" marL="0">
-              <a:lnSpc>
-                <a:spcPts val="2100"/>
-              </a:lnSpc>
-              <a:buNone/>
-            </a:pPr>
-            <a:r>
-              <a:rPr lang="en-US" sz="1400" dirty="0">
-                <a:solidFill>
-                  <a:srgbClr val="3A5546"/>
-                </a:solidFill>
-                <a:latin typeface="Calibri" pitchFamily="34" charset="0"/>
-                <a:ea typeface="Calibri" pitchFamily="34" charset="-122"/>
-                <a:cs typeface="Calibri" pitchFamily="34" charset="-120"/>
-              </a:rPr>
-              <a:t>として受け取る。税務署・サロン側とも最も揉めにくいクリーンな形。</a:t>
-            </a:r>
-            <a:endParaRPr lang="en-US" sz="1400" dirty="0"/>
-          </a:p>
-        </p:txBody>
-      </p:sp>
-      <p:sp>
-        <p:nvSpPr>
-          <p:cNvPr id="8" name="Shape 6"/>
-          <p:cNvSpPr/>
-          <p:nvPr/>
-        </p:nvSpPr>
-        <p:spPr>
-          <a:xfrm>
-            <a:off x="7543800" y="1691640"/>
-            <a:ext cx="4069080" cy="2834640"/>
-          </a:xfrm>
-          <a:prstGeom prst="roundRect">
-            <a:avLst>
-              <a:gd name="adj" fmla="val 2581"/>
-            </a:avLst>
-          </a:prstGeom>
-          <a:solidFill>
-            <a:srgbClr val="F3F6FA"/>
-          </a:solidFill>
-          <a:ln w="12700">
-            <a:solidFill>
-              <a:srgbClr val="DCE4EC"/>
-            </a:solidFill>
-            <a:prstDash val="solid"/>
-          </a:ln>
-        </p:spPr>
-      </p:sp>
-      <p:sp>
-        <p:nvSpPr>
-          <p:cNvPr id="9" name="Text 7"/>
-          <p:cNvSpPr/>
-          <p:nvPr/>
-        </p:nvSpPr>
-        <p:spPr>
-          <a:xfrm>
-            <a:off x="7818120" y="1965960"/>
-            <a:ext cx="3566160" cy="411480"/>
-          </a:xfrm>
-          <a:prstGeom prst="rect">
-            <a:avLst/>
-          </a:prstGeom>
-          <a:noFill/>
-          <a:ln/>
-        </p:spPr>
-        <p:txBody>
-          <a:bodyPr wrap="square" lIns="0" tIns="0" rIns="0" bIns="0" rtlCol="0" anchor="ctr"/>
-          <a:lstStyle/>
-          <a:p>
-            <a:pPr indent="0" marL="0">
-              <a:buNone/>
-            </a:pPr>
-            <a:r>
-              <a:rPr lang="en-US" sz="1600" b="1" dirty="0">
-                <a:solidFill>
-                  <a:srgbClr val="2E7DD1"/>
-                </a:solidFill>
-                <a:latin typeface="Cambria" pitchFamily="34" charset="0"/>
-                <a:ea typeface="Cambria" pitchFamily="34" charset="-122"/>
-                <a:cs typeface="Cambria" pitchFamily="34" charset="-120"/>
-              </a:rPr>
-              <a:t>匿名組合を使う場合の注意</a:t>
-            </a:r>
-            <a:endParaRPr lang="en-US" sz="1600" dirty="0"/>
-          </a:p>
-        </p:txBody>
-      </p:sp>
-      <p:sp>
-        <p:nvSpPr>
-          <p:cNvPr id="10" name="Text 8"/>
-          <p:cNvSpPr/>
-          <p:nvPr/>
-        </p:nvSpPr>
-        <p:spPr>
-          <a:xfrm>
-            <a:off x="7818120" y="2514600"/>
-            <a:ext cx="3520440" cy="1828800"/>
-          </a:xfrm>
-          <a:prstGeom prst="rect">
-            <a:avLst/>
-          </a:prstGeom>
-          <a:noFill/>
-          <a:ln/>
-        </p:spPr>
-        <p:txBody>
-          <a:bodyPr wrap="square" lIns="0" tIns="0" rIns="0" bIns="0" rtlCol="0" anchor="ctr"/>
-          <a:lstStyle/>
+              <a:buSzPct val="100000"/>
+              <a:buChar char="•"/>
+            </a:pPr>
+            <a:r>
+              <a:rPr lang="en-US" sz="1450" b="1" dirty="0">
+                <a:solidFill>
+                  <a:srgbClr val="213A36"/>
+                </a:solidFill>
+                <a:latin typeface="Calibri" pitchFamily="34" charset="0"/>
+                <a:ea typeface="Calibri" pitchFamily="34" charset="-122"/>
+                <a:cs typeface="Calibri" pitchFamily="34" charset="-120"/>
+              </a:rPr>
+              <a:t>採用費の一部を出資</a:t>
+            </a:r>
+            <a:endParaRPr lang="en-US" sz="1450" dirty="0"/>
+          </a:p>
           <a:p>
             <a:pPr indent="0" marL="0">
               <a:lnSpc>
                 <a:spcPts val="2000"/>
               </a:lnSpc>
-              <a:buNone/>
-            </a:pPr>
-            <a:r>
-              <a:rPr lang="en-US" sz="1350" b="1" dirty="0">
-                <a:solidFill>
-                  <a:srgbClr val="1E2B3A"/>
-                </a:solidFill>
-                <a:latin typeface="Calibri" pitchFamily="34" charset="0"/>
-                <a:ea typeface="Calibri" pitchFamily="34" charset="-122"/>
-                <a:cs typeface="Calibri" pitchFamily="34" charset="-120"/>
-              </a:rPr>
-              <a:t>分配金は「分配金」として正しい名目</a:t>
-            </a:r>
+              <a:spcAft>
+                <a:spcPts val="1200"/>
+              </a:spcAft>
+              <a:buNone/>
+            </a:pPr>
+            <a:r>
+              <a:rPr lang="en-US" sz="1250" dirty="0">
+                <a:solidFill>
+                  <a:srgbClr val="5C6E69"/>
+                </a:solidFill>
+                <a:latin typeface="Calibri" pitchFamily="34" charset="0"/>
+                <a:ea typeface="Calibri" pitchFamily="34" charset="-122"/>
+                <a:cs typeface="Calibri" pitchFamily="34" charset="-120"/>
+              </a:rPr>
+              <a:t>採用にかかる費用を一緒に負担</a:t>
+            </a:r>
+            <a:endParaRPr lang="en-US" sz="1450" dirty="0"/>
+          </a:p>
+          <a:p>
             <a:pPr indent="0" marL="0">
               <a:lnSpc>
                 <a:spcPts val="2000"/>
@@ -3617,67 +3483,18 @@
               <a:buNone/>
             </a:pPr>
             <a:r>
-              <a:rPr lang="en-US" sz="1350" dirty="0">
-                <a:solidFill>
-                  <a:srgbClr val="5A6B7D"/>
-                </a:solidFill>
-                <a:latin typeface="Calibri" pitchFamily="34" charset="0"/>
-                <a:ea typeface="Calibri" pitchFamily="34" charset="-122"/>
-                <a:cs typeface="Calibri" pitchFamily="34" charset="-120"/>
-              </a:rPr>
-              <a:t>で処理し、源泉徴収など所定の税務処理を行う。コンサル料などへの付け替えはしない。具体処理は税理士に確認。</a:t>
-            </a:r>
-            <a:endParaRPr lang="en-US" sz="1350" dirty="0"/>
-          </a:p>
-        </p:txBody>
-      </p:sp>
-      <p:sp>
-        <p:nvSpPr>
-          <p:cNvPr id="11" name="Shape 9"/>
-          <p:cNvSpPr/>
-          <p:nvPr/>
-        </p:nvSpPr>
-        <p:spPr>
-          <a:xfrm>
-            <a:off x="548640" y="4800600"/>
-            <a:ext cx="11064240" cy="1280160"/>
-          </a:xfrm>
-          <a:prstGeom prst="roundRect">
-            <a:avLst>
-              <a:gd name="adj" fmla="val 4286"/>
-            </a:avLst>
-          </a:prstGeom>
-          <a:solidFill>
-            <a:srgbClr val="FBF1E2"/>
-          </a:solidFill>
-          <a:ln w="12700">
-            <a:solidFill>
-              <a:srgbClr val="E4C08A"/>
-            </a:solidFill>
-            <a:prstDash val="solid"/>
-          </a:ln>
-        </p:spPr>
-      </p:sp>
-      <p:sp>
-        <p:nvSpPr>
-          <p:cNvPr id="12" name="Text 10"/>
-          <p:cNvSpPr/>
-          <p:nvPr/>
-        </p:nvSpPr>
-        <p:spPr>
-          <a:xfrm>
-            <a:off x="822960" y="4937760"/>
-            <a:ext cx="10607040" cy="1005840"/>
-          </a:xfrm>
-          <a:prstGeom prst="rect">
-            <a:avLst/>
-          </a:prstGeom>
-          <a:noFill/>
-          <a:ln/>
-        </p:spPr>
-        <p:txBody>
-          <a:bodyPr wrap="square" lIns="0" tIns="0" rIns="0" bIns="0" rtlCol="0" anchor="ctr"/>
-          <a:lstStyle/>
+              <a:rPr lang="en-US" sz="1450" b="1" dirty="0">
+                <a:solidFill>
+                  <a:srgbClr val="213A36"/>
+                </a:solidFill>
+                <a:latin typeface="Calibri" pitchFamily="34" charset="0"/>
+                <a:ea typeface="Calibri" pitchFamily="34" charset="-122"/>
+                <a:cs typeface="Calibri" pitchFamily="34" charset="-120"/>
+              </a:rPr>
+              <a:t>採用の実務・集客を担当</a:t>
+            </a:r>
+            <a:endParaRPr lang="en-US" sz="1450" dirty="0"/>
+          </a:p>
           <a:p>
             <a:pPr indent="0" marL="0">
               <a:lnSpc>
@@ -3686,33 +3503,269 @@
               <a:buNone/>
             </a:pPr>
             <a:r>
-              <a:rPr lang="en-US" sz="1400" b="1" dirty="0">
-                <a:solidFill>
-                  <a:srgbClr val="C8791F"/>
-                </a:solidFill>
-                <a:latin typeface="Calibri" pitchFamily="34" charset="0"/>
-                <a:ea typeface="Calibri" pitchFamily="34" charset="-122"/>
-                <a:cs typeface="Calibri" pitchFamily="34" charset="-120"/>
-              </a:rPr>
-              <a:t>採らない形　</a:t>
-            </a:r>
+              <a:rPr lang="en-US" sz="1250" dirty="0">
+                <a:solidFill>
+                  <a:srgbClr val="5C6E69"/>
+                </a:solidFill>
+                <a:latin typeface="Calibri" pitchFamily="34" charset="0"/>
+                <a:ea typeface="Calibri" pitchFamily="34" charset="-122"/>
+                <a:cs typeface="Calibri" pitchFamily="34" charset="-120"/>
+              </a:rPr>
+              <a:t>求人作成・応募対応・面接調整まで</a:t>
+            </a:r>
+            <a:endParaRPr lang="en-US" sz="1450" dirty="0"/>
+          </a:p>
+        </p:txBody>
+      </p:sp>
+      <p:sp>
+        <p:nvSpPr>
+          <p:cNvPr id="10" name="Shape 8"/>
+          <p:cNvSpPr/>
+          <p:nvPr/>
+        </p:nvSpPr>
+        <p:spPr>
+          <a:xfrm>
+            <a:off x="5806440" y="3291840"/>
+            <a:ext cx="548640" cy="548640"/>
+          </a:xfrm>
+          <a:prstGeom prst="ellipse">
+            <a:avLst/>
+          </a:prstGeom>
+          <a:solidFill>
+            <a:srgbClr val="BE9436"/>
+          </a:solidFill>
+          <a:ln/>
+        </p:spPr>
+      </p:sp>
+      <p:sp>
+        <p:nvSpPr>
+          <p:cNvPr id="11" name="Text 9"/>
+          <p:cNvSpPr/>
+          <p:nvPr/>
+        </p:nvSpPr>
+        <p:spPr>
+          <a:xfrm>
+            <a:off x="5806440" y="3291840"/>
+            <a:ext cx="548640" cy="548640"/>
+          </a:xfrm>
+          <a:prstGeom prst="rect">
+            <a:avLst/>
+          </a:prstGeom>
+          <a:noFill/>
+          <a:ln/>
+        </p:spPr>
+        <p:txBody>
+          <a:bodyPr wrap="square" lIns="0" tIns="0" rIns="0" bIns="0" rtlCol="0" anchor="ctr"/>
+          <a:lstStyle/>
+          <a:p>
+            <a:pPr algn="ctr" indent="0" marL="0">
+              <a:buNone/>
+            </a:pPr>
+            <a:r>
+              <a:rPr lang="en-US" sz="2400" b="1" dirty="0">
+                <a:solidFill>
+                  <a:srgbClr val="FFFFFF"/>
+                </a:solidFill>
+                <a:latin typeface="Calibri" pitchFamily="34" charset="0"/>
+                <a:ea typeface="Calibri" pitchFamily="34" charset="-122"/>
+                <a:cs typeface="Calibri" pitchFamily="34" charset="-120"/>
+              </a:rPr>
+              <a:t>＋</a:t>
+            </a:r>
+            <a:endParaRPr lang="en-US" sz="2400" dirty="0"/>
+          </a:p>
+        </p:txBody>
+      </p:sp>
+      <p:sp>
+        <p:nvSpPr>
+          <p:cNvPr id="12" name="Shape 10"/>
+          <p:cNvSpPr/>
+          <p:nvPr/>
+        </p:nvSpPr>
+        <p:spPr>
+          <a:xfrm>
+            <a:off x="6537960" y="2194560"/>
+            <a:ext cx="5074920" cy="2743200"/>
+          </a:xfrm>
+          <a:prstGeom prst="roundRect">
+            <a:avLst>
+              <a:gd name="adj" fmla="val 2667"/>
+            </a:avLst>
+          </a:prstGeom>
+          <a:solidFill>
+            <a:srgbClr val="F1F7F5"/>
+          </a:solidFill>
+          <a:ln w="12700">
+            <a:solidFill>
+              <a:srgbClr val="D8E6E1"/>
+            </a:solidFill>
+            <a:prstDash val="solid"/>
+          </a:ln>
+        </p:spPr>
+      </p:sp>
+      <p:sp>
+        <p:nvSpPr>
+          <p:cNvPr id="13" name="Shape 11"/>
+          <p:cNvSpPr/>
+          <p:nvPr/>
+        </p:nvSpPr>
+        <p:spPr>
+          <a:xfrm>
+            <a:off x="6858000" y="2514600"/>
+            <a:ext cx="548640" cy="548640"/>
+          </a:xfrm>
+          <a:prstGeom prst="ellipse">
+            <a:avLst/>
+          </a:prstGeom>
+          <a:solidFill>
+            <a:srgbClr val="BE9436"/>
+          </a:solidFill>
+          <a:ln/>
+        </p:spPr>
+      </p:sp>
+      <p:sp>
+        <p:nvSpPr>
+          <p:cNvPr id="14" name="Text 12"/>
+          <p:cNvSpPr/>
+          <p:nvPr/>
+        </p:nvSpPr>
+        <p:spPr>
+          <a:xfrm>
+            <a:off x="6858000" y="2514600"/>
+            <a:ext cx="548640" cy="548640"/>
+          </a:xfrm>
+          <a:prstGeom prst="rect">
+            <a:avLst/>
+          </a:prstGeom>
+          <a:noFill/>
+          <a:ln/>
+        </p:spPr>
+        <p:txBody>
+          <a:bodyPr wrap="square" lIns="0" tIns="0" rIns="0" bIns="0" rtlCol="0" anchor="ctr"/>
+          <a:lstStyle/>
+          <a:p>
+            <a:pPr algn="ctr" indent="0" marL="0">
+              <a:buNone/>
+            </a:pPr>
+            <a:r>
+              <a:rPr lang="en-US" sz="2000" b="1" dirty="0">
+                <a:solidFill>
+                  <a:srgbClr val="FFFFFF"/>
+                </a:solidFill>
+                <a:latin typeface="Calibri" pitchFamily="34" charset="0"/>
+                <a:ea typeface="Calibri" pitchFamily="34" charset="-122"/>
+                <a:cs typeface="Calibri" pitchFamily="34" charset="-120"/>
+              </a:rPr>
+              <a:t>S</a:t>
+            </a:r>
+            <a:endParaRPr lang="en-US" sz="2000" dirty="0"/>
+          </a:p>
+        </p:txBody>
+      </p:sp>
+      <p:sp>
+        <p:nvSpPr>
+          <p:cNvPr id="15" name="Text 13"/>
+          <p:cNvSpPr/>
+          <p:nvPr/>
+        </p:nvSpPr>
+        <p:spPr>
+          <a:xfrm>
+            <a:off x="7543800" y="2578608"/>
+            <a:ext cx="3474720" cy="457200"/>
+          </a:xfrm>
+          <a:prstGeom prst="rect">
+            <a:avLst/>
+          </a:prstGeom>
+          <a:noFill/>
+          <a:ln/>
+        </p:spPr>
+        <p:txBody>
+          <a:bodyPr wrap="square" lIns="0" tIns="0" rIns="0" bIns="0" rtlCol="0" anchor="ctr"/>
+          <a:lstStyle/>
+          <a:p>
+            <a:pPr indent="0" marL="0">
+              <a:buNone/>
+            </a:pPr>
+            <a:r>
+              <a:rPr lang="en-US" sz="2000" b="1" dirty="0">
+                <a:solidFill>
+                  <a:srgbClr val="9A7A22"/>
+                </a:solidFill>
+                <a:latin typeface="Cambria" pitchFamily="34" charset="0"/>
+                <a:ea typeface="Cambria" pitchFamily="34" charset="-122"/>
+                <a:cs typeface="Cambria" pitchFamily="34" charset="-120"/>
+              </a:rPr>
+              <a:t>〇〇サロン様</a:t>
+            </a:r>
+            <a:endParaRPr lang="en-US" sz="2000" dirty="0"/>
+          </a:p>
+        </p:txBody>
+      </p:sp>
+      <p:sp>
+        <p:nvSpPr>
+          <p:cNvPr id="16" name="Text 14"/>
+          <p:cNvSpPr/>
+          <p:nvPr/>
+        </p:nvSpPr>
+        <p:spPr>
+          <a:xfrm>
+            <a:off x="6903720" y="3291840"/>
+            <a:ext cx="4434840" cy="1463040"/>
+          </a:xfrm>
+          <a:prstGeom prst="rect">
+            <a:avLst/>
+          </a:prstGeom>
+          <a:noFill/>
+          <a:ln/>
+        </p:spPr>
+        <p:txBody>
+          <a:bodyPr wrap="square" lIns="0" tIns="0" rIns="0" bIns="0" rtlCol="0" anchor="ctr"/>
+          <a:lstStyle/>
+          <a:p>
+            <a:pPr marL="177800" indent="-177800">
+              <a:lnSpc>
+                <a:spcPts val="2000"/>
+              </a:lnSpc>
+              <a:buSzPct val="100000"/>
+              <a:buChar char="•"/>
+            </a:pPr>
+            <a:r>
+              <a:rPr lang="en-US" sz="1450" b="1" dirty="0">
+                <a:solidFill>
+                  <a:srgbClr val="213A36"/>
+                </a:solidFill>
+                <a:latin typeface="Calibri" pitchFamily="34" charset="0"/>
+                <a:ea typeface="Calibri" pitchFamily="34" charset="-122"/>
+                <a:cs typeface="Calibri" pitchFamily="34" charset="-120"/>
+              </a:rPr>
+              <a:t>店舗運営</a:t>
+            </a:r>
+            <a:endParaRPr lang="en-US" sz="1450" dirty="0"/>
+          </a:p>
+          <a:p>
             <a:pPr indent="0" marL="0">
               <a:lnSpc>
                 <a:spcPts val="2000"/>
               </a:lnSpc>
-              <a:buNone/>
-            </a:pPr>
-            <a:r>
-              <a:rPr lang="en-US" sz="1400" dirty="0">
-                <a:solidFill>
-                  <a:srgbClr val="6B4E23"/>
-                </a:solidFill>
-                <a:latin typeface="Calibri" pitchFamily="34" charset="0"/>
-                <a:ea typeface="Calibri" pitchFamily="34" charset="-122"/>
-                <a:cs typeface="Calibri" pitchFamily="34" charset="-120"/>
-              </a:rPr>
-              <a:t>「採用したスタッフ個人の月間売上の〇％を毎月回収」する設計は、</a:t>
-            </a:r>
+              <a:spcAft>
+                <a:spcPts val="1200"/>
+              </a:spcAft>
+              <a:buNone/>
+            </a:pPr>
+            <a:r>
+              <a:rPr lang="en-US" sz="1250" dirty="0">
+                <a:solidFill>
+                  <a:srgbClr val="5C6E69"/>
+                </a:solidFill>
+                <a:latin typeface="Calibri" pitchFamily="34" charset="0"/>
+                <a:ea typeface="Calibri" pitchFamily="34" charset="-122"/>
+                <a:cs typeface="Calibri" pitchFamily="34" charset="-120"/>
+              </a:rPr>
+              <a:t>これまでどおり本業に集中</a:t>
+            </a:r>
+            <a:endParaRPr lang="en-US" sz="1450" dirty="0"/>
+          </a:p>
+          <a:p>
             <a:pPr indent="0" marL="0">
               <a:lnSpc>
                 <a:spcPts val="2000"/>
@@ -3720,16 +3773,19 @@
               <a:buNone/>
             </a:pPr>
             <a:r>
-              <a:rPr lang="en-US" sz="1400" b="1" dirty="0">
-                <a:solidFill>
-                  <a:srgbClr val="1E2B3A"/>
-                </a:solidFill>
-                <a:latin typeface="Calibri" pitchFamily="34" charset="0"/>
-                <a:ea typeface="Calibri" pitchFamily="34" charset="-122"/>
-                <a:cs typeface="Calibri" pitchFamily="34" charset="-120"/>
-              </a:rPr>
-              <a:t>労働者供給事業（職業安定法44条・原則禁止）</a:t>
-            </a:r>
+              <a:rPr lang="en-US" sz="1450" b="1" dirty="0">
+                <a:solidFill>
+                  <a:srgbClr val="213A36"/>
+                </a:solidFill>
+                <a:latin typeface="Calibri" pitchFamily="34" charset="0"/>
+                <a:ea typeface="Calibri" pitchFamily="34" charset="-122"/>
+                <a:cs typeface="Calibri" pitchFamily="34" charset="-120"/>
+              </a:rPr>
+              <a:t>スタッフの受け入れ・雇用</a:t>
+            </a:r>
+            <a:endParaRPr lang="en-US" sz="1450" dirty="0"/>
+          </a:p>
+          <a:p>
             <a:pPr indent="0" marL="0">
               <a:lnSpc>
                 <a:spcPts val="2000"/>
@@ -3737,23 +3793,62 @@
               <a:buNone/>
             </a:pPr>
             <a:r>
-              <a:rPr lang="en-US" sz="1400" dirty="0">
-                <a:solidFill>
-                  <a:srgbClr val="6B4E23"/>
-                </a:solidFill>
-                <a:latin typeface="Calibri" pitchFamily="34" charset="0"/>
-                <a:ea typeface="Calibri" pitchFamily="34" charset="-122"/>
-                <a:cs typeface="Calibri" pitchFamily="34" charset="-120"/>
-              </a:rPr>
-              <a:t>に近い構図となり得るため採用しません。リターンは「役務の対価」か「出資へのリターン」に限定します。</a:t>
-            </a:r>
-            <a:endParaRPr lang="en-US" sz="1400" dirty="0"/>
-          </a:p>
-        </p:txBody>
-      </p:sp>
-      <p:sp>
-        <p:nvSpPr>
-          <p:cNvPr id="13" name="Text 11"/>
+              <a:rPr lang="en-US" sz="1250" dirty="0">
+                <a:solidFill>
+                  <a:srgbClr val="5C6E69"/>
+                </a:solidFill>
+                <a:latin typeface="Calibri" pitchFamily="34" charset="0"/>
+                <a:ea typeface="Calibri" pitchFamily="34" charset="-122"/>
+                <a:cs typeface="Calibri" pitchFamily="34" charset="-120"/>
+              </a:rPr>
+              <a:t>雇用主はサロン様。安心の体制で</a:t>
+            </a:r>
+            <a:endParaRPr lang="en-US" sz="1450" dirty="0"/>
+          </a:p>
+        </p:txBody>
+      </p:sp>
+      <p:sp>
+        <p:nvSpPr>
+          <p:cNvPr id="17" name="Text 15"/>
+          <p:cNvSpPr/>
+          <p:nvPr/>
+        </p:nvSpPr>
+        <p:spPr>
+          <a:xfrm>
+            <a:off x="548640" y="5257800"/>
+            <a:ext cx="11064240" cy="548640"/>
+          </a:xfrm>
+          <a:prstGeom prst="rect">
+            <a:avLst/>
+          </a:prstGeom>
+          <a:noFill/>
+          <a:ln/>
+        </p:spPr>
+        <p:txBody>
+          <a:bodyPr wrap="square" lIns="0" tIns="0" rIns="0" bIns="0" rtlCol="0" anchor="ctr"/>
+          <a:lstStyle/>
+          <a:p>
+            <a:pPr algn="ctr" indent="0" marL="0">
+              <a:buNone/>
+            </a:pPr>
+            <a:r>
+              <a:rPr lang="en-US" sz="1700" b="1" dirty="0">
+                <a:solidFill>
+                  <a:srgbClr val="213A36"/>
+                </a:solidFill>
+                <a:latin typeface="Cambria" pitchFamily="34" charset="0"/>
+                <a:ea typeface="Cambria" pitchFamily="34" charset="-122"/>
+                <a:cs typeface="Cambria" pitchFamily="34" charset="-120"/>
+              </a:rPr>
+              <a:t>＝ どちらも無理なく、店舗の成長という同じゴールを目指せます。</a:t>
+            </a:r>
+            <a:endParaRPr lang="en-US" sz="1700" dirty="0"/>
+          </a:p>
+        </p:txBody>
+      </p:sp>
+      <p:sp>
+        <p:nvSpPr>
+          <p:cNvPr id="18" name="Text 16"/>
           <p:cNvSpPr/>
           <p:nvPr/>
         </p:nvSpPr>
@@ -3776,23 +3871,23 @@
               <a:buNone/>
             </a:pPr>
             <a:r>
-              <a:rPr lang="en-US" sz="900" dirty="0">
-                <a:solidFill>
-                  <a:srgbClr val="5A6B7D"/>
-                </a:solidFill>
-                <a:latin typeface="Calibri" pitchFamily="34" charset="0"/>
-                <a:ea typeface="Calibri" pitchFamily="34" charset="-122"/>
-                <a:cs typeface="Calibri" pitchFamily="34" charset="-120"/>
-              </a:rPr>
-              <a:t>社内検討用のたたき台 ／ 本資料は法務・税務・労務の助言ではありません</a:t>
-            </a:r>
-            <a:endParaRPr lang="en-US" sz="900" dirty="0"/>
-          </a:p>
-        </p:txBody>
-      </p:sp>
-      <p:sp>
-        <p:nvSpPr>
-          <p:cNvPr id="14" name="Text 12"/>
+              <a:rPr lang="en-US" sz="950" dirty="0">
+                <a:solidFill>
+                  <a:srgbClr val="5C6E69"/>
+                </a:solidFill>
+                <a:latin typeface="Calibri" pitchFamily="34" charset="0"/>
+                <a:ea typeface="Calibri" pitchFamily="34" charset="-122"/>
+                <a:cs typeface="Calibri" pitchFamily="34" charset="-120"/>
+              </a:rPr>
+              <a:t>株式会社ランデックス ／ 〇〇サロン様 ご提案資料</a:t>
+            </a:r>
+            <a:endParaRPr lang="en-US" sz="950" dirty="0"/>
+          </a:p>
+        </p:txBody>
+      </p:sp>
+      <p:sp>
+        <p:nvSpPr>
+          <p:cNvPr id="19" name="Text 17"/>
           <p:cNvSpPr/>
           <p:nvPr/>
         </p:nvSpPr>
@@ -3815,9 +3910,9 @@
               <a:buNone/>
             </a:pPr>
             <a:r>
-              <a:rPr lang="en-US" sz="900" dirty="0">
-                <a:solidFill>
-                  <a:srgbClr val="5A6B7D"/>
+              <a:rPr lang="en-US" sz="950" dirty="0">
+                <a:solidFill>
+                  <a:srgbClr val="5C6E69"/>
                 </a:solidFill>
                 <a:latin typeface="Calibri" pitchFamily="34" charset="0"/>
                 <a:ea typeface="Calibri" pitchFamily="34" charset="-122"/>
@@ -3825,7 +3920,7 @@
               </a:rPr>
               <a:t>4 / 6</a:t>
             </a:r>
-            <a:endParaRPr lang="en-US" sz="900" dirty="0"/>
+            <a:endParaRPr lang="en-US" sz="950" dirty="0"/>
           </a:p>
         </p:txBody>
       </p:sp>
@@ -3888,13 +3983,13 @@
             <a:r>
               <a:rPr lang="en-US" sz="1100" b="1" spc="100" kern="0" dirty="0">
                 <a:solidFill>
-                  <a:srgbClr val="C8791F"/>
-                </a:solidFill>
-                <a:latin typeface="Calibri" pitchFamily="34" charset="0"/>
-                <a:ea typeface="Calibri" pitchFamily="34" charset="-122"/>
-                <a:cs typeface="Calibri" pitchFamily="34" charset="-120"/>
-              </a:rPr>
-              <a:t>SLIDE 5 ・ 要確認論点</a:t>
+                  <a:srgbClr val="1E8878"/>
+                </a:solidFill>
+                <a:latin typeface="Calibri" pitchFamily="34" charset="0"/>
+                <a:ea typeface="Calibri" pitchFamily="34" charset="-122"/>
+                <a:cs typeface="Calibri" pitchFamily="34" charset="-120"/>
+              </a:rPr>
+              <a:t>SLIDE 5</a:t>
             </a:r>
             <a:endParaRPr lang="en-US" sz="1100" dirty="0"/>
           </a:p>
@@ -3927,13 +4022,13 @@
             <a:r>
               <a:rPr lang="en-US" sz="3200" b="1" dirty="0">
                 <a:solidFill>
-                  <a:srgbClr val="1E2B3A"/>
+                  <a:srgbClr val="213A36"/>
                 </a:solidFill>
                 <a:latin typeface="Cambria" pitchFamily="34" charset="0"/>
                 <a:ea typeface="Cambria" pitchFamily="34" charset="-122"/>
                 <a:cs typeface="Cambria" pitchFamily="34" charset="-120"/>
               </a:rPr>
-              <a:t>実行前に必ず専門家に確認する論点</a:t>
+              <a:t>お互いの「取り分」は、シンプルに</a:t>
             </a:r>
             <a:endParaRPr lang="en-US" sz="3200" dirty="0"/>
           </a:p>
@@ -3941,26 +4036,65 @@
       </p:sp>
       <p:sp>
         <p:nvSpPr>
-          <p:cNvPr id="4" name="Shape 2"/>
-          <p:cNvSpPr/>
-          <p:nvPr/>
-        </p:nvSpPr>
-        <p:spPr>
-          <a:xfrm>
-            <a:off x="548640" y="1645920"/>
-            <a:ext cx="11064240" cy="676656"/>
+          <p:cNvPr id="4" name="Text 2"/>
+          <p:cNvSpPr/>
+          <p:nvPr/>
+        </p:nvSpPr>
+        <p:spPr>
+          <a:xfrm>
+            <a:off x="548640" y="1481328"/>
+            <a:ext cx="10972800" cy="365760"/>
+          </a:xfrm>
+          <a:prstGeom prst="rect">
+            <a:avLst/>
+          </a:prstGeom>
+          <a:noFill/>
+          <a:ln/>
+        </p:spPr>
+        <p:txBody>
+          <a:bodyPr wrap="square" lIns="0" tIns="0" rIns="0" bIns="0" rtlCol="0" anchor="ctr"/>
+          <a:lstStyle/>
+          <a:p>
+            <a:pPr indent="0" marL="0">
+              <a:buNone/>
+            </a:pPr>
+            <a:r>
+              <a:rPr lang="en-US" sz="1500" dirty="0">
+                <a:solidFill>
+                  <a:srgbClr val="5C6E69"/>
+                </a:solidFill>
+                <a:latin typeface="Calibri" pitchFamily="34" charset="0"/>
+                <a:ea typeface="Calibri" pitchFamily="34" charset="-122"/>
+                <a:cs typeface="Calibri" pitchFamily="34" charset="-120"/>
+              </a:rPr>
+              <a:t>分かりにくい仕組みにはしません。次の2本立てで、はっきりお約束します。</a:t>
+            </a:r>
+            <a:endParaRPr lang="en-US" sz="1500" dirty="0"/>
+          </a:p>
+        </p:txBody>
+      </p:sp>
+      <p:sp>
+        <p:nvSpPr>
+          <p:cNvPr id="5" name="Shape 3"/>
+          <p:cNvSpPr/>
+          <p:nvPr/>
+        </p:nvSpPr>
+        <p:spPr>
+          <a:xfrm>
+            <a:off x="548640" y="2148840"/>
+            <a:ext cx="5394960" cy="2331720"/>
           </a:xfrm>
           <a:prstGeom prst="roundRect">
             <a:avLst>
-              <a:gd name="adj" fmla="val 6757"/>
+              <a:gd name="adj" fmla="val 3137"/>
             </a:avLst>
           </a:prstGeom>
           <a:solidFill>
-            <a:srgbClr val="F3F6FA"/>
+            <a:srgbClr val="F1F7F5"/>
           </a:solidFill>
           <a:ln w="12700">
             <a:solidFill>
-              <a:srgbClr val="DCE4EC"/>
+              <a:srgbClr val="D8E6E1"/>
             </a:solidFill>
             <a:prstDash val="solid"/>
           </a:ln>
@@ -3968,34 +4102,34 @@
       </p:sp>
       <p:sp>
         <p:nvSpPr>
-          <p:cNvPr id="5" name="Shape 3"/>
-          <p:cNvSpPr/>
-          <p:nvPr/>
-        </p:nvSpPr>
-        <p:spPr>
-          <a:xfrm>
-            <a:off x="713232" y="1801368"/>
-            <a:ext cx="365760" cy="365760"/>
+          <p:cNvPr id="6" name="Shape 4"/>
+          <p:cNvSpPr/>
+          <p:nvPr/>
+        </p:nvSpPr>
+        <p:spPr>
+          <a:xfrm>
+            <a:off x="868680" y="2468880"/>
+            <a:ext cx="502920" cy="502920"/>
           </a:xfrm>
           <a:prstGeom prst="ellipse">
             <a:avLst/>
           </a:prstGeom>
           <a:solidFill>
-            <a:srgbClr val="C8791F"/>
+            <a:srgbClr val="1E8878"/>
           </a:solidFill>
           <a:ln/>
         </p:spPr>
       </p:sp>
       <p:sp>
         <p:nvSpPr>
-          <p:cNvPr id="6" name="Text 4"/>
-          <p:cNvSpPr/>
-          <p:nvPr/>
-        </p:nvSpPr>
-        <p:spPr>
-          <a:xfrm>
-            <a:off x="713232" y="1801368"/>
-            <a:ext cx="365760" cy="365760"/>
+          <p:cNvPr id="7" name="Text 5"/>
+          <p:cNvSpPr/>
+          <p:nvPr/>
+        </p:nvSpPr>
+        <p:spPr>
+          <a:xfrm>
+            <a:off x="868680" y="2468880"/>
+            <a:ext cx="502920" cy="502920"/>
           </a:xfrm>
           <a:prstGeom prst="rect">
             <a:avLst/>
@@ -4011,7 +4145,7 @@
               <a:buNone/>
             </a:pPr>
             <a:r>
-              <a:rPr lang="en-US" sz="1600" b="1" dirty="0">
+              <a:rPr lang="en-US" sz="2000" b="1" dirty="0">
                 <a:solidFill>
                   <a:srgbClr val="FFFFFF"/>
                 </a:solidFill>
@@ -4019,22 +4153,22 @@
                 <a:ea typeface="Calibri" pitchFamily="34" charset="-122"/>
                 <a:cs typeface="Calibri" pitchFamily="34" charset="-120"/>
               </a:rPr>
-              <a:t>!</a:t>
-            </a:r>
-            <a:endParaRPr lang="en-US" sz="1600" dirty="0"/>
-          </a:p>
-        </p:txBody>
-      </p:sp>
-      <p:sp>
-        <p:nvSpPr>
-          <p:cNvPr id="7" name="Text 5"/>
-          <p:cNvSpPr/>
-          <p:nvPr/>
-        </p:nvSpPr>
-        <p:spPr>
-          <a:xfrm>
-            <a:off x="1280160" y="1700784"/>
-            <a:ext cx="5577840" cy="566928"/>
+              <a:t>1</a:t>
+            </a:r>
+            <a:endParaRPr lang="en-US" sz="2000" dirty="0"/>
+          </a:p>
+        </p:txBody>
+      </p:sp>
+      <p:sp>
+        <p:nvSpPr>
+          <p:cNvPr id="8" name="Text 6"/>
+          <p:cNvSpPr/>
+          <p:nvPr/>
+        </p:nvSpPr>
+        <p:spPr>
+          <a:xfrm>
+            <a:off x="1508760" y="2514600"/>
+            <a:ext cx="3657600" cy="457200"/>
           </a:xfrm>
           <a:prstGeom prst="rect">
             <a:avLst/>
@@ -4050,30 +4184,30 @@
               <a:buNone/>
             </a:pPr>
             <a:r>
-              <a:rPr lang="en-US" sz="1500" b="1" dirty="0">
-                <a:solidFill>
-                  <a:srgbClr val="1E2B3A"/>
-                </a:solidFill>
-                <a:latin typeface="Calibri" pitchFamily="34" charset="0"/>
-                <a:ea typeface="Calibri" pitchFamily="34" charset="-122"/>
-                <a:cs typeface="Calibri" pitchFamily="34" charset="-120"/>
-              </a:rPr>
-              <a:t>職業安定法・労働者派遣法の適合性</a:t>
-            </a:r>
-            <a:endParaRPr lang="en-US" sz="1500" dirty="0"/>
-          </a:p>
-        </p:txBody>
-      </p:sp>
-      <p:sp>
-        <p:nvSpPr>
-          <p:cNvPr id="8" name="Text 6"/>
-          <p:cNvSpPr/>
-          <p:nvPr/>
-        </p:nvSpPr>
-        <p:spPr>
-          <a:xfrm>
-            <a:off x="5212080" y="1700784"/>
-            <a:ext cx="4206240" cy="566928"/>
+              <a:rPr lang="en-US" sz="1900" b="1" dirty="0">
+                <a:solidFill>
+                  <a:srgbClr val="1E8878"/>
+                </a:solidFill>
+                <a:latin typeface="Cambria" pitchFamily="34" charset="0"/>
+                <a:ea typeface="Cambria" pitchFamily="34" charset="-122"/>
+                <a:cs typeface="Cambria" pitchFamily="34" charset="-120"/>
+              </a:rPr>
+              <a:t>採用の成果報酬</a:t>
+            </a:r>
+            <a:endParaRPr lang="en-US" sz="1900" dirty="0"/>
+          </a:p>
+        </p:txBody>
+      </p:sp>
+      <p:sp>
+        <p:nvSpPr>
+          <p:cNvPr id="9" name="Text 7"/>
+          <p:cNvSpPr/>
+          <p:nvPr/>
+        </p:nvSpPr>
+        <p:spPr>
+          <a:xfrm>
+            <a:off x="914400" y="3200400"/>
+            <a:ext cx="4846320" cy="1097280"/>
           </a:xfrm>
           <a:prstGeom prst="rect">
             <a:avLst/>
@@ -4086,59 +4220,23 @@
           <a:lstStyle/>
           <a:p>
             <a:pPr indent="0" marL="0">
-              <a:buNone/>
-            </a:pPr>
-            <a:r>
-              <a:rPr lang="en-US" sz="1150" dirty="0">
-                <a:solidFill>
-                  <a:srgbClr val="5A6B7D"/>
-                </a:solidFill>
-                <a:latin typeface="Calibri" pitchFamily="34" charset="0"/>
-                <a:ea typeface="Calibri" pitchFamily="34" charset="-122"/>
-                <a:cs typeface="Calibri" pitchFamily="34" charset="-120"/>
-              </a:rPr>
-              <a:t>共同募集の可否、労働者供給・職業紹介に当たらないか</a:t>
-            </a:r>
-            <a:endParaRPr lang="en-US" sz="1150" dirty="0"/>
-          </a:p>
-        </p:txBody>
-      </p:sp>
-      <p:sp>
-        <p:nvSpPr>
-          <p:cNvPr id="9" name="Text 7"/>
-          <p:cNvSpPr/>
-          <p:nvPr/>
-        </p:nvSpPr>
-        <p:spPr>
-          <a:xfrm>
-            <a:off x="9464040" y="1700784"/>
-            <a:ext cx="2057400" cy="566928"/>
-          </a:xfrm>
-          <a:prstGeom prst="rect">
-            <a:avLst/>
-          </a:prstGeom>
-          <a:noFill/>
-          <a:ln/>
-        </p:spPr>
-        <p:txBody>
-          <a:bodyPr wrap="square" lIns="0" tIns="0" rIns="0" bIns="0" rtlCol="0" anchor="ctr"/>
-          <a:lstStyle/>
-          <a:p>
-            <a:pPr algn="r" indent="0" marL="0">
-              <a:buNone/>
-            </a:pPr>
-            <a:r>
-              <a:rPr lang="en-US" sz="1200" b="1" dirty="0">
-                <a:solidFill>
-                  <a:srgbClr val="1FA795"/>
-                </a:solidFill>
-                <a:latin typeface="Calibri" pitchFamily="34" charset="0"/>
-                <a:ea typeface="Calibri" pitchFamily="34" charset="-122"/>
-                <a:cs typeface="Calibri" pitchFamily="34" charset="-120"/>
-              </a:rPr>
-              <a:t>社会保険労務士・弁護士</a:t>
-            </a:r>
-            <a:endParaRPr lang="en-US" sz="1200" dirty="0"/>
+              <a:lnSpc>
+                <a:spcPts val="2100"/>
+              </a:lnSpc>
+              <a:buNone/>
+            </a:pPr>
+            <a:r>
+              <a:rPr lang="en-US" sz="1400" dirty="0">
+                <a:solidFill>
+                  <a:srgbClr val="213A36"/>
+                </a:solidFill>
+                <a:latin typeface="Calibri" pitchFamily="34" charset="0"/>
+                <a:ea typeface="Calibri" pitchFamily="34" charset="-122"/>
+                <a:cs typeface="Calibri" pitchFamily="34" charset="-120"/>
+              </a:rPr>
+              <a:t>採用が決まった人数に応じて、成果報酬をいただきます（例：1人あたり〇万円）。うまくいった分だけ、というフェアな形です。</a:t>
+            </a:r>
+            <a:endParaRPr lang="en-US" sz="1400" dirty="0"/>
           </a:p>
         </p:txBody>
       </p:sp>
@@ -4150,20 +4248,20 @@
         </p:nvSpPr>
         <p:spPr>
           <a:xfrm>
-            <a:off x="548640" y="2432304"/>
-            <a:ext cx="11064240" cy="676656"/>
+            <a:off x="6217920" y="2148840"/>
+            <a:ext cx="5394960" cy="2331720"/>
           </a:xfrm>
           <a:prstGeom prst="roundRect">
             <a:avLst>
-              <a:gd name="adj" fmla="val 6757"/>
+              <a:gd name="adj" fmla="val 3137"/>
             </a:avLst>
           </a:prstGeom>
           <a:solidFill>
-            <a:srgbClr val="F3F6FA"/>
+            <a:srgbClr val="F1F7F5"/>
           </a:solidFill>
           <a:ln w="12700">
             <a:solidFill>
-              <a:srgbClr val="DCE4EC"/>
+              <a:srgbClr val="D8E6E1"/>
             </a:solidFill>
             <a:prstDash val="solid"/>
           </a:ln>
@@ -4177,14 +4275,14 @@
         </p:nvSpPr>
         <p:spPr>
           <a:xfrm>
-            <a:off x="713232" y="2587752"/>
-            <a:ext cx="365760" cy="365760"/>
+            <a:off x="6537960" y="2468880"/>
+            <a:ext cx="502920" cy="502920"/>
           </a:xfrm>
           <a:prstGeom prst="ellipse">
             <a:avLst/>
           </a:prstGeom>
           <a:solidFill>
-            <a:srgbClr val="C8791F"/>
+            <a:srgbClr val="BE9436"/>
           </a:solidFill>
           <a:ln/>
         </p:spPr>
@@ -4197,8 +4295,8 @@
         </p:nvSpPr>
         <p:spPr>
           <a:xfrm>
-            <a:off x="713232" y="2587752"/>
-            <a:ext cx="365760" cy="365760"/>
+            <a:off x="6537960" y="2468880"/>
+            <a:ext cx="502920" cy="502920"/>
           </a:xfrm>
           <a:prstGeom prst="rect">
             <a:avLst/>
@@ -4214,7 +4312,7 @@
               <a:buNone/>
             </a:pPr>
             <a:r>
-              <a:rPr lang="en-US" sz="1600" b="1" dirty="0">
+              <a:rPr lang="en-US" sz="2000" b="1" dirty="0">
                 <a:solidFill>
                   <a:srgbClr val="FFFFFF"/>
                 </a:solidFill>
@@ -4222,9 +4320,9 @@
                 <a:ea typeface="Calibri" pitchFamily="34" charset="-122"/>
                 <a:cs typeface="Calibri" pitchFamily="34" charset="-120"/>
               </a:rPr>
-              <a:t>!</a:t>
-            </a:r>
-            <a:endParaRPr lang="en-US" sz="1600" dirty="0"/>
+              <a:t>2</a:t>
+            </a:r>
+            <a:endParaRPr lang="en-US" sz="2000" dirty="0"/>
           </a:p>
         </p:txBody>
       </p:sp>
@@ -4236,8 +4334,8 @@
         </p:nvSpPr>
         <p:spPr>
           <a:xfrm>
-            <a:off x="1280160" y="2487168"/>
-            <a:ext cx="5577840" cy="566928"/>
+            <a:off x="7178040" y="2514600"/>
+            <a:ext cx="3840480" cy="457200"/>
           </a:xfrm>
           <a:prstGeom prst="rect">
             <a:avLst/>
@@ -4253,17 +4351,17 @@
               <a:buNone/>
             </a:pPr>
             <a:r>
-              <a:rPr lang="en-US" sz="1500" b="1" dirty="0">
-                <a:solidFill>
-                  <a:srgbClr val="1E2B3A"/>
-                </a:solidFill>
-                <a:latin typeface="Calibri" pitchFamily="34" charset="0"/>
-                <a:ea typeface="Calibri" pitchFamily="34" charset="-122"/>
-                <a:cs typeface="Calibri" pitchFamily="34" charset="-120"/>
-              </a:rPr>
-              <a:t>匿名組合／出資の税務・源泉徴収</a:t>
-            </a:r>
-            <a:endParaRPr lang="en-US" sz="1500" dirty="0"/>
+              <a:rPr lang="en-US" sz="1900" b="1" dirty="0">
+                <a:solidFill>
+                  <a:srgbClr val="9A7A22"/>
+                </a:solidFill>
+                <a:latin typeface="Cambria" pitchFamily="34" charset="0"/>
+                <a:ea typeface="Cambria" pitchFamily="34" charset="-122"/>
+                <a:cs typeface="Cambria" pitchFamily="34" charset="-120"/>
+              </a:rPr>
+              <a:t>出資に応じたリターン</a:t>
+            </a:r>
+            <a:endParaRPr lang="en-US" sz="1900" dirty="0"/>
           </a:p>
         </p:txBody>
       </p:sp>
@@ -4275,8 +4373,8 @@
         </p:nvSpPr>
         <p:spPr>
           <a:xfrm>
-            <a:off x="5212080" y="2487168"/>
-            <a:ext cx="4206240" cy="566928"/>
+            <a:off x="6583680" y="3200400"/>
+            <a:ext cx="4846320" cy="1097280"/>
           </a:xfrm>
           <a:prstGeom prst="rect">
             <a:avLst/>
@@ -4289,84 +4387,48 @@
           <a:lstStyle/>
           <a:p>
             <a:pPr indent="0" marL="0">
-              <a:buNone/>
-            </a:pPr>
-            <a:r>
-              <a:rPr lang="en-US" sz="1150" dirty="0">
-                <a:solidFill>
-                  <a:srgbClr val="5A6B7D"/>
-                </a:solidFill>
-                <a:latin typeface="Calibri" pitchFamily="34" charset="0"/>
-                <a:ea typeface="Calibri" pitchFamily="34" charset="-122"/>
-                <a:cs typeface="Calibri" pitchFamily="34" charset="-120"/>
-              </a:rPr>
-              <a:t>分配金の課税区分、源泉義務、請求名目の妥当性</a:t>
-            </a:r>
-            <a:endParaRPr lang="en-US" sz="1150" dirty="0"/>
-          </a:p>
-        </p:txBody>
-      </p:sp>
-      <p:sp>
-        <p:nvSpPr>
-          <p:cNvPr id="15" name="Text 13"/>
-          <p:cNvSpPr/>
-          <p:nvPr/>
-        </p:nvSpPr>
-        <p:spPr>
-          <a:xfrm>
-            <a:off x="9464040" y="2487168"/>
-            <a:ext cx="2057400" cy="566928"/>
-          </a:xfrm>
-          <a:prstGeom prst="rect">
-            <a:avLst/>
-          </a:prstGeom>
-          <a:noFill/>
-          <a:ln/>
-        </p:spPr>
-        <p:txBody>
-          <a:bodyPr wrap="square" lIns="0" tIns="0" rIns="0" bIns="0" rtlCol="0" anchor="ctr"/>
-          <a:lstStyle/>
-          <a:p>
-            <a:pPr algn="r" indent="0" marL="0">
-              <a:buNone/>
-            </a:pPr>
-            <a:r>
-              <a:rPr lang="en-US" sz="1200" b="1" dirty="0">
-                <a:solidFill>
-                  <a:srgbClr val="1FA795"/>
-                </a:solidFill>
-                <a:latin typeface="Calibri" pitchFamily="34" charset="0"/>
-                <a:ea typeface="Calibri" pitchFamily="34" charset="-122"/>
-                <a:cs typeface="Calibri" pitchFamily="34" charset="-120"/>
-              </a:rPr>
-              <a:t>税理士</a:t>
-            </a:r>
-            <a:endParaRPr lang="en-US" sz="1200" dirty="0"/>
-          </a:p>
-        </p:txBody>
-      </p:sp>
-      <p:sp>
-        <p:nvSpPr>
-          <p:cNvPr id="16" name="Shape 14"/>
-          <p:cNvSpPr/>
-          <p:nvPr/>
-        </p:nvSpPr>
-        <p:spPr>
-          <a:xfrm>
-            <a:off x="548640" y="3218688"/>
-            <a:ext cx="11064240" cy="676656"/>
+              <a:lnSpc>
+                <a:spcPts val="2100"/>
+              </a:lnSpc>
+              <a:buNone/>
+            </a:pPr>
+            <a:r>
+              <a:rPr lang="en-US" sz="1400" dirty="0">
+                <a:solidFill>
+                  <a:srgbClr val="213A36"/>
+                </a:solidFill>
+                <a:latin typeface="Calibri" pitchFamily="34" charset="0"/>
+                <a:ea typeface="Calibri" pitchFamily="34" charset="-122"/>
+                <a:cs typeface="Calibri" pitchFamily="34" charset="-120"/>
+              </a:rPr>
+              <a:t>出資した分に応じて、配当や分配という形でリターンを受け取ります。店舗が伸びるほど、一緒に喜べる仕組みです。</a:t>
+            </a:r>
+            <a:endParaRPr lang="en-US" sz="1400" dirty="0"/>
+          </a:p>
+        </p:txBody>
+      </p:sp>
+      <p:sp>
+        <p:nvSpPr>
+          <p:cNvPr id="15" name="Shape 13"/>
+          <p:cNvSpPr/>
+          <p:nvPr/>
+        </p:nvSpPr>
+        <p:spPr>
+          <a:xfrm>
+            <a:off x="548640" y="4800600"/>
+            <a:ext cx="11064240" cy="1234440"/>
           </a:xfrm>
           <a:prstGeom prst="roundRect">
             <a:avLst>
-              <a:gd name="adj" fmla="val 6757"/>
+              <a:gd name="adj" fmla="val 4444"/>
             </a:avLst>
           </a:prstGeom>
           <a:solidFill>
-            <a:srgbClr val="F3F6FA"/>
+            <a:srgbClr val="FBF4E6"/>
           </a:solidFill>
           <a:ln w="12700">
             <a:solidFill>
-              <a:srgbClr val="DCE4EC"/>
+              <a:srgbClr val="EAD9A6"/>
             </a:solidFill>
             <a:prstDash val="solid"/>
           </a:ln>
@@ -4374,420 +4436,14 @@
       </p:sp>
       <p:sp>
         <p:nvSpPr>
-          <p:cNvPr id="17" name="Shape 15"/>
-          <p:cNvSpPr/>
-          <p:nvPr/>
-        </p:nvSpPr>
-        <p:spPr>
-          <a:xfrm>
-            <a:off x="713232" y="3374136"/>
-            <a:ext cx="365760" cy="365760"/>
-          </a:xfrm>
-          <a:prstGeom prst="ellipse">
-            <a:avLst/>
-          </a:prstGeom>
-          <a:solidFill>
-            <a:srgbClr val="C8791F"/>
-          </a:solidFill>
-          <a:ln/>
-        </p:spPr>
-      </p:sp>
-      <p:sp>
-        <p:nvSpPr>
-          <p:cNvPr id="18" name="Text 16"/>
-          <p:cNvSpPr/>
-          <p:nvPr/>
-        </p:nvSpPr>
-        <p:spPr>
-          <a:xfrm>
-            <a:off x="713232" y="3374136"/>
-            <a:ext cx="365760" cy="365760"/>
-          </a:xfrm>
-          <a:prstGeom prst="rect">
-            <a:avLst/>
-          </a:prstGeom>
-          <a:noFill/>
-          <a:ln/>
-        </p:spPr>
-        <p:txBody>
-          <a:bodyPr wrap="square" lIns="0" tIns="0" rIns="0" bIns="0" rtlCol="0" anchor="ctr"/>
-          <a:lstStyle/>
-          <a:p>
-            <a:pPr algn="ctr" indent="0" marL="0">
-              <a:buNone/>
-            </a:pPr>
-            <a:r>
-              <a:rPr lang="en-US" sz="1600" b="1" dirty="0">
-                <a:solidFill>
-                  <a:srgbClr val="FFFFFF"/>
-                </a:solidFill>
-                <a:latin typeface="Calibri" pitchFamily="34" charset="0"/>
-                <a:ea typeface="Calibri" pitchFamily="34" charset="-122"/>
-                <a:cs typeface="Calibri" pitchFamily="34" charset="-120"/>
-              </a:rPr>
-              <a:t>!</a:t>
-            </a:r>
-            <a:endParaRPr lang="en-US" sz="1600" dirty="0"/>
-          </a:p>
-        </p:txBody>
-      </p:sp>
-      <p:sp>
-        <p:nvSpPr>
-          <p:cNvPr id="19" name="Text 17"/>
-          <p:cNvSpPr/>
-          <p:nvPr/>
-        </p:nvSpPr>
-        <p:spPr>
-          <a:xfrm>
-            <a:off x="1280160" y="3273552"/>
-            <a:ext cx="5577840" cy="566928"/>
-          </a:xfrm>
-          <a:prstGeom prst="rect">
-            <a:avLst/>
-          </a:prstGeom>
-          <a:noFill/>
-          <a:ln/>
-        </p:spPr>
-        <p:txBody>
-          <a:bodyPr wrap="square" lIns="0" tIns="0" rIns="0" bIns="0" rtlCol="0" anchor="ctr"/>
-          <a:lstStyle/>
-          <a:p>
-            <a:pPr indent="0" marL="0">
-              <a:buNone/>
-            </a:pPr>
-            <a:r>
-              <a:rPr lang="en-US" sz="1500" b="1" dirty="0">
-                <a:solidFill>
-                  <a:srgbClr val="1E2B3A"/>
-                </a:solidFill>
-                <a:latin typeface="Calibri" pitchFamily="34" charset="0"/>
-                <a:ea typeface="Calibri" pitchFamily="34" charset="-122"/>
-                <a:cs typeface="Calibri" pitchFamily="34" charset="-120"/>
-              </a:rPr>
-              <a:t>契約書の整備</a:t>
-            </a:r>
-            <a:endParaRPr lang="en-US" sz="1500" dirty="0"/>
-          </a:p>
-        </p:txBody>
-      </p:sp>
-      <p:sp>
-        <p:nvSpPr>
-          <p:cNvPr id="20" name="Text 18"/>
-          <p:cNvSpPr/>
-          <p:nvPr/>
-        </p:nvSpPr>
-        <p:spPr>
-          <a:xfrm>
-            <a:off x="5212080" y="3273552"/>
-            <a:ext cx="4206240" cy="566928"/>
-          </a:xfrm>
-          <a:prstGeom prst="rect">
-            <a:avLst/>
-          </a:prstGeom>
-          <a:noFill/>
-          <a:ln/>
-        </p:spPr>
-        <p:txBody>
-          <a:bodyPr wrap="square" lIns="0" tIns="0" rIns="0" bIns="0" rtlCol="0" anchor="ctr"/>
-          <a:lstStyle/>
-          <a:p>
-            <a:pPr indent="0" marL="0">
-              <a:buNone/>
-            </a:pPr>
-            <a:r>
-              <a:rPr lang="en-US" sz="1150" dirty="0">
-                <a:solidFill>
-                  <a:srgbClr val="5A6B7D"/>
-                </a:solidFill>
-                <a:latin typeface="Calibri" pitchFamily="34" charset="0"/>
-                <a:ea typeface="Calibri" pitchFamily="34" charset="-122"/>
-                <a:cs typeface="Calibri" pitchFamily="34" charset="-120"/>
-              </a:rPr>
-              <a:t>出資契約・匿名組合契約・業務委託契約の条項</a:t>
-            </a:r>
-            <a:endParaRPr lang="en-US" sz="1150" dirty="0"/>
-          </a:p>
-        </p:txBody>
-      </p:sp>
-      <p:sp>
-        <p:nvSpPr>
-          <p:cNvPr id="21" name="Text 19"/>
-          <p:cNvSpPr/>
-          <p:nvPr/>
-        </p:nvSpPr>
-        <p:spPr>
-          <a:xfrm>
-            <a:off x="9464040" y="3273552"/>
-            <a:ext cx="2057400" cy="566928"/>
-          </a:xfrm>
-          <a:prstGeom prst="rect">
-            <a:avLst/>
-          </a:prstGeom>
-          <a:noFill/>
-          <a:ln/>
-        </p:spPr>
-        <p:txBody>
-          <a:bodyPr wrap="square" lIns="0" tIns="0" rIns="0" bIns="0" rtlCol="0" anchor="ctr"/>
-          <a:lstStyle/>
-          <a:p>
-            <a:pPr algn="r" indent="0" marL="0">
-              <a:buNone/>
-            </a:pPr>
-            <a:r>
-              <a:rPr lang="en-US" sz="1200" b="1" dirty="0">
-                <a:solidFill>
-                  <a:srgbClr val="1FA795"/>
-                </a:solidFill>
-                <a:latin typeface="Calibri" pitchFamily="34" charset="0"/>
-                <a:ea typeface="Calibri" pitchFamily="34" charset="-122"/>
-                <a:cs typeface="Calibri" pitchFamily="34" charset="-120"/>
-              </a:rPr>
-              <a:t>弁護士</a:t>
-            </a:r>
-            <a:endParaRPr lang="en-US" sz="1200" dirty="0"/>
-          </a:p>
-        </p:txBody>
-      </p:sp>
-      <p:sp>
-        <p:nvSpPr>
-          <p:cNvPr id="22" name="Shape 20"/>
-          <p:cNvSpPr/>
-          <p:nvPr/>
-        </p:nvSpPr>
-        <p:spPr>
-          <a:xfrm>
-            <a:off x="548640" y="4005072"/>
-            <a:ext cx="11064240" cy="676656"/>
-          </a:xfrm>
-          <a:prstGeom prst="roundRect">
-            <a:avLst>
-              <a:gd name="adj" fmla="val 6757"/>
-            </a:avLst>
-          </a:prstGeom>
-          <a:solidFill>
-            <a:srgbClr val="F3F6FA"/>
-          </a:solidFill>
-          <a:ln w="12700">
-            <a:solidFill>
-              <a:srgbClr val="DCE4EC"/>
-            </a:solidFill>
-            <a:prstDash val="solid"/>
-          </a:ln>
-        </p:spPr>
-      </p:sp>
-      <p:sp>
-        <p:nvSpPr>
-          <p:cNvPr id="23" name="Shape 21"/>
-          <p:cNvSpPr/>
-          <p:nvPr/>
-        </p:nvSpPr>
-        <p:spPr>
-          <a:xfrm>
-            <a:off x="713232" y="4160520"/>
-            <a:ext cx="365760" cy="365760"/>
-          </a:xfrm>
-          <a:prstGeom prst="ellipse">
-            <a:avLst/>
-          </a:prstGeom>
-          <a:solidFill>
-            <a:srgbClr val="C8791F"/>
-          </a:solidFill>
-          <a:ln/>
-        </p:spPr>
-      </p:sp>
-      <p:sp>
-        <p:nvSpPr>
-          <p:cNvPr id="24" name="Text 22"/>
-          <p:cNvSpPr/>
-          <p:nvPr/>
-        </p:nvSpPr>
-        <p:spPr>
-          <a:xfrm>
-            <a:off x="713232" y="4160520"/>
-            <a:ext cx="365760" cy="365760"/>
-          </a:xfrm>
-          <a:prstGeom prst="rect">
-            <a:avLst/>
-          </a:prstGeom>
-          <a:noFill/>
-          <a:ln/>
-        </p:spPr>
-        <p:txBody>
-          <a:bodyPr wrap="square" lIns="0" tIns="0" rIns="0" bIns="0" rtlCol="0" anchor="ctr"/>
-          <a:lstStyle/>
-          <a:p>
-            <a:pPr algn="ctr" indent="0" marL="0">
-              <a:buNone/>
-            </a:pPr>
-            <a:r>
-              <a:rPr lang="en-US" sz="1600" b="1" dirty="0">
-                <a:solidFill>
-                  <a:srgbClr val="FFFFFF"/>
-                </a:solidFill>
-                <a:latin typeface="Calibri" pitchFamily="34" charset="0"/>
-                <a:ea typeface="Calibri" pitchFamily="34" charset="-122"/>
-                <a:cs typeface="Calibri" pitchFamily="34" charset="-120"/>
-              </a:rPr>
-              <a:t>!</a:t>
-            </a:r>
-            <a:endParaRPr lang="en-US" sz="1600" dirty="0"/>
-          </a:p>
-        </p:txBody>
-      </p:sp>
-      <p:sp>
-        <p:nvSpPr>
-          <p:cNvPr id="25" name="Text 23"/>
-          <p:cNvSpPr/>
-          <p:nvPr/>
-        </p:nvSpPr>
-        <p:spPr>
-          <a:xfrm>
-            <a:off x="1280160" y="4059936"/>
-            <a:ext cx="5577840" cy="566928"/>
-          </a:xfrm>
-          <a:prstGeom prst="rect">
-            <a:avLst/>
-          </a:prstGeom>
-          <a:noFill/>
-          <a:ln/>
-        </p:spPr>
-        <p:txBody>
-          <a:bodyPr wrap="square" lIns="0" tIns="0" rIns="0" bIns="0" rtlCol="0" anchor="ctr"/>
-          <a:lstStyle/>
-          <a:p>
-            <a:pPr indent="0" marL="0">
-              <a:buNone/>
-            </a:pPr>
-            <a:r>
-              <a:rPr lang="en-US" sz="1500" b="1" dirty="0">
-                <a:solidFill>
-                  <a:srgbClr val="1E2B3A"/>
-                </a:solidFill>
-                <a:latin typeface="Calibri" pitchFamily="34" charset="0"/>
-                <a:ea typeface="Calibri" pitchFamily="34" charset="-122"/>
-                <a:cs typeface="Calibri" pitchFamily="34" charset="-120"/>
-              </a:rPr>
-              <a:t>登記（目的欄）の要否</a:t>
-            </a:r>
-            <a:endParaRPr lang="en-US" sz="1500" dirty="0"/>
-          </a:p>
-        </p:txBody>
-      </p:sp>
-      <p:sp>
-        <p:nvSpPr>
-          <p:cNvPr id="26" name="Text 24"/>
-          <p:cNvSpPr/>
-          <p:nvPr/>
-        </p:nvSpPr>
-        <p:spPr>
-          <a:xfrm>
-            <a:off x="5212080" y="4059936"/>
-            <a:ext cx="4206240" cy="566928"/>
-          </a:xfrm>
-          <a:prstGeom prst="rect">
-            <a:avLst/>
-          </a:prstGeom>
-          <a:noFill/>
-          <a:ln/>
-        </p:spPr>
-        <p:txBody>
-          <a:bodyPr wrap="square" lIns="0" tIns="0" rIns="0" bIns="0" rtlCol="0" anchor="ctr"/>
-          <a:lstStyle/>
-          <a:p>
-            <a:pPr indent="0" marL="0">
-              <a:buNone/>
-            </a:pPr>
-            <a:r>
-              <a:rPr lang="en-US" sz="1150" dirty="0">
-                <a:solidFill>
-                  <a:srgbClr val="5A6B7D"/>
-                </a:solidFill>
-                <a:latin typeface="Calibri" pitchFamily="34" charset="0"/>
-                <a:ea typeface="Calibri" pitchFamily="34" charset="-122"/>
-                <a:cs typeface="Calibri" pitchFamily="34" charset="-120"/>
-              </a:rPr>
-              <a:t>事業内容によって変更登記が必要か</a:t>
-            </a:r>
-            <a:endParaRPr lang="en-US" sz="1150" dirty="0"/>
-          </a:p>
-        </p:txBody>
-      </p:sp>
-      <p:sp>
-        <p:nvSpPr>
-          <p:cNvPr id="27" name="Text 25"/>
-          <p:cNvSpPr/>
-          <p:nvPr/>
-        </p:nvSpPr>
-        <p:spPr>
-          <a:xfrm>
-            <a:off x="9464040" y="4059936"/>
-            <a:ext cx="2057400" cy="566928"/>
-          </a:xfrm>
-          <a:prstGeom prst="rect">
-            <a:avLst/>
-          </a:prstGeom>
-          <a:noFill/>
-          <a:ln/>
-        </p:spPr>
-        <p:txBody>
-          <a:bodyPr wrap="square" lIns="0" tIns="0" rIns="0" bIns="0" rtlCol="0" anchor="ctr"/>
-          <a:lstStyle/>
-          <a:p>
-            <a:pPr algn="r" indent="0" marL="0">
-              <a:buNone/>
-            </a:pPr>
-            <a:r>
-              <a:rPr lang="en-US" sz="1200" b="1" dirty="0">
-                <a:solidFill>
-                  <a:srgbClr val="1FA795"/>
-                </a:solidFill>
-                <a:latin typeface="Calibri" pitchFamily="34" charset="0"/>
-                <a:ea typeface="Calibri" pitchFamily="34" charset="-122"/>
-                <a:cs typeface="Calibri" pitchFamily="34" charset="-120"/>
-              </a:rPr>
-              <a:t>司法書士・弁護士</a:t>
-            </a:r>
-            <a:endParaRPr lang="en-US" sz="1200" dirty="0"/>
-          </a:p>
-        </p:txBody>
-      </p:sp>
-      <p:sp>
-        <p:nvSpPr>
-          <p:cNvPr id="28" name="Shape 26"/>
-          <p:cNvSpPr/>
-          <p:nvPr/>
-        </p:nvSpPr>
-        <p:spPr>
-          <a:xfrm>
-            <a:off x="548640" y="5029200"/>
-            <a:ext cx="11064240" cy="1051560"/>
-          </a:xfrm>
-          <a:prstGeom prst="roundRect">
-            <a:avLst>
-              <a:gd name="adj" fmla="val 5217"/>
-            </a:avLst>
-          </a:prstGeom>
-          <a:solidFill>
-            <a:srgbClr val="EAF2FB"/>
-          </a:solidFill>
-          <a:ln w="12700">
-            <a:solidFill>
-              <a:srgbClr val="BFD8F2"/>
-            </a:solidFill>
-            <a:prstDash val="solid"/>
-          </a:ln>
-        </p:spPr>
-      </p:sp>
-      <p:sp>
-        <p:nvSpPr>
-          <p:cNvPr id="29" name="Text 27"/>
-          <p:cNvSpPr/>
-          <p:nvPr/>
-        </p:nvSpPr>
-        <p:spPr>
-          <a:xfrm>
-            <a:off x="822960" y="5166360"/>
-            <a:ext cx="10607040" cy="777240"/>
+          <p:cNvPr id="16" name="Text 14"/>
+          <p:cNvSpPr/>
+          <p:nvPr/>
+        </p:nvSpPr>
+        <p:spPr>
+          <a:xfrm>
+            <a:off x="822960" y="4937760"/>
+            <a:ext cx="10607040" cy="960120"/>
           </a:xfrm>
           <a:prstGeom prst="rect">
             <a:avLst/>
@@ -4808,13 +4464,13 @@
             <a:r>
               <a:rPr lang="en-US" sz="1400" b="1" dirty="0">
                 <a:solidFill>
-                  <a:srgbClr val="2E7DD1"/>
-                </a:solidFill>
-                <a:latin typeface="Calibri" pitchFamily="34" charset="0"/>
-                <a:ea typeface="Calibri" pitchFamily="34" charset="-122"/>
-                <a:cs typeface="Calibri" pitchFamily="34" charset="-120"/>
-              </a:rPr>
-              <a:t>進め方の原則　</a:t>
+                  <a:srgbClr val="9A7A22"/>
+                </a:solidFill>
+                <a:latin typeface="Calibri" pitchFamily="34" charset="0"/>
+                <a:ea typeface="Calibri" pitchFamily="34" charset="-122"/>
+                <a:cs typeface="Calibri" pitchFamily="34" charset="-120"/>
+              </a:rPr>
+              <a:t>ご安心ください　</a:t>
             </a:r>
             <a:pPr indent="0" marL="0">
               <a:lnSpc>
@@ -4825,13 +4481,13 @@
             <a:r>
               <a:rPr lang="en-US" sz="1400" dirty="0">
                 <a:solidFill>
-                  <a:srgbClr val="1E2B3A"/>
-                </a:solidFill>
-                <a:latin typeface="Calibri" pitchFamily="34" charset="0"/>
-                <a:ea typeface="Calibri" pitchFamily="34" charset="-122"/>
-                <a:cs typeface="Calibri" pitchFamily="34" charset="-120"/>
-              </a:rPr>
-              <a:t>「登記費用がかからないか」「怪しまれないか」を出発点にせず、</a:t>
+                  <a:srgbClr val="213A36"/>
+                </a:solidFill>
+                <a:latin typeface="Calibri" pitchFamily="34" charset="0"/>
+                <a:ea typeface="Calibri" pitchFamily="34" charset="-122"/>
+                <a:cs typeface="Calibri" pitchFamily="34" charset="-120"/>
+              </a:rPr>
+              <a:t>取り分やお金のやり取りは、</a:t>
             </a:r>
             <a:pPr indent="0" marL="0">
               <a:lnSpc>
@@ -4842,13 +4498,13 @@
             <a:r>
               <a:rPr lang="en-US" sz="1400" b="1" dirty="0">
                 <a:solidFill>
-                  <a:srgbClr val="1E2B3A"/>
-                </a:solidFill>
-                <a:latin typeface="Calibri" pitchFamily="34" charset="0"/>
-                <a:ea typeface="Calibri" pitchFamily="34" charset="-122"/>
-                <a:cs typeface="Calibri" pitchFamily="34" charset="-120"/>
-              </a:rPr>
-              <a:t>実態に合った適法な形を先に決め</a:t>
+                  <a:srgbClr val="213A36"/>
+                </a:solidFill>
+                <a:latin typeface="Calibri" pitchFamily="34" charset="0"/>
+                <a:ea typeface="Calibri" pitchFamily="34" charset="-122"/>
+                <a:cs typeface="Calibri" pitchFamily="34" charset="-120"/>
+              </a:rPr>
+              <a:t>すべてきちんとした契約書に明記</a:t>
             </a:r>
             <a:pPr indent="0" marL="0">
               <a:lnSpc>
@@ -4859,13 +4515,13 @@
             <a:r>
               <a:rPr lang="en-US" sz="1400" dirty="0">
                 <a:solidFill>
-                  <a:srgbClr val="1E2B3A"/>
-                </a:solidFill>
-                <a:latin typeface="Calibri" pitchFamily="34" charset="0"/>
-                <a:ea typeface="Calibri" pitchFamily="34" charset="-122"/>
-                <a:cs typeface="Calibri" pitchFamily="34" charset="-120"/>
-              </a:rPr>
-              <a:t>、その結果として必要な登記・処理を粛々と行います。</a:t>
+                  <a:srgbClr val="213A36"/>
+                </a:solidFill>
+                <a:latin typeface="Calibri" pitchFamily="34" charset="0"/>
+                <a:ea typeface="Calibri" pitchFamily="34" charset="-122"/>
+                <a:cs typeface="Calibri" pitchFamily="34" charset="-120"/>
+              </a:rPr>
+              <a:t>し、透明に進めます。仕組みは弁護士・税理士など専門家の確認を経てからスタートするので、後から「聞いていない」がありません。</a:t>
             </a:r>
             <a:endParaRPr lang="en-US" sz="1400" dirty="0"/>
           </a:p>
@@ -4873,7 +4529,7 @@
       </p:sp>
       <p:sp>
         <p:nvSpPr>
-          <p:cNvPr id="30" name="Text 28"/>
+          <p:cNvPr id="17" name="Text 15"/>
           <p:cNvSpPr/>
           <p:nvPr/>
         </p:nvSpPr>
@@ -4896,23 +4552,23 @@
               <a:buNone/>
             </a:pPr>
             <a:r>
-              <a:rPr lang="en-US" sz="900" dirty="0">
-                <a:solidFill>
-                  <a:srgbClr val="5A6B7D"/>
-                </a:solidFill>
-                <a:latin typeface="Calibri" pitchFamily="34" charset="0"/>
-                <a:ea typeface="Calibri" pitchFamily="34" charset="-122"/>
-                <a:cs typeface="Calibri" pitchFamily="34" charset="-120"/>
-              </a:rPr>
-              <a:t>社内検討用のたたき台 ／ 本資料は法務・税務・労務の助言ではありません</a:t>
-            </a:r>
-            <a:endParaRPr lang="en-US" sz="900" dirty="0"/>
-          </a:p>
-        </p:txBody>
-      </p:sp>
-      <p:sp>
-        <p:nvSpPr>
-          <p:cNvPr id="31" name="Text 29"/>
+              <a:rPr lang="en-US" sz="950" dirty="0">
+                <a:solidFill>
+                  <a:srgbClr val="5C6E69"/>
+                </a:solidFill>
+                <a:latin typeface="Calibri" pitchFamily="34" charset="0"/>
+                <a:ea typeface="Calibri" pitchFamily="34" charset="-122"/>
+                <a:cs typeface="Calibri" pitchFamily="34" charset="-120"/>
+              </a:rPr>
+              <a:t>株式会社ランデックス ／ 〇〇サロン様 ご提案資料</a:t>
+            </a:r>
+            <a:endParaRPr lang="en-US" sz="950" dirty="0"/>
+          </a:p>
+        </p:txBody>
+      </p:sp>
+      <p:sp>
+        <p:nvSpPr>
+          <p:cNvPr id="18" name="Text 16"/>
           <p:cNvSpPr/>
           <p:nvPr/>
         </p:nvSpPr>
@@ -4935,9 +4591,9 @@
               <a:buNone/>
             </a:pPr>
             <a:r>
-              <a:rPr lang="en-US" sz="900" dirty="0">
-                <a:solidFill>
-                  <a:srgbClr val="5A6B7D"/>
+              <a:rPr lang="en-US" sz="950" dirty="0">
+                <a:solidFill>
+                  <a:srgbClr val="5C6E69"/>
                 </a:solidFill>
                 <a:latin typeface="Calibri" pitchFamily="34" charset="0"/>
                 <a:ea typeface="Calibri" pitchFamily="34" charset="-122"/>
@@ -4945,7 +4601,7 @@
               </a:rPr>
               <a:t>5 / 6</a:t>
             </a:r>
-            <a:endParaRPr lang="en-US" sz="900" dirty="0"/>
+            <a:endParaRPr lang="en-US" sz="950" dirty="0"/>
           </a:p>
         </p:txBody>
       </p:sp>
@@ -4963,7 +4619,7 @@
     <p:bg>
       <p:bgPr>
         <a:solidFill>
-          <a:srgbClr val="0F1F33"/>
+          <a:srgbClr val="0F3D38"/>
         </a:solidFill>
       </p:bgPr>
     </p:bg>
@@ -5008,13 +4664,13 @@
             <a:r>
               <a:rPr lang="en-US" sz="1100" b="1" spc="100" kern="0" dirty="0">
                 <a:solidFill>
-                  <a:srgbClr val="1FA795"/>
-                </a:solidFill>
-                <a:latin typeface="Calibri" pitchFamily="34" charset="0"/>
-                <a:ea typeface="Calibri" pitchFamily="34" charset="-122"/>
-                <a:cs typeface="Calibri" pitchFamily="34" charset="-120"/>
-              </a:rPr>
-              <a:t>SLIDE 6 ・ 今後の進め方</a:t>
+                  <a:srgbClr val="E6C877"/>
+                </a:solidFill>
+                <a:latin typeface="Calibri" pitchFamily="34" charset="0"/>
+                <a:ea typeface="Calibri" pitchFamily="34" charset="-122"/>
+                <a:cs typeface="Calibri" pitchFamily="34" charset="-120"/>
+              </a:rPr>
+              <a:t>SLIDE 6</a:t>
             </a:r>
             <a:endParaRPr lang="en-US" sz="1100" dirty="0"/>
           </a:p>
@@ -5029,7 +4685,7 @@
         <p:spPr>
           <a:xfrm>
             <a:off x="731520" y="822960"/>
-            <a:ext cx="10515600" cy="731520"/>
+            <a:ext cx="10607040" cy="731520"/>
           </a:xfrm>
           <a:prstGeom prst="rect">
             <a:avLst/>
@@ -5053,7 +4709,7 @@
                 <a:ea typeface="Cambria" pitchFamily="34" charset="-122"/>
                 <a:cs typeface="Cambria" pitchFamily="34" charset="-120"/>
               </a:rPr>
-              <a:t>今後の進め方（Next Action）</a:t>
+              <a:t>まずは一度、お話しませんか。</a:t>
             </a:r>
             <a:endParaRPr lang="en-US" sz="3400" dirty="0"/>
           </a:p>
@@ -5061,34 +4717,73 @@
       </p:sp>
       <p:sp>
         <p:nvSpPr>
-          <p:cNvPr id="4" name="Shape 2"/>
-          <p:cNvSpPr/>
-          <p:nvPr/>
-        </p:nvSpPr>
-        <p:spPr>
-          <a:xfrm>
-            <a:off x="731520" y="1874520"/>
-            <a:ext cx="640080" cy="640080"/>
+          <p:cNvPr id="4" name="Text 2"/>
+          <p:cNvSpPr/>
+          <p:nvPr/>
+        </p:nvSpPr>
+        <p:spPr>
+          <a:xfrm>
+            <a:off x="749808" y="1600200"/>
+            <a:ext cx="10515600" cy="457200"/>
+          </a:xfrm>
+          <a:prstGeom prst="rect">
+            <a:avLst/>
+          </a:prstGeom>
+          <a:noFill/>
+          <a:ln/>
+        </p:spPr>
+        <p:txBody>
+          <a:bodyPr wrap="square" lIns="0" tIns="0" rIns="0" bIns="0" rtlCol="0" anchor="ctr"/>
+          <a:lstStyle/>
+          <a:p>
+            <a:pPr indent="0" marL="0">
+              <a:buNone/>
+            </a:pPr>
+            <a:r>
+              <a:rPr lang="en-US" sz="1450" dirty="0">
+                <a:solidFill>
+                  <a:srgbClr val="BFD6CF"/>
+                </a:solidFill>
+                <a:latin typeface="Calibri" pitchFamily="34" charset="0"/>
+                <a:ea typeface="Calibri" pitchFamily="34" charset="-122"/>
+                <a:cs typeface="Calibri" pitchFamily="34" charset="-120"/>
+              </a:rPr>
+              <a:t>いきなり契約ではありません。まずは顔を合わせて、できそうかどうかを一緒に確かめる。そこからで大丈夫です。</a:t>
+            </a:r>
+            <a:endParaRPr lang="en-US" sz="1450" dirty="0"/>
+          </a:p>
+        </p:txBody>
+      </p:sp>
+      <p:sp>
+        <p:nvSpPr>
+          <p:cNvPr id="5" name="Shape 3"/>
+          <p:cNvSpPr/>
+          <p:nvPr/>
+        </p:nvSpPr>
+        <p:spPr>
+          <a:xfrm>
+            <a:off x="731520" y="2286000"/>
+            <a:ext cx="603504" cy="603504"/>
           </a:xfrm>
           <a:prstGeom prst="ellipse">
             <a:avLst/>
           </a:prstGeom>
           <a:solidFill>
-            <a:srgbClr val="2E7DD1"/>
+            <a:srgbClr val="1E8878"/>
           </a:solidFill>
           <a:ln/>
         </p:spPr>
       </p:sp>
       <p:sp>
         <p:nvSpPr>
-          <p:cNvPr id="5" name="Text 3"/>
-          <p:cNvSpPr/>
-          <p:nvPr/>
-        </p:nvSpPr>
-        <p:spPr>
-          <a:xfrm>
-            <a:off x="731520" y="1874520"/>
-            <a:ext cx="640080" cy="640080"/>
+          <p:cNvPr id="6" name="Text 4"/>
+          <p:cNvSpPr/>
+          <p:nvPr/>
+        </p:nvSpPr>
+        <p:spPr>
+          <a:xfrm>
+            <a:off x="731520" y="2286000"/>
+            <a:ext cx="603504" cy="603504"/>
           </a:xfrm>
           <a:prstGeom prst="rect">
             <a:avLst/>
@@ -5104,7 +4799,7 @@
               <a:buNone/>
             </a:pPr>
             <a:r>
-              <a:rPr lang="en-US" sz="2400" b="1" dirty="0">
+              <a:rPr lang="en-US" sz="2200" b="1" dirty="0">
                 <a:solidFill>
                   <a:srgbClr val="FFFFFF"/>
                 </a:solidFill>
@@ -5114,20 +4809,20 @@
               </a:rPr>
               <a:t>1</a:t>
             </a:r>
-            <a:endParaRPr lang="en-US" sz="2400" dirty="0"/>
-          </a:p>
-        </p:txBody>
-      </p:sp>
-      <p:sp>
-        <p:nvSpPr>
-          <p:cNvPr id="6" name="Text 4"/>
-          <p:cNvSpPr/>
-          <p:nvPr/>
-        </p:nvSpPr>
-        <p:spPr>
-          <a:xfrm>
-            <a:off x="1600200" y="1828800"/>
-            <a:ext cx="9601200" cy="411480"/>
+            <a:endParaRPr lang="en-US" sz="2200" dirty="0"/>
+          </a:p>
+        </p:txBody>
+      </p:sp>
+      <p:sp>
+        <p:nvSpPr>
+          <p:cNvPr id="7" name="Text 5"/>
+          <p:cNvSpPr/>
+          <p:nvPr/>
+        </p:nvSpPr>
+        <p:spPr>
+          <a:xfrm>
+            <a:off x="1554480" y="2258568"/>
+            <a:ext cx="9784080" cy="384048"/>
           </a:xfrm>
           <a:prstGeom prst="rect">
             <a:avLst/>
@@ -5143,7 +4838,7 @@
               <a:buNone/>
             </a:pPr>
             <a:r>
-              <a:rPr lang="en-US" sz="1900" b="1" dirty="0">
+              <a:rPr lang="en-US" sz="1800" b="1" dirty="0">
                 <a:solidFill>
                   <a:srgbClr val="FFFFFF"/>
                 </a:solidFill>
@@ -5151,22 +4846,22 @@
                 <a:ea typeface="Cambria" pitchFamily="34" charset="-122"/>
                 <a:cs typeface="Cambria" pitchFamily="34" charset="-120"/>
               </a:rPr>
-              <a:t>専門家チームを確定</a:t>
-            </a:r>
-            <a:endParaRPr lang="en-US" sz="1900" dirty="0"/>
-          </a:p>
-        </p:txBody>
-      </p:sp>
-      <p:sp>
-        <p:nvSpPr>
-          <p:cNvPr id="7" name="Text 5"/>
-          <p:cNvSpPr/>
-          <p:nvPr/>
-        </p:nvSpPr>
-        <p:spPr>
-          <a:xfrm>
-            <a:off x="1600200" y="2240280"/>
-            <a:ext cx="9784080" cy="411480"/>
+              <a:t>まずはご面談</a:t>
+            </a:r>
+            <a:endParaRPr lang="en-US" sz="1800" dirty="0"/>
+          </a:p>
+        </p:txBody>
+      </p:sp>
+      <p:sp>
+        <p:nvSpPr>
+          <p:cNvPr id="8" name="Text 6"/>
+          <p:cNvSpPr/>
+          <p:nvPr/>
+        </p:nvSpPr>
+        <p:spPr>
+          <a:xfrm>
+            <a:off x="1554480" y="2633472"/>
+            <a:ext cx="9784080" cy="384048"/>
           </a:xfrm>
           <a:prstGeom prst="rect">
             <a:avLst/>
@@ -5182,50 +4877,50 @@
               <a:buNone/>
             </a:pPr>
             <a:r>
-              <a:rPr lang="en-US" sz="1350" dirty="0">
-                <a:solidFill>
-                  <a:srgbClr val="AFC0D4"/>
-                </a:solidFill>
-                <a:latin typeface="Calibri" pitchFamily="34" charset="0"/>
-                <a:ea typeface="Calibri" pitchFamily="34" charset="-122"/>
-                <a:cs typeface="Calibri" pitchFamily="34" charset="-120"/>
-              </a:rPr>
-              <a:t>弁護士・社労士・税理士にスキームの法務・税務レビューを依頼</a:t>
-            </a:r>
-            <a:endParaRPr lang="en-US" sz="1350" dirty="0"/>
-          </a:p>
-        </p:txBody>
-      </p:sp>
-      <p:sp>
-        <p:nvSpPr>
-          <p:cNvPr id="8" name="Shape 6"/>
-          <p:cNvSpPr/>
-          <p:nvPr/>
-        </p:nvSpPr>
-        <p:spPr>
-          <a:xfrm>
-            <a:off x="731520" y="2743200"/>
-            <a:ext cx="640080" cy="640080"/>
+              <a:rPr lang="en-US" sz="1300" dirty="0">
+                <a:solidFill>
+                  <a:srgbClr val="BFD6CF"/>
+                </a:solidFill>
+                <a:latin typeface="Calibri" pitchFamily="34" charset="0"/>
+                <a:ea typeface="Calibri" pitchFamily="34" charset="-122"/>
+                <a:cs typeface="Calibri" pitchFamily="34" charset="-120"/>
+              </a:rPr>
+              <a:t>お店の状況やお困りごとをお聞かせください</a:t>
+            </a:r>
+            <a:endParaRPr lang="en-US" sz="1300" dirty="0"/>
+          </a:p>
+        </p:txBody>
+      </p:sp>
+      <p:sp>
+        <p:nvSpPr>
+          <p:cNvPr id="9" name="Shape 7"/>
+          <p:cNvSpPr/>
+          <p:nvPr/>
+        </p:nvSpPr>
+        <p:spPr>
+          <a:xfrm>
+            <a:off x="731520" y="3127248"/>
+            <a:ext cx="603504" cy="603504"/>
           </a:xfrm>
           <a:prstGeom prst="ellipse">
             <a:avLst/>
           </a:prstGeom>
           <a:solidFill>
-            <a:srgbClr val="2E7DD1"/>
+            <a:srgbClr val="1E8878"/>
           </a:solidFill>
           <a:ln/>
         </p:spPr>
       </p:sp>
       <p:sp>
         <p:nvSpPr>
-          <p:cNvPr id="9" name="Text 7"/>
-          <p:cNvSpPr/>
-          <p:nvPr/>
-        </p:nvSpPr>
-        <p:spPr>
-          <a:xfrm>
-            <a:off x="731520" y="2743200"/>
-            <a:ext cx="640080" cy="640080"/>
+          <p:cNvPr id="10" name="Text 8"/>
+          <p:cNvSpPr/>
+          <p:nvPr/>
+        </p:nvSpPr>
+        <p:spPr>
+          <a:xfrm>
+            <a:off x="731520" y="3127248"/>
+            <a:ext cx="603504" cy="603504"/>
           </a:xfrm>
           <a:prstGeom prst="rect">
             <a:avLst/>
@@ -5241,7 +4936,7 @@
               <a:buNone/>
             </a:pPr>
             <a:r>
-              <a:rPr lang="en-US" sz="2400" b="1" dirty="0">
+              <a:rPr lang="en-US" sz="2200" b="1" dirty="0">
                 <a:solidFill>
                   <a:srgbClr val="FFFFFF"/>
                 </a:solidFill>
@@ -5251,20 +4946,20 @@
               </a:rPr>
               <a:t>2</a:t>
             </a:r>
-            <a:endParaRPr lang="en-US" sz="2400" dirty="0"/>
-          </a:p>
-        </p:txBody>
-      </p:sp>
-      <p:sp>
-        <p:nvSpPr>
-          <p:cNvPr id="10" name="Text 8"/>
-          <p:cNvSpPr/>
-          <p:nvPr/>
-        </p:nvSpPr>
-        <p:spPr>
-          <a:xfrm>
-            <a:off x="1600200" y="2697480"/>
-            <a:ext cx="9601200" cy="411480"/>
+            <a:endParaRPr lang="en-US" sz="2200" dirty="0"/>
+          </a:p>
+        </p:txBody>
+      </p:sp>
+      <p:sp>
+        <p:nvSpPr>
+          <p:cNvPr id="11" name="Text 9"/>
+          <p:cNvSpPr/>
+          <p:nvPr/>
+        </p:nvSpPr>
+        <p:spPr>
+          <a:xfrm>
+            <a:off x="1554480" y="3099816"/>
+            <a:ext cx="9784080" cy="384048"/>
           </a:xfrm>
           <a:prstGeom prst="rect">
             <a:avLst/>
@@ -5280,7 +4975,7 @@
               <a:buNone/>
             </a:pPr>
             <a:r>
-              <a:rPr lang="en-US" sz="1900" b="1" dirty="0">
+              <a:rPr lang="en-US" sz="1800" b="1" dirty="0">
                 <a:solidFill>
                   <a:srgbClr val="FFFFFF"/>
                 </a:solidFill>
@@ -5288,22 +4983,22 @@
                 <a:ea typeface="Cambria" pitchFamily="34" charset="-122"/>
                 <a:cs typeface="Cambria" pitchFamily="34" charset="-120"/>
               </a:rPr>
-              <a:t>リターンと出資条件を確定</a:t>
-            </a:r>
-            <a:endParaRPr lang="en-US" sz="1900" dirty="0"/>
-          </a:p>
-        </p:txBody>
-      </p:sp>
-      <p:sp>
-        <p:nvSpPr>
-          <p:cNvPr id="11" name="Text 9"/>
-          <p:cNvSpPr/>
-          <p:nvPr/>
-        </p:nvSpPr>
-        <p:spPr>
-          <a:xfrm>
-            <a:off x="1600200" y="3108960"/>
-            <a:ext cx="9784080" cy="411480"/>
+              <a:t>取り分・予算のすり合わせ</a:t>
+            </a:r>
+            <a:endParaRPr lang="en-US" sz="1800" dirty="0"/>
+          </a:p>
+        </p:txBody>
+      </p:sp>
+      <p:sp>
+        <p:nvSpPr>
+          <p:cNvPr id="12" name="Text 10"/>
+          <p:cNvSpPr/>
+          <p:nvPr/>
+        </p:nvSpPr>
+        <p:spPr>
+          <a:xfrm>
+            <a:off x="1554480" y="3474720"/>
+            <a:ext cx="9784080" cy="384048"/>
           </a:xfrm>
           <a:prstGeom prst="rect">
             <a:avLst/>
@@ -5319,50 +5014,50 @@
               <a:buNone/>
             </a:pPr>
             <a:r>
-              <a:rPr lang="en-US" sz="1350" dirty="0">
-                <a:solidFill>
-                  <a:srgbClr val="AFC0D4"/>
-                </a:solidFill>
-                <a:latin typeface="Calibri" pitchFamily="34" charset="0"/>
-                <a:ea typeface="Calibri" pitchFamily="34" charset="-122"/>
-                <a:cs typeface="Calibri" pitchFamily="34" charset="-120"/>
-              </a:rPr>
-              <a:t>成果報酬＋配当／分配、出資形態・出資比率・採用予算を決定</a:t>
-            </a:r>
-            <a:endParaRPr lang="en-US" sz="1350" dirty="0"/>
-          </a:p>
-        </p:txBody>
-      </p:sp>
-      <p:sp>
-        <p:nvSpPr>
-          <p:cNvPr id="12" name="Shape 10"/>
-          <p:cNvSpPr/>
-          <p:nvPr/>
-        </p:nvSpPr>
-        <p:spPr>
-          <a:xfrm>
-            <a:off x="731520" y="3611880"/>
-            <a:ext cx="640080" cy="640080"/>
+              <a:rPr lang="en-US" sz="1300" dirty="0">
+                <a:solidFill>
+                  <a:srgbClr val="BFD6CF"/>
+                </a:solidFill>
+                <a:latin typeface="Calibri" pitchFamily="34" charset="0"/>
+                <a:ea typeface="Calibri" pitchFamily="34" charset="-122"/>
+                <a:cs typeface="Calibri" pitchFamily="34" charset="-120"/>
+              </a:rPr>
+              <a:t>成果報酬や出資の条件を、納得いくまで相談</a:t>
+            </a:r>
+            <a:endParaRPr lang="en-US" sz="1300" dirty="0"/>
+          </a:p>
+        </p:txBody>
+      </p:sp>
+      <p:sp>
+        <p:nvSpPr>
+          <p:cNvPr id="13" name="Shape 11"/>
+          <p:cNvSpPr/>
+          <p:nvPr/>
+        </p:nvSpPr>
+        <p:spPr>
+          <a:xfrm>
+            <a:off x="731520" y="3968496"/>
+            <a:ext cx="603504" cy="603504"/>
           </a:xfrm>
           <a:prstGeom prst="ellipse">
             <a:avLst/>
           </a:prstGeom>
           <a:solidFill>
-            <a:srgbClr val="2E7DD1"/>
+            <a:srgbClr val="1E8878"/>
           </a:solidFill>
           <a:ln/>
         </p:spPr>
       </p:sp>
       <p:sp>
         <p:nvSpPr>
-          <p:cNvPr id="13" name="Text 11"/>
-          <p:cNvSpPr/>
-          <p:nvPr/>
-        </p:nvSpPr>
-        <p:spPr>
-          <a:xfrm>
-            <a:off x="731520" y="3611880"/>
-            <a:ext cx="640080" cy="640080"/>
+          <p:cNvPr id="14" name="Text 12"/>
+          <p:cNvSpPr/>
+          <p:nvPr/>
+        </p:nvSpPr>
+        <p:spPr>
+          <a:xfrm>
+            <a:off x="731520" y="3968496"/>
+            <a:ext cx="603504" cy="603504"/>
           </a:xfrm>
           <a:prstGeom prst="rect">
             <a:avLst/>
@@ -5378,7 +5073,7 @@
               <a:buNone/>
             </a:pPr>
             <a:r>
-              <a:rPr lang="en-US" sz="2400" b="1" dirty="0">
+              <a:rPr lang="en-US" sz="2200" b="1" dirty="0">
                 <a:solidFill>
                   <a:srgbClr val="FFFFFF"/>
                 </a:solidFill>
@@ -5388,20 +5083,20 @@
               </a:rPr>
               <a:t>3</a:t>
             </a:r>
-            <a:endParaRPr lang="en-US" sz="2400" dirty="0"/>
-          </a:p>
-        </p:txBody>
-      </p:sp>
-      <p:sp>
-        <p:nvSpPr>
-          <p:cNvPr id="14" name="Text 12"/>
-          <p:cNvSpPr/>
-          <p:nvPr/>
-        </p:nvSpPr>
-        <p:spPr>
-          <a:xfrm>
-            <a:off x="1600200" y="3566160"/>
-            <a:ext cx="9601200" cy="411480"/>
+            <a:endParaRPr lang="en-US" sz="2200" dirty="0"/>
+          </a:p>
+        </p:txBody>
+      </p:sp>
+      <p:sp>
+        <p:nvSpPr>
+          <p:cNvPr id="15" name="Text 13"/>
+          <p:cNvSpPr/>
+          <p:nvPr/>
+        </p:nvSpPr>
+        <p:spPr>
+          <a:xfrm>
+            <a:off x="1554480" y="3941064"/>
+            <a:ext cx="9784080" cy="384048"/>
           </a:xfrm>
           <a:prstGeom prst="rect">
             <a:avLst/>
@@ -5417,7 +5112,7 @@
               <a:buNone/>
             </a:pPr>
             <a:r>
-              <a:rPr lang="en-US" sz="1900" b="1" dirty="0">
+              <a:rPr lang="en-US" sz="1800" b="1" dirty="0">
                 <a:solidFill>
                   <a:srgbClr val="FFFFFF"/>
                 </a:solidFill>
@@ -5425,22 +5120,22 @@
                 <a:ea typeface="Cambria" pitchFamily="34" charset="-122"/>
                 <a:cs typeface="Cambria" pitchFamily="34" charset="-120"/>
               </a:rPr>
-              <a:t>契約を締結</a:t>
-            </a:r>
-            <a:endParaRPr lang="en-US" sz="1900" dirty="0"/>
-          </a:p>
-        </p:txBody>
-      </p:sp>
-      <p:sp>
-        <p:nvSpPr>
-          <p:cNvPr id="15" name="Text 13"/>
-          <p:cNvSpPr/>
-          <p:nvPr/>
-        </p:nvSpPr>
-        <p:spPr>
-          <a:xfrm>
-            <a:off x="1600200" y="3977640"/>
-            <a:ext cx="9784080" cy="411480"/>
+              <a:t>契約の締結</a:t>
+            </a:r>
+            <a:endParaRPr lang="en-US" sz="1800" dirty="0"/>
+          </a:p>
+        </p:txBody>
+      </p:sp>
+      <p:sp>
+        <p:nvSpPr>
+          <p:cNvPr id="16" name="Text 14"/>
+          <p:cNvSpPr/>
+          <p:nvPr/>
+        </p:nvSpPr>
+        <p:spPr>
+          <a:xfrm>
+            <a:off x="1554480" y="4315968"/>
+            <a:ext cx="9784080" cy="384048"/>
           </a:xfrm>
           <a:prstGeom prst="rect">
             <a:avLst/>
@@ -5456,50 +5151,50 @@
               <a:buNone/>
             </a:pPr>
             <a:r>
-              <a:rPr lang="en-US" sz="1350" dirty="0">
-                <a:solidFill>
-                  <a:srgbClr val="AFC0D4"/>
-                </a:solidFill>
-                <a:latin typeface="Calibri" pitchFamily="34" charset="0"/>
-                <a:ea typeface="Calibri" pitchFamily="34" charset="-122"/>
-                <a:cs typeface="Calibri" pitchFamily="34" charset="-120"/>
-              </a:rPr>
-              <a:t>レビュー結果を反映した出資／匿名組合／業務委託契約を締結</a:t>
-            </a:r>
-            <a:endParaRPr lang="en-US" sz="1350" dirty="0"/>
-          </a:p>
-        </p:txBody>
-      </p:sp>
-      <p:sp>
-        <p:nvSpPr>
-          <p:cNvPr id="16" name="Shape 14"/>
-          <p:cNvSpPr/>
-          <p:nvPr/>
-        </p:nvSpPr>
-        <p:spPr>
-          <a:xfrm>
-            <a:off x="731520" y="4480560"/>
-            <a:ext cx="640080" cy="640080"/>
+              <a:rPr lang="en-US" sz="1300" dirty="0">
+                <a:solidFill>
+                  <a:srgbClr val="BFD6CF"/>
+                </a:solidFill>
+                <a:latin typeface="Calibri" pitchFamily="34" charset="0"/>
+                <a:ea typeface="Calibri" pitchFamily="34" charset="-122"/>
+                <a:cs typeface="Calibri" pitchFamily="34" charset="-120"/>
+              </a:rPr>
+              <a:t>専門家の確認を経た契約書を取り交わし</a:t>
+            </a:r>
+            <a:endParaRPr lang="en-US" sz="1300" dirty="0"/>
+          </a:p>
+        </p:txBody>
+      </p:sp>
+      <p:sp>
+        <p:nvSpPr>
+          <p:cNvPr id="17" name="Shape 15"/>
+          <p:cNvSpPr/>
+          <p:nvPr/>
+        </p:nvSpPr>
+        <p:spPr>
+          <a:xfrm>
+            <a:off x="731520" y="4809744"/>
+            <a:ext cx="603504" cy="603504"/>
           </a:xfrm>
           <a:prstGeom prst="ellipse">
             <a:avLst/>
           </a:prstGeom>
           <a:solidFill>
-            <a:srgbClr val="1FA795"/>
+            <a:srgbClr val="BE9436"/>
           </a:solidFill>
           <a:ln/>
         </p:spPr>
       </p:sp>
       <p:sp>
         <p:nvSpPr>
-          <p:cNvPr id="17" name="Text 15"/>
-          <p:cNvSpPr/>
-          <p:nvPr/>
-        </p:nvSpPr>
-        <p:spPr>
-          <a:xfrm>
-            <a:off x="731520" y="4480560"/>
-            <a:ext cx="640080" cy="640080"/>
+          <p:cNvPr id="18" name="Text 16"/>
+          <p:cNvSpPr/>
+          <p:nvPr/>
+        </p:nvSpPr>
+        <p:spPr>
+          <a:xfrm>
+            <a:off x="731520" y="4809744"/>
+            <a:ext cx="603504" cy="603504"/>
           </a:xfrm>
           <a:prstGeom prst="rect">
             <a:avLst/>
@@ -5515,7 +5210,7 @@
               <a:buNone/>
             </a:pPr>
             <a:r>
-              <a:rPr lang="en-US" sz="2400" b="1" dirty="0">
+              <a:rPr lang="en-US" sz="2200" b="1" dirty="0">
                 <a:solidFill>
                   <a:srgbClr val="FFFFFF"/>
                 </a:solidFill>
@@ -5525,20 +5220,20 @@
               </a:rPr>
               <a:t>4</a:t>
             </a:r>
-            <a:endParaRPr lang="en-US" sz="2400" dirty="0"/>
-          </a:p>
-        </p:txBody>
-      </p:sp>
-      <p:sp>
-        <p:nvSpPr>
-          <p:cNvPr id="18" name="Text 16"/>
-          <p:cNvSpPr/>
-          <p:nvPr/>
-        </p:nvSpPr>
-        <p:spPr>
-          <a:xfrm>
-            <a:off x="1600200" y="4434840"/>
-            <a:ext cx="9601200" cy="411480"/>
+            <a:endParaRPr lang="en-US" sz="2200" dirty="0"/>
+          </a:p>
+        </p:txBody>
+      </p:sp>
+      <p:sp>
+        <p:nvSpPr>
+          <p:cNvPr id="19" name="Text 17"/>
+          <p:cNvSpPr/>
+          <p:nvPr/>
+        </p:nvSpPr>
+        <p:spPr>
+          <a:xfrm>
+            <a:off x="1554480" y="4782312"/>
+            <a:ext cx="9784080" cy="384048"/>
           </a:xfrm>
           <a:prstGeom prst="rect">
             <a:avLst/>
@@ -5554,7 +5249,7 @@
               <a:buNone/>
             </a:pPr>
             <a:r>
-              <a:rPr lang="en-US" sz="1900" b="1" dirty="0">
+              <a:rPr lang="en-US" sz="1800" b="1" dirty="0">
                 <a:solidFill>
                   <a:srgbClr val="FFFFFF"/>
                 </a:solidFill>
@@ -5564,20 +5259,20 @@
               </a:rPr>
               <a:t>採用スタート</a:t>
             </a:r>
-            <a:endParaRPr lang="en-US" sz="1900" dirty="0"/>
-          </a:p>
-        </p:txBody>
-      </p:sp>
-      <p:sp>
-        <p:nvSpPr>
-          <p:cNvPr id="19" name="Text 17"/>
-          <p:cNvSpPr/>
-          <p:nvPr/>
-        </p:nvSpPr>
-        <p:spPr>
-          <a:xfrm>
-            <a:off x="1600200" y="4846320"/>
-            <a:ext cx="9784080" cy="411480"/>
+            <a:endParaRPr lang="en-US" sz="1800" dirty="0"/>
+          </a:p>
+        </p:txBody>
+      </p:sp>
+      <p:sp>
+        <p:nvSpPr>
+          <p:cNvPr id="20" name="Text 18"/>
+          <p:cNvSpPr/>
+          <p:nvPr/>
+        </p:nvSpPr>
+        <p:spPr>
+          <a:xfrm>
+            <a:off x="1554480" y="5157216"/>
+            <a:ext cx="9784080" cy="384048"/>
           </a:xfrm>
           <a:prstGeom prst="rect">
             <a:avLst/>
@@ -5593,46 +5288,19 @@
               <a:buNone/>
             </a:pPr>
             <a:r>
-              <a:rPr lang="en-US" sz="1350" dirty="0">
-                <a:solidFill>
-                  <a:srgbClr val="AFC0D4"/>
-                </a:solidFill>
-                <a:latin typeface="Calibri" pitchFamily="34" charset="0"/>
-                <a:ea typeface="Calibri" pitchFamily="34" charset="-122"/>
-                <a:cs typeface="Calibri" pitchFamily="34" charset="-120"/>
-              </a:rPr>
-              <a:t>求人票に雇用主（〇〇サロン）と労働条件を正確に明記して入稿</a:t>
-            </a:r>
-            <a:endParaRPr lang="en-US" sz="1350" dirty="0"/>
-          </a:p>
-        </p:txBody>
-      </p:sp>
-      <p:sp>
-        <p:nvSpPr>
-          <p:cNvPr id="20" name="Shape 18"/>
-          <p:cNvSpPr/>
-          <p:nvPr/>
-        </p:nvSpPr>
-        <p:spPr>
-          <a:xfrm>
-            <a:off x="731520" y="5486400"/>
-            <a:ext cx="10698480" cy="777240"/>
-          </a:xfrm>
-          <a:prstGeom prst="roundRect">
-            <a:avLst>
-              <a:gd name="adj" fmla="val 7059"/>
-            </a:avLst>
-          </a:prstGeom>
-          <a:solidFill>
-            <a:srgbClr val="1B3350"/>
-          </a:solidFill>
-          <a:ln w="12700">
-            <a:solidFill>
-              <a:srgbClr val="2E4B6B"/>
-            </a:solidFill>
-            <a:prstDash val="solid"/>
-          </a:ln>
-        </p:spPr>
+              <a:rPr lang="en-US" sz="1300" dirty="0">
+                <a:solidFill>
+                  <a:srgbClr val="BFD6CF"/>
+                </a:solidFill>
+                <a:latin typeface="Calibri" pitchFamily="34" charset="0"/>
+                <a:ea typeface="Calibri" pitchFamily="34" charset="-122"/>
+                <a:cs typeface="Calibri" pitchFamily="34" charset="-120"/>
+              </a:rPr>
+              <a:t>一緒に募集を出して、いい仲間を集めます</a:t>
+            </a:r>
+            <a:endParaRPr lang="en-US" sz="1300" dirty="0"/>
+          </a:p>
+        </p:txBody>
       </p:sp>
       <p:sp>
         <p:nvSpPr>
@@ -5642,54 +5310,34 @@
         </p:nvSpPr>
         <p:spPr>
           <a:xfrm>
-            <a:off x="1005840" y="5532120"/>
-            <a:ext cx="10149840" cy="685800"/>
-          </a:xfrm>
-          <a:prstGeom prst="rect">
-            <a:avLst/>
-          </a:prstGeom>
-          <a:noFill/>
-          <a:ln/>
-        </p:spPr>
-        <p:txBody>
-          <a:bodyPr wrap="square" lIns="0" tIns="0" rIns="0" bIns="0" rtlCol="0" anchor="ctr"/>
-          <a:lstStyle/>
-          <a:p>
-            <a:pPr indent="0" marL="0">
-              <a:lnSpc>
-                <a:spcPts val="1800"/>
-              </a:lnSpc>
-              <a:buNone/>
-            </a:pPr>
-            <a:r>
-              <a:rPr lang="en-US" sz="1350" b="1" dirty="0">
-                <a:solidFill>
-                  <a:srgbClr val="FFFFFF"/>
-                </a:solidFill>
-                <a:latin typeface="Calibri" pitchFamily="34" charset="0"/>
-                <a:ea typeface="Calibri" pitchFamily="34" charset="-122"/>
-                <a:cs typeface="Calibri" pitchFamily="34" charset="-120"/>
-              </a:rPr>
-              <a:t>各ステップは専門家の確認を通したうえで進めます。</a:t>
-            </a:r>
-            <a:pPr indent="0" marL="0">
-              <a:lnSpc>
-                <a:spcPts val="1800"/>
-              </a:lnSpc>
-              <a:buNone/>
-            </a:pPr>
-            <a:r>
-              <a:rPr lang="en-US" sz="1350" dirty="0">
-                <a:solidFill>
-                  <a:srgbClr val="AFC0D4"/>
-                </a:solidFill>
-                <a:latin typeface="Calibri" pitchFamily="34" charset="0"/>
-                <a:ea typeface="Calibri" pitchFamily="34" charset="-122"/>
-                <a:cs typeface="Calibri" pitchFamily="34" charset="-120"/>
-              </a:rPr>
-              <a:t>合意事項は都度書面化し、根拠が残る形で運用します。</a:t>
-            </a:r>
-            <a:endParaRPr lang="en-US" sz="1350" dirty="0"/>
+            <a:off x="731520" y="5806440"/>
+            <a:ext cx="10698480" cy="548640"/>
+          </a:xfrm>
+          <a:prstGeom prst="rect">
+            <a:avLst/>
+          </a:prstGeom>
+          <a:noFill/>
+          <a:ln/>
+        </p:spPr>
+        <p:txBody>
+          <a:bodyPr wrap="square" lIns="0" tIns="0" rIns="0" bIns="0" rtlCol="0" anchor="ctr"/>
+          <a:lstStyle/>
+          <a:p>
+            <a:pPr algn="ctr" indent="0" marL="0">
+              <a:buNone/>
+            </a:pPr>
+            <a:r>
+              <a:rPr lang="en-US" sz="2200" b="1" dirty="0">
+                <a:solidFill>
+                  <a:srgbClr val="E6C877"/>
+                </a:solidFill>
+                <a:latin typeface="Cambria" pitchFamily="34" charset="0"/>
+                <a:ea typeface="Cambria" pitchFamily="34" charset="-122"/>
+                <a:cs typeface="Cambria" pitchFamily="34" charset="-120"/>
+              </a:rPr>
+              <a:t>一緒に、いいチームをつくりましょう。</a:t>
+            </a:r>
+            <a:endParaRPr lang="en-US" sz="2200" dirty="0"/>
           </a:p>
         </p:txBody>
       </p:sp>
